--- a/docs/Defensa_TFM_Clinica_Neclatrony.pptx
+++ b/docs/Defensa_TFM_Clinica_Neclatrony.pptx
@@ -6,15 +6,15 @@
   </p:sldMasterIdLst>
   <p:sldIdLst>
     <p:sldId id="256" r:id="rId7"/>
-    <p:sldId id="257" r:id="rId8"/>
-    <p:sldId id="258" r:id="rId9"/>
-    <p:sldId id="259" r:id="rId10"/>
-    <p:sldId id="260" r:id="rId11"/>
-    <p:sldId id="261" r:id="rId12"/>
-    <p:sldId id="262" r:id="rId13"/>
-    <p:sldId id="263" r:id="rId14"/>
-    <p:sldId id="264" r:id="rId15"/>
-    <p:sldId id="265" r:id="rId16"/>
+    <p:sldId id="257" r:id="rId9"/>
+    <p:sldId id="258" r:id="rId10"/>
+    <p:sldId id="259" r:id="rId11"/>
+    <p:sldId id="260" r:id="rId12"/>
+    <p:sldId id="261" r:id="rId13"/>
+    <p:sldId id="262" r:id="rId14"/>
+    <p:sldId id="263" r:id="rId15"/>
+    <p:sldId id="264" r:id="rId16"/>
+    <p:sldId id="265" r:id="rId17"/>
   </p:sldIdLst>
   <p:sldSz cx="12191695" cy="6858000" type="screen4x3"/>
   <p:notesSz cx="6858000" cy="9144000"/>
@@ -114,6 +114,1527 @@
     </a:lvl9pPr>
   </p:defaultTextStyle>
 </p:presentation>
+</file>
+
+<file path=ppt/notesMasters/notesMaster1.xml><?xml version="1.0" encoding="utf-8"?>
+<p:notesMaster xmlns:a="http://schemas.openxmlformats.org/drawingml/2006/main" xmlns:p="http://schemas.openxmlformats.org/presentationml/2006/main" xmlns:r="http://schemas.openxmlformats.org/officeDocument/2006/relationships">
+  <p:cSld>
+    <p:bg>
+      <p:bgRef idx="1001">
+        <a:schemeClr val="bg1"/>
+      </p:bgRef>
+    </p:bg>
+    <p:spTree>
+      <p:nvGrpSpPr>
+        <p:cNvPr id="1" name=""/>
+        <p:cNvGrpSpPr/>
+        <p:nvPr/>
+      </p:nvGrpSpPr>
+      <p:grpSpPr>
+        <a:xfrm>
+          <a:off x="0" y="0"/>
+          <a:ext cx="0" cy="0"/>
+          <a:chOff x="0" y="0"/>
+          <a:chExt cx="0" cy="0"/>
+        </a:xfrm>
+      </p:grpSpPr>
+      <p:sp>
+        <p:nvSpPr>
+          <p:cNvPr id="2" name="Header Placeholder 1"/>
+          <p:cNvSpPr>
+            <a:spLocks noGrp="1"/>
+          </p:cNvSpPr>
+          <p:nvPr>
+            <p:ph type="hdr" sz="quarter"/>
+          </p:nvPr>
+        </p:nvSpPr>
+        <p:spPr>
+          <a:xfrm>
+            <a:off x="0" y="0"/>
+            <a:ext cx="2971800" cy="457200"/>
+          </a:xfrm>
+          <a:prstGeom prst="rect">
+            <a:avLst/>
+          </a:prstGeom>
+        </p:spPr>
+        <p:txBody>
+          <a:bodyPr vert="horz" lIns="91440" tIns="45720" rIns="91440" bIns="45720" rtlCol="0"/>
+          <a:lstStyle>
+            <a:lvl1pPr algn="l">
+              <a:defRPr sz="1200"/>
+            </a:lvl1pPr>
+          </a:lstStyle>
+          <a:p>
+            <a:endParaRPr lang="en-US"/>
+          </a:p>
+        </p:txBody>
+      </p:sp>
+      <p:sp>
+        <p:nvSpPr>
+          <p:cNvPr id="3" name="Date Placeholder 2"/>
+          <p:cNvSpPr>
+            <a:spLocks noGrp="1"/>
+          </p:cNvSpPr>
+          <p:nvPr>
+            <p:ph type="dt" idx="1"/>
+          </p:nvPr>
+        </p:nvSpPr>
+        <p:spPr>
+          <a:xfrm>
+            <a:off x="3884613" y="0"/>
+            <a:ext cx="2971800" cy="457200"/>
+          </a:xfrm>
+          <a:prstGeom prst="rect">
+            <a:avLst/>
+          </a:prstGeom>
+        </p:spPr>
+        <p:txBody>
+          <a:bodyPr vert="horz" lIns="91440" tIns="45720" rIns="91440" bIns="45720" rtlCol="0"/>
+          <a:lstStyle>
+            <a:lvl1pPr algn="r">
+              <a:defRPr sz="1200"/>
+            </a:lvl1pPr>
+          </a:lstStyle>
+          <a:p>
+            <a:fld id="{0F89C1C7-3DCD-1040-A9CF-14679D8B5DDD}" type="datetimeFigureOut">
+              <a:rPr lang="en-US" smtClean="0"/>
+              <a:t>10/17/16</a:t>
+            </a:fld>
+            <a:endParaRPr lang="en-US"/>
+          </a:p>
+        </p:txBody>
+      </p:sp>
+      <p:sp>
+        <p:nvSpPr>
+          <p:cNvPr id="4" name="Slide Image Placeholder 3"/>
+          <p:cNvSpPr>
+            <a:spLocks noGrp="1" noRot="1" noChangeAspect="1"/>
+          </p:cNvSpPr>
+          <p:nvPr>
+            <p:ph type="sldImg" idx="2"/>
+          </p:nvPr>
+        </p:nvSpPr>
+        <p:spPr>
+          <a:xfrm>
+            <a:off x="1143000" y="685800"/>
+            <a:ext cx="4572000" cy="3429000"/>
+          </a:xfrm>
+          <a:prstGeom prst="rect">
+            <a:avLst/>
+          </a:prstGeom>
+          <a:noFill/>
+          <a:ln w="12700">
+            <a:solidFill>
+              <a:prstClr val="black"/>
+            </a:solidFill>
+          </a:ln>
+        </p:spPr>
+        <p:txBody>
+          <a:bodyPr vert="horz" lIns="91440" tIns="45720" rIns="91440" bIns="45720" rtlCol="0" anchor="ctr"/>
+          <a:lstStyle/>
+          <a:p>
+            <a:endParaRPr lang="en-US"/>
+          </a:p>
+        </p:txBody>
+      </p:sp>
+      <p:sp>
+        <p:nvSpPr>
+          <p:cNvPr id="5" name="Notes Placeholder 4"/>
+          <p:cNvSpPr>
+            <a:spLocks noGrp="1"/>
+          </p:cNvSpPr>
+          <p:nvPr>
+            <p:ph type="body" sz="quarter" idx="3"/>
+          </p:nvPr>
+        </p:nvSpPr>
+        <p:spPr>
+          <a:xfrm>
+            <a:off x="685800" y="4343400"/>
+            <a:ext cx="5486400" cy="4114800"/>
+          </a:xfrm>
+          <a:prstGeom prst="rect">
+            <a:avLst/>
+          </a:prstGeom>
+        </p:spPr>
+        <p:txBody>
+          <a:bodyPr vert="horz" lIns="91440" tIns="45720" rIns="91440" bIns="45720" rtlCol="0"/>
+          <a:lstStyle/>
+          <a:p>
+            <a:pPr lvl="0"/>
+            <a:r>
+              <a:rPr lang="en-US" smtClean="0"/>
+              <a:t>Click to edit Master text styles</a:t>
+            </a:r>
+          </a:p>
+          <a:p>
+            <a:pPr lvl="1"/>
+            <a:r>
+              <a:rPr lang="en-US" smtClean="0"/>
+              <a:t>Second level</a:t>
+            </a:r>
+          </a:p>
+          <a:p>
+            <a:pPr lvl="2"/>
+            <a:r>
+              <a:rPr lang="en-US" smtClean="0"/>
+              <a:t>Third level</a:t>
+            </a:r>
+          </a:p>
+          <a:p>
+            <a:pPr lvl="3"/>
+            <a:r>
+              <a:rPr lang="en-US" smtClean="0"/>
+              <a:t>Fourth level</a:t>
+            </a:r>
+          </a:p>
+          <a:p>
+            <a:pPr lvl="4"/>
+            <a:r>
+              <a:rPr lang="en-US" smtClean="0"/>
+              <a:t>Fifth level</a:t>
+            </a:r>
+            <a:endParaRPr lang="en-US"/>
+          </a:p>
+        </p:txBody>
+      </p:sp>
+      <p:sp>
+        <p:nvSpPr>
+          <p:cNvPr id="6" name="Footer Placeholder 5"/>
+          <p:cNvSpPr>
+            <a:spLocks noGrp="1"/>
+          </p:cNvSpPr>
+          <p:nvPr>
+            <p:ph type="ftr" sz="quarter" idx="4"/>
+          </p:nvPr>
+        </p:nvSpPr>
+        <p:spPr>
+          <a:xfrm>
+            <a:off x="0" y="8685213"/>
+            <a:ext cx="2971800" cy="457200"/>
+          </a:xfrm>
+          <a:prstGeom prst="rect">
+            <a:avLst/>
+          </a:prstGeom>
+        </p:spPr>
+        <p:txBody>
+          <a:bodyPr vert="horz" lIns="91440" tIns="45720" rIns="91440" bIns="45720" rtlCol="0" anchor="b"/>
+          <a:lstStyle>
+            <a:lvl1pPr algn="l">
+              <a:defRPr sz="1200"/>
+            </a:lvl1pPr>
+          </a:lstStyle>
+          <a:p>
+            <a:endParaRPr lang="en-US"/>
+          </a:p>
+        </p:txBody>
+      </p:sp>
+      <p:sp>
+        <p:nvSpPr>
+          <p:cNvPr id="7" name="Slide Number Placeholder 6"/>
+          <p:cNvSpPr>
+            <a:spLocks noGrp="1"/>
+          </p:cNvSpPr>
+          <p:nvPr>
+            <p:ph type="sldNum" sz="quarter" idx="5"/>
+          </p:nvPr>
+        </p:nvSpPr>
+        <p:spPr>
+          <a:xfrm>
+            <a:off x="3884613" y="8685213"/>
+            <a:ext cx="2971800" cy="457200"/>
+          </a:xfrm>
+          <a:prstGeom prst="rect">
+            <a:avLst/>
+          </a:prstGeom>
+        </p:spPr>
+        <p:txBody>
+          <a:bodyPr vert="horz" lIns="91440" tIns="45720" rIns="91440" bIns="45720" rtlCol="0" anchor="b"/>
+          <a:lstStyle>
+            <a:lvl1pPr algn="r">
+              <a:defRPr sz="1200"/>
+            </a:lvl1pPr>
+          </a:lstStyle>
+          <a:p>
+            <a:fld id="{BB5E49A5-4136-284D-997B-48E1D791AD67}" type="slidenum">
+              <a:rPr lang="en-US" smtClean="0"/>
+              <a:t>‹#›</a:t>
+            </a:fld>
+            <a:endParaRPr lang="en-US"/>
+          </a:p>
+        </p:txBody>
+      </p:sp>
+    </p:spTree>
+    <p:extLst>
+      <p:ext uri="{BB962C8B-B14F-4D97-AF65-F5344CB8AC3E}">
+        <p14:creationId xmlns:p14="http://schemas.microsoft.com/office/powerpoint/2010/main" val="2623252185"/>
+      </p:ext>
+    </p:extLst>
+  </p:cSld>
+  <p:clrMap bg1="lt1" tx1="dk1" bg2="lt2" tx2="dk2" accent1="accent1" accent2="accent2" accent3="accent3" accent4="accent4" accent5="accent5" accent6="accent6" hlink="hlink" folHlink="folHlink"/>
+  <p:notesStyle>
+    <a:lvl1pPr marL="0" algn="l" defTabSz="457200" rtl="0" eaLnBrk="1" latinLnBrk="0" hangingPunct="1">
+      <a:defRPr sz="1200" kern="1200">
+        <a:solidFill>
+          <a:schemeClr val="tx1"/>
+        </a:solidFill>
+        <a:latin typeface="+mn-lt"/>
+        <a:ea typeface="+mn-ea"/>
+        <a:cs typeface="+mn-cs"/>
+      </a:defRPr>
+    </a:lvl1pPr>
+    <a:lvl2pPr marL="457200" algn="l" defTabSz="457200" rtl="0" eaLnBrk="1" latinLnBrk="0" hangingPunct="1">
+      <a:defRPr sz="1200" kern="1200">
+        <a:solidFill>
+          <a:schemeClr val="tx1"/>
+        </a:solidFill>
+        <a:latin typeface="+mn-lt"/>
+        <a:ea typeface="+mn-ea"/>
+        <a:cs typeface="+mn-cs"/>
+      </a:defRPr>
+    </a:lvl2pPr>
+    <a:lvl3pPr marL="914400" algn="l" defTabSz="457200" rtl="0" eaLnBrk="1" latinLnBrk="0" hangingPunct="1">
+      <a:defRPr sz="1200" kern="1200">
+        <a:solidFill>
+          <a:schemeClr val="tx1"/>
+        </a:solidFill>
+        <a:latin typeface="+mn-lt"/>
+        <a:ea typeface="+mn-ea"/>
+        <a:cs typeface="+mn-cs"/>
+      </a:defRPr>
+    </a:lvl3pPr>
+    <a:lvl4pPr marL="1371600" algn="l" defTabSz="457200" rtl="0" eaLnBrk="1" latinLnBrk="0" hangingPunct="1">
+      <a:defRPr sz="1200" kern="1200">
+        <a:solidFill>
+          <a:schemeClr val="tx1"/>
+        </a:solidFill>
+        <a:latin typeface="+mn-lt"/>
+        <a:ea typeface="+mn-ea"/>
+        <a:cs typeface="+mn-cs"/>
+      </a:defRPr>
+    </a:lvl4pPr>
+    <a:lvl5pPr marL="1828800" algn="l" defTabSz="457200" rtl="0" eaLnBrk="1" latinLnBrk="0" hangingPunct="1">
+      <a:defRPr sz="1200" kern="1200">
+        <a:solidFill>
+          <a:schemeClr val="tx1"/>
+        </a:solidFill>
+        <a:latin typeface="+mn-lt"/>
+        <a:ea typeface="+mn-ea"/>
+        <a:cs typeface="+mn-cs"/>
+      </a:defRPr>
+    </a:lvl5pPr>
+    <a:lvl6pPr marL="2286000" algn="l" defTabSz="457200" rtl="0" eaLnBrk="1" latinLnBrk="0" hangingPunct="1">
+      <a:defRPr sz="1200" kern="1200">
+        <a:solidFill>
+          <a:schemeClr val="tx1"/>
+        </a:solidFill>
+        <a:latin typeface="+mn-lt"/>
+        <a:ea typeface="+mn-ea"/>
+        <a:cs typeface="+mn-cs"/>
+      </a:defRPr>
+    </a:lvl6pPr>
+    <a:lvl7pPr marL="2743200" algn="l" defTabSz="457200" rtl="0" eaLnBrk="1" latinLnBrk="0" hangingPunct="1">
+      <a:defRPr sz="1200" kern="1200">
+        <a:solidFill>
+          <a:schemeClr val="tx1"/>
+        </a:solidFill>
+        <a:latin typeface="+mn-lt"/>
+        <a:ea typeface="+mn-ea"/>
+        <a:cs typeface="+mn-cs"/>
+      </a:defRPr>
+    </a:lvl7pPr>
+    <a:lvl8pPr marL="3200400" algn="l" defTabSz="457200" rtl="0" eaLnBrk="1" latinLnBrk="0" hangingPunct="1">
+      <a:defRPr sz="1200" kern="1200">
+        <a:solidFill>
+          <a:schemeClr val="tx1"/>
+        </a:solidFill>
+        <a:latin typeface="+mn-lt"/>
+        <a:ea typeface="+mn-ea"/>
+        <a:cs typeface="+mn-cs"/>
+      </a:defRPr>
+    </a:lvl8pPr>
+    <a:lvl9pPr marL="3657600" algn="l" defTabSz="457200" rtl="0" eaLnBrk="1" latinLnBrk="0" hangingPunct="1">
+      <a:defRPr sz="1200" kern="1200">
+        <a:solidFill>
+          <a:schemeClr val="tx1"/>
+        </a:solidFill>
+        <a:latin typeface="+mn-lt"/>
+        <a:ea typeface="+mn-ea"/>
+        <a:cs typeface="+mn-cs"/>
+      </a:defRPr>
+    </a:lvl9pPr>
+  </p:notesStyle>
+</p:notesMaster>
+</file>
+
+<file path=ppt/notesSlides/notesSlide1.xml><?xml version="1.0" encoding="utf-8"?>
+<p:notes xmlns:a="http://schemas.openxmlformats.org/drawingml/2006/main" xmlns:p="http://schemas.openxmlformats.org/presentationml/2006/main" xmlns:r="http://schemas.openxmlformats.org/officeDocument/2006/relationships">
+  <p:cSld>
+    <p:spTree>
+      <p:nvGrpSpPr>
+        <p:cNvPr id="1" name=""/>
+        <p:cNvGrpSpPr/>
+        <p:nvPr/>
+      </p:nvGrpSpPr>
+      <p:grpSpPr>
+        <a:xfrm>
+          <a:off x="0" y="0"/>
+          <a:ext cx="0" cy="0"/>
+          <a:chOff x="0" y="0"/>
+          <a:chExt cx="0" cy="0"/>
+        </a:xfrm>
+      </p:grpSpPr>
+      <p:sp>
+        <p:nvSpPr>
+          <p:cNvPr id="2" name="Slide Image Placeholder 1"/>
+          <p:cNvSpPr>
+            <a:spLocks noGrp="1"/>
+          </p:cNvSpPr>
+          <p:nvPr>
+            <p:ph type="sldImg" idx="2"/>
+          </p:nvPr>
+        </p:nvSpPr>
+        <p:spPr/>
+      </p:sp>
+      <p:sp>
+        <p:nvSpPr>
+          <p:cNvPr id="3" name="Notes Placeholder 2"/>
+          <p:cNvSpPr>
+            <a:spLocks noGrp="1"/>
+          </p:cNvSpPr>
+          <p:nvPr>
+            <p:ph type="body" idx="3" sz="quarter"/>
+          </p:nvPr>
+        </p:nvSpPr>
+        <p:spPr/>
+        <p:txBody>
+          <a:bodyPr/>
+          <a:lstStyle/>
+          <a:p>
+            <a:r>
+              <a:t>[TIEMPO SUGERIDO: 0:30 MINUTOS]</a:t>
+            </a:r>
+          </a:p>
+          <a:p/>
+          <a:p>
+            <a:r>
+              <a:t>OBJETIVO DE LA DIAPOSITIVA:</a:t>
+            </a:r>
+          </a:p>
+          <a:p>
+            <a:r>
+              <a:t>Presentación formal, generar impacto y posicionar el proyecto como una solución empresarial real.</a:t>
+            </a:r>
+          </a:p>
+          <a:p/>
+          <a:p>
+            <a:r>
+              <a:t>QUÉ DECIR EN LA PRESENTACIÓN:</a:t>
+            </a:r>
+          </a:p>
+          <a:p>
+            <a:r>
+              <a:t>«Buenos días, miembros del tribunal evaluador. Soy Sabrina Esposito y tengo el agrado de presentar mi Trabajo Final de Máster: un Sistema Multiagente de Atención Omnicanal e Hiperautomatización Clínica aplicada a la Clínica Dental Neclatrony.</a:t>
+            </a:r>
+          </a:p>
+          <a:p/>
+          <a:p>
+            <a:r>
+              <a:t>El objetivo central de este proyecto es resolver una problemática endémica en el sector sanitario: la saturación de las recepciones, la pérdida de pacientes fuera de horario y la rigidez de los sistemas ERP médicos legados que carecen de APIs modernas. </a:t>
+            </a:r>
+          </a:p>
+          <a:p/>
+          <a:p>
+            <a:r>
+              <a:t>Para resolverlo, hemos implementado una solución de hiperautomatización integral basada en el framework WAT de EBIS, combinando la inteligencia cognitiva de OpenAI GPT-4o, la orquestación centralizada en n8n, la persistencia relacional y vectorial en Supabase, y la automatización robótica de procesos desatendida mediante UiPath sobre el ERP clínico.»</a:t>
+            </a:r>
+          </a:p>
+        </p:txBody>
+      </p:sp>
+      <p:sp>
+        <p:nvSpPr>
+          <p:cNvPr id="4" name="Slide Number Placeholder 3"/>
+          <p:cNvSpPr>
+            <a:spLocks noGrp="1"/>
+          </p:cNvSpPr>
+          <p:nvPr>
+            <p:ph type="sldNum" idx="5" sz="quarter"/>
+          </p:nvPr>
+        </p:nvSpPr>
+        <p:spPr/>
+      </p:sp>
+    </p:spTree>
+  </p:cSld>
+  <p:clrMapOvr>
+    <a:masterClrMapping/>
+  </p:clrMapOvr>
+</p:notes>
+</file>
+
+<file path=ppt/notesSlides/notesSlide10.xml><?xml version="1.0" encoding="utf-8"?>
+<p:notes xmlns:a="http://schemas.openxmlformats.org/drawingml/2006/main" xmlns:p="http://schemas.openxmlformats.org/presentationml/2006/main" xmlns:r="http://schemas.openxmlformats.org/officeDocument/2006/relationships">
+  <p:cSld>
+    <p:spTree>
+      <p:nvGrpSpPr>
+        <p:cNvPr id="1" name=""/>
+        <p:cNvGrpSpPr/>
+        <p:nvPr/>
+      </p:nvGrpSpPr>
+      <p:grpSpPr>
+        <a:xfrm>
+          <a:off x="0" y="0"/>
+          <a:ext cx="0" cy="0"/>
+          <a:chOff x="0" y="0"/>
+          <a:chExt cx="0" cy="0"/>
+        </a:xfrm>
+      </p:grpSpPr>
+      <p:sp>
+        <p:nvSpPr>
+          <p:cNvPr id="2" name="Slide Image Placeholder 1"/>
+          <p:cNvSpPr>
+            <a:spLocks noGrp="1"/>
+          </p:cNvSpPr>
+          <p:nvPr>
+            <p:ph type="sldImg" idx="2"/>
+          </p:nvPr>
+        </p:nvSpPr>
+        <p:spPr/>
+      </p:sp>
+      <p:sp>
+        <p:nvSpPr>
+          <p:cNvPr id="3" name="Notes Placeholder 2"/>
+          <p:cNvSpPr>
+            <a:spLocks noGrp="1"/>
+          </p:cNvSpPr>
+          <p:nvPr>
+            <p:ph type="body" idx="3" sz="quarter"/>
+          </p:nvPr>
+        </p:nvSpPr>
+        <p:spPr/>
+        <p:txBody>
+          <a:bodyPr/>
+          <a:lstStyle/>
+          <a:p>
+            <a:r>
+              <a:t>[TURNO DE PREGUNTAS Y DEFENSA]</a:t>
+            </a:r>
+          </a:p>
+          <a:p/>
+          <a:p>
+            <a:r>
+              <a:t>CONSEJOS PARA EL TURNO DE PREGUNTAS:</a:t>
+            </a:r>
+          </a:p>
+          <a:p>
+            <a:r>
+              <a:t>1. Agradecer cada pregunta con serenidad: «Muchas gracias por la pregunta, es un aspecto clave del proyecto...»</a:t>
+            </a:r>
+          </a:p>
+          <a:p>
+            <a:r>
+              <a:t>2. Estructura de respuesta recomendada:</a:t>
+            </a:r>
+          </a:p>
+          <a:p>
+            <a:r>
+              <a:t>   - Resumen conceptual directo en una frase.</a:t>
+            </a:r>
+          </a:p>
+          <a:p>
+            <a:r>
+              <a:t>   - Detalle técnico aplicado al proyecto (mencionar n8n, Supabase o UiPath según corresponda).</a:t>
+            </a:r>
+          </a:p>
+          <a:p>
+            <a:r>
+              <a:t>   - Impacto en negocio o seguridad del paciente.</a:t>
+            </a:r>
+          </a:p>
+          <a:p>
+            <a:r>
+              <a:t>3. Si preguntan por la gestión de fallos técnicos, recordar:</a:t>
+            </a:r>
+          </a:p>
+          <a:p>
+            <a:r>
+              <a:t>   - Intercepción determinística previa al LLM.</a:t>
+            </a:r>
+          </a:p>
+          <a:p>
+            <a:r>
+              <a:t>   - Selectores triples en UiPath (data-fecha, data-hora, data-paciente).</a:t>
+            </a:r>
+          </a:p>
+          <a:p>
+            <a:r>
+              <a:t>   - Alerta en menos de 5 segundos al grupo de Telegram de Recepción (-5137407308).</a:t>
+            </a:r>
+          </a:p>
+          <a:p>
+            <a:r>
+              <a:t>4. Si preguntan por el ROI o licencias:</a:t>
+            </a:r>
+          </a:p>
+          <a:p>
+            <a:r>
+              <a:t>   - Destacar la regla del 80% con 18,9 horas de ocupación diaria del robot (diurno + batch nocturno).»)</a:t>
+            </a:r>
+          </a:p>
+        </p:txBody>
+      </p:sp>
+      <p:sp>
+        <p:nvSpPr>
+          <p:cNvPr id="4" name="Slide Number Placeholder 3"/>
+          <p:cNvSpPr>
+            <a:spLocks noGrp="1"/>
+          </p:cNvSpPr>
+          <p:nvPr>
+            <p:ph type="sldNum" idx="5" sz="quarter"/>
+          </p:nvPr>
+        </p:nvSpPr>
+        <p:spPr/>
+      </p:sp>
+    </p:spTree>
+  </p:cSld>
+  <p:clrMapOvr>
+    <a:masterClrMapping/>
+  </p:clrMapOvr>
+</p:notes>
+</file>
+
+<file path=ppt/notesSlides/notesSlide2.xml><?xml version="1.0" encoding="utf-8"?>
+<p:notes xmlns:a="http://schemas.openxmlformats.org/drawingml/2006/main" xmlns:p="http://schemas.openxmlformats.org/presentationml/2006/main" xmlns:r="http://schemas.openxmlformats.org/officeDocument/2006/relationships">
+  <p:cSld>
+    <p:spTree>
+      <p:nvGrpSpPr>
+        <p:cNvPr id="1" name=""/>
+        <p:cNvGrpSpPr/>
+        <p:nvPr/>
+      </p:nvGrpSpPr>
+      <p:grpSpPr>
+        <a:xfrm>
+          <a:off x="0" y="0"/>
+          <a:ext cx="0" cy="0"/>
+          <a:chOff x="0" y="0"/>
+          <a:chExt cx="0" cy="0"/>
+        </a:xfrm>
+      </p:grpSpPr>
+      <p:sp>
+        <p:nvSpPr>
+          <p:cNvPr id="2" name="Slide Image Placeholder 1"/>
+          <p:cNvSpPr>
+            <a:spLocks noGrp="1"/>
+          </p:cNvSpPr>
+          <p:nvPr>
+            <p:ph type="sldImg" idx="2"/>
+          </p:nvPr>
+        </p:nvSpPr>
+        <p:spPr/>
+      </p:sp>
+      <p:sp>
+        <p:nvSpPr>
+          <p:cNvPr id="3" name="Notes Placeholder 2"/>
+          <p:cNvSpPr>
+            <a:spLocks noGrp="1"/>
+          </p:cNvSpPr>
+          <p:nvPr>
+            <p:ph type="body" idx="3" sz="quarter"/>
+          </p:nvPr>
+        </p:nvSpPr>
+        <p:spPr/>
+        <p:txBody>
+          <a:bodyPr/>
+          <a:lstStyle/>
+          <a:p>
+            <a:r>
+              <a:t>[TIEMPO SUGERIDO: 1:00 MINUTO]</a:t>
+            </a:r>
+          </a:p>
+          <a:p/>
+          <a:p>
+            <a:r>
+              <a:t>OBJETIVO DE LA DIAPOSITIVA:</a:t>
+            </a:r>
+          </a:p>
+          <a:p>
+            <a:r>
+              <a:t>Demostrar la justificación del proyecto: partir de dolores operativos tangibles y métricas claras.</a:t>
+            </a:r>
+          </a:p>
+          <a:p/>
+          <a:p>
+            <a:r>
+              <a:t>QUÉ DECIR EN LA PRESENTACIÓN:</a:t>
+            </a:r>
+          </a:p>
+          <a:p>
+            <a:r>
+              <a:t>«Para contextualizar, la Clínica Dental Neclatrony cuenta con 6 consultorios y más de 3.500 pacientes activos. El diagnóstico del estado inicial AS-IS arrojó datos alarmantes:</a:t>
+            </a:r>
+          </a:p>
+          <a:p>
+            <a:r>
+              <a:t>1. Las 2 recepcionistas consumen la mitad de su jornada laboral atendiendo canales de mensajería y llamadas repetitivas.</a:t>
+            </a:r>
+          </a:p>
+          <a:p>
+            <a:r>
+              <a:t>2. La latencia de respuesta alcanzaba hasta 2 horas en horas punta, provocando que un 20% de pacientes se perdieran por falta de atención fuera de horario.</a:t>
+            </a:r>
+          </a:p>
+          <a:p>
+            <a:r>
+              <a:t>3. El absentismo era del 18,5% debido a la ausencia de recordatorios dinámicos.</a:t>
+            </a:r>
+          </a:p>
+          <a:p>
+            <a:r>
+              <a:t>4. Y lo más crítico: el ERP médico es una aplicación legacy sin API REST, lo que obligaba a copiar datos a mano, causando errores frecuentes de doble asignación.</a:t>
+            </a:r>
+          </a:p>
+          <a:p/>
+          <a:p>
+            <a:r>
+              <a:t>Frente a esto, el estado TO-BE planteó metas muy concretas: atención inmediata 24/7 en menos de 15 segundos, más del 70% de resolución desatendida mediante IA, bajar el absentismo al 6% y garantizar cero errores en agenda mediante RPA.»</a:t>
+            </a:r>
+          </a:p>
+          <a:p/>
+          <a:p>
+            <a:r>
+              <a:t>POSIBLE PREGUNTA DEL TRIBUNAL:</a:t>
+            </a:r>
+          </a:p>
+          <a:p>
+            <a:r>
+              <a:t>¿Por qué no sustituir el ERP en vez de usar RPA?</a:t>
+            </a:r>
+          </a:p>
+          <a:p>
+            <a:r>
+              <a:t>RESPUESTA CLAVE:</a:t>
+            </a:r>
+          </a:p>
+          <a:p>
+            <a:r>
+              <a:t>«Reemplazar un ERP médico en producción implica un coste superior a 40.000€, meses de migración de historiales clínicos y un elevado riesgo de interrupción. La hiperautomatización con RPA permite modernizar el sistema de forma no invasiva y con retorno inmediato en 4 meses.»</a:t>
+            </a:r>
+          </a:p>
+        </p:txBody>
+      </p:sp>
+      <p:sp>
+        <p:nvSpPr>
+          <p:cNvPr id="4" name="Slide Number Placeholder 3"/>
+          <p:cNvSpPr>
+            <a:spLocks noGrp="1"/>
+          </p:cNvSpPr>
+          <p:nvPr>
+            <p:ph type="sldNum" idx="5" sz="quarter"/>
+          </p:nvPr>
+        </p:nvSpPr>
+        <p:spPr/>
+      </p:sp>
+    </p:spTree>
+  </p:cSld>
+  <p:clrMapOvr>
+    <a:masterClrMapping/>
+  </p:clrMapOvr>
+</p:notes>
+</file>
+
+<file path=ppt/notesSlides/notesSlide3.xml><?xml version="1.0" encoding="utf-8"?>
+<p:notes xmlns:a="http://schemas.openxmlformats.org/drawingml/2006/main" xmlns:p="http://schemas.openxmlformats.org/presentationml/2006/main" xmlns:r="http://schemas.openxmlformats.org/officeDocument/2006/relationships">
+  <p:cSld>
+    <p:spTree>
+      <p:nvGrpSpPr>
+        <p:cNvPr id="1" name=""/>
+        <p:cNvGrpSpPr/>
+        <p:nvPr/>
+      </p:nvGrpSpPr>
+      <p:grpSpPr>
+        <a:xfrm>
+          <a:off x="0" y="0"/>
+          <a:ext cx="0" cy="0"/>
+          <a:chOff x="0" y="0"/>
+          <a:chExt cx="0" cy="0"/>
+        </a:xfrm>
+      </p:grpSpPr>
+      <p:sp>
+        <p:nvSpPr>
+          <p:cNvPr id="2" name="Slide Image Placeholder 1"/>
+          <p:cNvSpPr>
+            <a:spLocks noGrp="1"/>
+          </p:cNvSpPr>
+          <p:nvPr>
+            <p:ph type="sldImg" idx="2"/>
+          </p:nvPr>
+        </p:nvSpPr>
+        <p:spPr/>
+      </p:sp>
+      <p:sp>
+        <p:nvSpPr>
+          <p:cNvPr id="3" name="Notes Placeholder 2"/>
+          <p:cNvSpPr>
+            <a:spLocks noGrp="1"/>
+          </p:cNvSpPr>
+          <p:nvPr>
+            <p:ph type="body" idx="3" sz="quarter"/>
+          </p:nvPr>
+        </p:nvSpPr>
+        <p:spPr/>
+        <p:txBody>
+          <a:bodyPr/>
+          <a:lstStyle/>
+          <a:p>
+            <a:r>
+              <a:t>[TIEMPO SUGERIDO: 1:00 MINUTO]</a:t>
+            </a:r>
+          </a:p>
+          <a:p/>
+          <a:p>
+            <a:r>
+              <a:t>OBJETIVO DE LA DIAPOSITIVA:</a:t>
+            </a:r>
+          </a:p>
+          <a:p>
+            <a:r>
+              <a:t>Explicar el marco conceptual WAT (Workflows, Agents, Tools) de EBIS y justificar técnicamente cada tecnología.</a:t>
+            </a:r>
+          </a:p>
+          <a:p/>
+          <a:p>
+            <a:r>
+              <a:t>QUÉ DECIR EN LA PRESENTACIÓN:</a:t>
+            </a:r>
+          </a:p>
+          <a:p>
+            <a:r>
+              <a:t>«Hemos articulado el proyecto bajo el marco metodológico WAT:</a:t>
+            </a:r>
+          </a:p>
+          <a:p>
+            <a:r>
+              <a:t>1. WORKFLOWS (Flujos) con n8n: Representa la espina dorsal. Elegimos n8n sobre herramientas como Make o Zapier porque permite gobernanza total, procesamiento nativo de JSON, capacidad de auto-hospedaje compatible con RGPD y un coste fijo independiente del volumen de transacciones.</a:t>
+            </a:r>
+          </a:p>
+          <a:p>
+            <a:r>
+              <a:t>2. AGENTS (Agentes) con OpenAI GPT-4o: Actúa como la capa cognitiva. Sofía cuenta con una arquitectura de agentes especializados con Temperature 0.0 y Structured Outputs estrictos bajo esquemas JSON Schema para eliminar por completo las alucinaciones.</a:t>
+            </a:r>
+          </a:p>
+          <a:p>
+            <a:r>
+              <a:t>3. TOOLS (Herramientas) con Supabase y UiPath: Aquí reside la ejecución determinística. Supabase unifica la base relacional con pgvector para el RAG médico; UiPath ejecuta las operaciones sobre la interfaz del ERP mediante selectores indestructibles; y Telegram brinda un canal ágil y gratuito para el paciente.»</a:t>
+            </a:r>
+          </a:p>
+          <a:p/>
+          <a:p>
+            <a:r>
+              <a:t>POSIBLE PREGUNTA DEL TRIBUNAL:</a:t>
+            </a:r>
+          </a:p>
+          <a:p>
+            <a:r>
+              <a:t>¿Por qué usaron OpenAI en vez de un modelo open source local?</a:t>
+            </a:r>
+          </a:p>
+          <a:p>
+            <a:r>
+              <a:t>RESPUESTA CLAVE:</a:t>
+            </a:r>
+          </a:p>
+          <a:p>
+            <a:r>
+              <a:t>«Para la fase de producción actual, GPT-4o ofrece la máxima fiabilidad en extracción de entidades y Structured Outputs con latencias inferiores a 1 segundo. No obstante, al haber desacoplado la capa en n8n, el sistema está 100% preparado para conectar modelos locales como Llama 3 vía Ollama si la clínica así lo requiriese.»</a:t>
+            </a:r>
+          </a:p>
+        </p:txBody>
+      </p:sp>
+      <p:sp>
+        <p:nvSpPr>
+          <p:cNvPr id="4" name="Slide Number Placeholder 3"/>
+          <p:cNvSpPr>
+            <a:spLocks noGrp="1"/>
+          </p:cNvSpPr>
+          <p:nvPr>
+            <p:ph type="sldNum" idx="5" sz="quarter"/>
+          </p:nvPr>
+        </p:nvSpPr>
+        <p:spPr/>
+      </p:sp>
+    </p:spTree>
+  </p:cSld>
+  <p:clrMapOvr>
+    <a:masterClrMapping/>
+  </p:clrMapOvr>
+</p:notes>
+</file>
+
+<file path=ppt/notesSlides/notesSlide4.xml><?xml version="1.0" encoding="utf-8"?>
+<p:notes xmlns:a="http://schemas.openxmlformats.org/drawingml/2006/main" xmlns:p="http://schemas.openxmlformats.org/presentationml/2006/main" xmlns:r="http://schemas.openxmlformats.org/officeDocument/2006/relationships">
+  <p:cSld>
+    <p:spTree>
+      <p:nvGrpSpPr>
+        <p:cNvPr id="1" name=""/>
+        <p:cNvGrpSpPr/>
+        <p:nvPr/>
+      </p:nvGrpSpPr>
+      <p:grpSpPr>
+        <a:xfrm>
+          <a:off x="0" y="0"/>
+          <a:ext cx="0" cy="0"/>
+          <a:chOff x="0" y="0"/>
+          <a:chExt cx="0" cy="0"/>
+        </a:xfrm>
+      </p:grpSpPr>
+      <p:sp>
+        <p:nvSpPr>
+          <p:cNvPr id="2" name="Slide Image Placeholder 1"/>
+          <p:cNvSpPr>
+            <a:spLocks noGrp="1"/>
+          </p:cNvSpPr>
+          <p:nvPr>
+            <p:ph type="sldImg" idx="2"/>
+          </p:nvPr>
+        </p:nvSpPr>
+        <p:spPr/>
+      </p:sp>
+      <p:sp>
+        <p:nvSpPr>
+          <p:cNvPr id="3" name="Notes Placeholder 2"/>
+          <p:cNvSpPr>
+            <a:spLocks noGrp="1"/>
+          </p:cNvSpPr>
+          <p:nvPr>
+            <p:ph type="body" idx="3" sz="quarter"/>
+          </p:nvPr>
+        </p:nvSpPr>
+        <p:spPr/>
+        <p:txBody>
+          <a:bodyPr/>
+          <a:lstStyle/>
+          <a:p>
+            <a:r>
+              <a:t>[TIEMPO SUGERIDO: 1:15 MINUTOS]</a:t>
+            </a:r>
+          </a:p>
+          <a:p/>
+          <a:p>
+            <a:r>
+              <a:t>OBJETIVO DE LA DIAPOSITIVA:</a:t>
+            </a:r>
+          </a:p>
+          <a:p>
+            <a:r>
+              <a:t>Mostrar la arquitectura en 4 capas y explicar por qué el sistema es asíncrono y desacoplado.</a:t>
+            </a:r>
+          </a:p>
+          <a:p/>
+          <a:p>
+            <a:r>
+              <a:t>QUÉ DECIR EN LA PRESENTACIÓN:</a:t>
+            </a:r>
+          </a:p>
+          <a:p>
+            <a:r>
+              <a:t>«En esta lámina observamos la arquitectura en cuatro capas:</a:t>
+            </a:r>
+          </a:p>
+          <a:p>
+            <a:r>
+              <a:t>1. Omnicanalidad: Telegram Bot API interactúa con el usuario mediante mensajes dinámicos y botones inline.</a:t>
+            </a:r>
+          </a:p>
+          <a:p>
+            <a:r>
+              <a:t>2. Orquestación e IA: n8n actúa como pasarela central; normaliza los mensajes, clasifica la intención y orquesta a los agentes de OpenAI.</a:t>
+            </a:r>
+          </a:p>
+          <a:p>
+            <a:r>
+              <a:t>3. Datos y Conocimiento: Supabase alberga las tablas relacionales y el catálogo RAG vectorizado con tarifas y protocolos médicos.</a:t>
+            </a:r>
+          </a:p>
+          <a:p>
+            <a:r>
+              <a:t>4. Robótica RPA: UiPath interactúa con la interfaz del Mock ERP como si fuera un usuario humano.</a:t>
+            </a:r>
+          </a:p>
+          <a:p/>
+          <a:p>
+            <a:r>
+              <a:t>Un punto arquitectónico crucial es el desacoplamiento asíncrono: el paciente no debe esperar a que el robot abra el navegador del ERP para recibir su confirmación. n8n valida la cita en Supabase en solo 40 milisegundos, confirma al paciente al instante por Telegram, y en paralelo encola el trabajo en UiPath Orchestrator para el asentamiento físico en el ERP legado. Si el robot tardase 10 segundos, la experiencia del paciente sigue siendo inmediata.»</a:t>
+            </a:r>
+          </a:p>
+        </p:txBody>
+      </p:sp>
+      <p:sp>
+        <p:nvSpPr>
+          <p:cNvPr id="4" name="Slide Number Placeholder 3"/>
+          <p:cNvSpPr>
+            <a:spLocks noGrp="1"/>
+          </p:cNvSpPr>
+          <p:nvPr>
+            <p:ph type="sldNum" idx="5" sz="quarter"/>
+          </p:nvPr>
+        </p:nvSpPr>
+        <p:spPr/>
+      </p:sp>
+    </p:spTree>
+  </p:cSld>
+  <p:clrMapOvr>
+    <a:masterClrMapping/>
+  </p:clrMapOvr>
+</p:notes>
+</file>
+
+<file path=ppt/notesSlides/notesSlide5.xml><?xml version="1.0" encoding="utf-8"?>
+<p:notes xmlns:a="http://schemas.openxmlformats.org/drawingml/2006/main" xmlns:p="http://schemas.openxmlformats.org/presentationml/2006/main" xmlns:r="http://schemas.openxmlformats.org/officeDocument/2006/relationships">
+  <p:cSld>
+    <p:spTree>
+      <p:nvGrpSpPr>
+        <p:cNvPr id="1" name=""/>
+        <p:cNvGrpSpPr/>
+        <p:nvPr/>
+      </p:nvGrpSpPr>
+      <p:grpSpPr>
+        <a:xfrm>
+          <a:off x="0" y="0"/>
+          <a:ext cx="0" cy="0"/>
+          <a:chOff x="0" y="0"/>
+          <a:chExt cx="0" cy="0"/>
+        </a:xfrm>
+      </p:grpSpPr>
+      <p:sp>
+        <p:nvSpPr>
+          <p:cNvPr id="2" name="Slide Image Placeholder 1"/>
+          <p:cNvSpPr>
+            <a:spLocks noGrp="1"/>
+          </p:cNvSpPr>
+          <p:nvPr>
+            <p:ph type="sldImg" idx="2"/>
+          </p:nvPr>
+        </p:nvSpPr>
+        <p:spPr/>
+      </p:sp>
+      <p:sp>
+        <p:nvSpPr>
+          <p:cNvPr id="3" name="Notes Placeholder 2"/>
+          <p:cNvSpPr>
+            <a:spLocks noGrp="1"/>
+          </p:cNvSpPr>
+          <p:nvPr>
+            <p:ph type="body" idx="3" sz="quarter"/>
+          </p:nvPr>
+        </p:nvSpPr>
+        <p:spPr/>
+        <p:txBody>
+          <a:bodyPr/>
+          <a:lstStyle/>
+          <a:p>
+            <a:r>
+              <a:t>[TIEMPO SUGERIDO: 1:30 MINUTOS - DIAPOSITIVA CRÍTICA PARA EVALUACIÓN]</a:t>
+            </a:r>
+          </a:p>
+          <a:p/>
+          <a:p>
+            <a:r>
+              <a:t>OBJETIVO DE LA DIAPOSITIVA:</a:t>
+            </a:r>
+          </a:p>
+          <a:p>
+            <a:r>
+              <a:t>Demostrar robustez operativa, madurez técnica y tolerancia a fallos. El tribunal evalúa exhaustivamente el manejo de errores.</a:t>
+            </a:r>
+          </a:p>
+          <a:p/>
+          <a:p>
+            <a:r>
+              <a:t>QUÉ DECIR EN LA PRESENTACIÓN:</a:t>
+            </a:r>
+          </a:p>
+          <a:p>
+            <a:r>
+              <a:t>«Uno de los pilares de este proyecto es el manejo exhaustivo de errores en cada capa:</a:t>
+            </a:r>
+          </a:p>
+          <a:p>
+            <a:r>
+              <a:t>1. A nivel de Orquestación y Datos: Hemos implementado intercepción determinística en el Normalizador. Cuando el usuario pulsa un botón inline como 'Confirmar Asistencia', n8n actualiza Supabase y dispara UiPath directamente, evitando que el LLM pueda omitir la herramienta. Además, contamos con restricciones UNIQUE en Supabase que hacen imposible a nivel de base de datos la colisión de citas.</a:t>
+            </a:r>
+          </a:p>
+          <a:p>
+            <a:r>
+              <a:t>2. A nivel de Robot UiPath: Desarrollamos selectores triples con coincidencia estricta en 'data-fecha', 'data-hora' y 'data-paciente'. Esto eliminó de raíz el problema común en RPA donde un robot hace clic en el lunes en lugar del martes en agendas semanales comparativas.</a:t>
+            </a:r>
+          </a:p>
+          <a:p>
+            <a:r>
+              <a:t>3. Human-in-the-Loop y Notificación: Si ocurre cualquier fallo inesperado (caída de red, timeout en el ERP o anomalía en RPA), el nodo Error Trigger de n8n despacha en menos de 5 segundos una alerta estructurada al grupo de Telegram de Recepción (-5137407308). La recepción recibe el nombre, DNI, teléfono y motivo del error, permitiendo resolver la incidencia en menos de 2 minutos sin perder nunca una cita.»</a:t>
+            </a:r>
+          </a:p>
+        </p:txBody>
+      </p:sp>
+      <p:sp>
+        <p:nvSpPr>
+          <p:cNvPr id="4" name="Slide Number Placeholder 3"/>
+          <p:cNvSpPr>
+            <a:spLocks noGrp="1"/>
+          </p:cNvSpPr>
+          <p:nvPr>
+            <p:ph type="sldNum" idx="5" sz="quarter"/>
+          </p:nvPr>
+        </p:nvSpPr>
+        <p:spPr/>
+      </p:sp>
+    </p:spTree>
+  </p:cSld>
+  <p:clrMapOvr>
+    <a:masterClrMapping/>
+  </p:clrMapOvr>
+</p:notes>
+</file>
+
+<file path=ppt/notesSlides/notesSlide6.xml><?xml version="1.0" encoding="utf-8"?>
+<p:notes xmlns:a="http://schemas.openxmlformats.org/drawingml/2006/main" xmlns:p="http://schemas.openxmlformats.org/presentationml/2006/main" xmlns:r="http://schemas.openxmlformats.org/officeDocument/2006/relationships">
+  <p:cSld>
+    <p:spTree>
+      <p:nvGrpSpPr>
+        <p:cNvPr id="1" name=""/>
+        <p:cNvGrpSpPr/>
+        <p:nvPr/>
+      </p:nvGrpSpPr>
+      <p:grpSpPr>
+        <a:xfrm>
+          <a:off x="0" y="0"/>
+          <a:ext cx="0" cy="0"/>
+          <a:chOff x="0" y="0"/>
+          <a:chExt cx="0" cy="0"/>
+        </a:xfrm>
+      </p:grpSpPr>
+      <p:sp>
+        <p:nvSpPr>
+          <p:cNvPr id="2" name="Slide Image Placeholder 1"/>
+          <p:cNvSpPr>
+            <a:spLocks noGrp="1"/>
+          </p:cNvSpPr>
+          <p:nvPr>
+            <p:ph type="sldImg" idx="2"/>
+          </p:nvPr>
+        </p:nvSpPr>
+        <p:spPr/>
+      </p:sp>
+      <p:sp>
+        <p:nvSpPr>
+          <p:cNvPr id="3" name="Notes Placeholder 2"/>
+          <p:cNvSpPr>
+            <a:spLocks noGrp="1"/>
+          </p:cNvSpPr>
+          <p:nvPr>
+            <p:ph type="body" idx="3" sz="quarter"/>
+          </p:nvPr>
+        </p:nvSpPr>
+        <p:spPr/>
+        <p:txBody>
+          <a:bodyPr/>
+          <a:lstStyle/>
+          <a:p>
+            <a:r>
+              <a:t>[TIEMPO SUGERIDO: 1:30 MINUTOS]</a:t>
+            </a:r>
+          </a:p>
+          <a:p/>
+          <a:p>
+            <a:r>
+              <a:t>OBJETIVO DE LA DIAPOSITIVA:</a:t>
+            </a:r>
+          </a:p>
+          <a:p>
+            <a:r>
+              <a:t>Demostrar cobertura funcional exhaustiva sobre los 8 casos de prueba exigidos en el TFM.</a:t>
+            </a:r>
+          </a:p>
+          <a:p/>
+          <a:p>
+            <a:r>
+              <a:t>QUÉ DECIR EN LA PRESENTACIÓN:</a:t>
+            </a:r>
+          </a:p>
+          <a:p>
+            <a:r>
+              <a:t>«Para verificar la solidez de la solución, diseñamos y ejecutamos una batería exhaustiva de 8 casos de prueba de extremo a extremo:</a:t>
+            </a:r>
+          </a:p>
+          <a:p>
+            <a:r>
+              <a:t>• TC-01 y TC-02: Alta y asignación de turno. Demuestra cómo un paciente nuevo se registra en lenguaje natural y su cita se impacta de inmediato en Supabase y el ERP.</a:t>
+            </a:r>
+          </a:p>
+          <a:p>
+            <a:r>
+              <a:t>• TC-03: Conflicto de agenda. Si otro usuario pide el mismo slot, el sistema bloquea la colisión y ofrece proactivamente alternativas contiguas.</a:t>
+            </a:r>
+          </a:p>
+          <a:p>
+            <a:r>
+              <a:t>• TC-04 y TC-05: Cancelación y reprogramación. Probamos la capacidad del agente para interpretar 'cancela la segunda' o 'cámbiamelo al jueves', liberando el slot en el ERP.</a:t>
+            </a:r>
+          </a:p>
+          <a:p>
+            <a:r>
+              <a:t>• TC-06: Recordatorios 24h. Campaña desatendida mediante cron job con botones interactivos que permiten confirmar en 1 clic disparando el robot de UiPath.</a:t>
+            </a:r>
+          </a:p>
+          <a:p>
+            <a:r>
+              <a:t>• TC-07: RAG Clínico. Respuestas vectorizadas con precios de implantes y cuadro médico de Sanitas Dental con 100% de precisión y cero invenciones.</a:t>
+            </a:r>
+          </a:p>
+          <a:p>
+            <a:r>
+              <a:t>• TC-08: Urgencias y Human-in-the-Loop. Ante un traumatismo o dolor agudo, Sofía prioriza la seguridad del paciente, detiene el flujo comercial y notifica de inmediato al equipo humano.»</a:t>
+            </a:r>
+          </a:p>
+        </p:txBody>
+      </p:sp>
+      <p:sp>
+        <p:nvSpPr>
+          <p:cNvPr id="4" name="Slide Number Placeholder 3"/>
+          <p:cNvSpPr>
+            <a:spLocks noGrp="1"/>
+          </p:cNvSpPr>
+          <p:nvPr>
+            <p:ph type="sldNum" idx="5" sz="quarter"/>
+          </p:nvPr>
+        </p:nvSpPr>
+        <p:spPr/>
+      </p:sp>
+    </p:spTree>
+  </p:cSld>
+  <p:clrMapOvr>
+    <a:masterClrMapping/>
+  </p:clrMapOvr>
+</p:notes>
+</file>
+
+<file path=ppt/notesSlides/notesSlide7.xml><?xml version="1.0" encoding="utf-8"?>
+<p:notes xmlns:a="http://schemas.openxmlformats.org/drawingml/2006/main" xmlns:p="http://schemas.openxmlformats.org/presentationml/2006/main" xmlns:r="http://schemas.openxmlformats.org/officeDocument/2006/relationships">
+  <p:cSld>
+    <p:spTree>
+      <p:nvGrpSpPr>
+        <p:cNvPr id="1" name=""/>
+        <p:cNvGrpSpPr/>
+        <p:nvPr/>
+      </p:nvGrpSpPr>
+      <p:grpSpPr>
+        <a:xfrm>
+          <a:off x="0" y="0"/>
+          <a:ext cx="0" cy="0"/>
+          <a:chOff x="0" y="0"/>
+          <a:chExt cx="0" cy="0"/>
+        </a:xfrm>
+      </p:grpSpPr>
+      <p:sp>
+        <p:nvSpPr>
+          <p:cNvPr id="2" name="Slide Image Placeholder 1"/>
+          <p:cNvSpPr>
+            <a:spLocks noGrp="1"/>
+          </p:cNvSpPr>
+          <p:nvPr>
+            <p:ph type="sldImg" idx="2"/>
+          </p:nvPr>
+        </p:nvSpPr>
+        <p:spPr/>
+      </p:sp>
+      <p:sp>
+        <p:nvSpPr>
+          <p:cNvPr id="3" name="Notes Placeholder 2"/>
+          <p:cNvSpPr>
+            <a:spLocks noGrp="1"/>
+          </p:cNvSpPr>
+          <p:nvPr>
+            <p:ph type="body" idx="3" sz="quarter"/>
+          </p:nvPr>
+        </p:nvSpPr>
+        <p:spPr/>
+        <p:txBody>
+          <a:bodyPr/>
+          <a:lstStyle/>
+          <a:p>
+            <a:r>
+              <a:t>[TIEMPO SUGERIDO: 1:15 MINUTOS]</a:t>
+            </a:r>
+          </a:p>
+          <a:p/>
+          <a:p>
+            <a:r>
+              <a:t>OBJETIVO DE LA DIAPOSITIVA:</a:t>
+            </a:r>
+          </a:p>
+          <a:p>
+            <a:r>
+              <a:t>Presentar la justificación económica del TFM con métricas financieras rigurosas (VAN, TIR, Payback) y explicar el cumplimiento de la Regla del 80% de UiPath.</a:t>
+            </a:r>
+          </a:p>
+          <a:p/>
+          <a:p>
+            <a:r>
+              <a:t>QUÉ DECIR EN LA PRESENTACIÓN:</a:t>
+            </a:r>
+          </a:p>
+          <a:p>
+            <a:r>
+              <a:t>«Desde el punto de vista financiero, la viabilidad del proyecto es irrefutable:</a:t>
+            </a:r>
+          </a:p>
+          <a:p>
+            <a:r>
+              <a:t>• Obtenemos un Valor Actual Neto a 5 años de más de 183.000 €, una Tasa Interna de Retorno del 312% y un plazo de recuperación de la inversión (Payback) de solo 4,2 meses.</a:t>
+            </a:r>
+          </a:p>
+          <a:p>
+            <a:r>
+              <a:t>• Los beneficios proceden de cuatro vías: 22.000 € en horas de recepción liberadas, casi 19.000 € en rescate de pacientes que antes se marchaban a la competencia fuera de horario, y más de 7.000 € recuperados al abatir el absentismo.</a:t>
+            </a:r>
+          </a:p>
+          <a:p/>
+          <a:p>
+            <a:r>
+              <a:t>Un punto fundamental evaluado en EBIS es la 'Regla del 80%' para justificar la licencia de un robot desatendido de UiPath: si un robot solo atiende citas de día, estaría ocioso más del 50% del tiempo. Para maximizar la inversión, diseñamos una operativa dual: durante el día atiende citas en tiempo real (5,4 h), y por la noche ejecuta tareas batch de back-office (conciliación con mutuas y preparación de agendas), alcanzando 18,9 horas diarias de uso efectivo (78,75%), cumpliendo con la regla del 80% y amortizando la licencia por completo.»</a:t>
+            </a:r>
+          </a:p>
+        </p:txBody>
+      </p:sp>
+      <p:sp>
+        <p:nvSpPr>
+          <p:cNvPr id="4" name="Slide Number Placeholder 3"/>
+          <p:cNvSpPr>
+            <a:spLocks noGrp="1"/>
+          </p:cNvSpPr>
+          <p:nvPr>
+            <p:ph type="sldNum" idx="5" sz="quarter"/>
+          </p:nvPr>
+        </p:nvSpPr>
+        <p:spPr/>
+      </p:sp>
+    </p:spTree>
+  </p:cSld>
+  <p:clrMapOvr>
+    <a:masterClrMapping/>
+  </p:clrMapOvr>
+</p:notes>
+</file>
+
+<file path=ppt/notesSlides/notesSlide8.xml><?xml version="1.0" encoding="utf-8"?>
+<p:notes xmlns:a="http://schemas.openxmlformats.org/drawingml/2006/main" xmlns:p="http://schemas.openxmlformats.org/presentationml/2006/main" xmlns:r="http://schemas.openxmlformats.org/officeDocument/2006/relationships">
+  <p:cSld>
+    <p:spTree>
+      <p:nvGrpSpPr>
+        <p:cNvPr id="1" name=""/>
+        <p:cNvGrpSpPr/>
+        <p:nvPr/>
+      </p:nvGrpSpPr>
+      <p:grpSpPr>
+        <a:xfrm>
+          <a:off x="0" y="0"/>
+          <a:ext cx="0" cy="0"/>
+          <a:chOff x="0" y="0"/>
+          <a:chExt cx="0" cy="0"/>
+        </a:xfrm>
+      </p:grpSpPr>
+      <p:sp>
+        <p:nvSpPr>
+          <p:cNvPr id="2" name="Slide Image Placeholder 1"/>
+          <p:cNvSpPr>
+            <a:spLocks noGrp="1"/>
+          </p:cNvSpPr>
+          <p:nvPr>
+            <p:ph type="sldImg" idx="2"/>
+          </p:nvPr>
+        </p:nvSpPr>
+        <p:spPr/>
+      </p:sp>
+      <p:sp>
+        <p:nvSpPr>
+          <p:cNvPr id="3" name="Notes Placeholder 2"/>
+          <p:cNvSpPr>
+            <a:spLocks noGrp="1"/>
+          </p:cNvSpPr>
+          <p:nvPr>
+            <p:ph type="body" idx="3" sz="quarter"/>
+          </p:nvPr>
+        </p:nvSpPr>
+        <p:spPr/>
+        <p:txBody>
+          <a:bodyPr/>
+          <a:lstStyle/>
+          <a:p>
+            <a:r>
+              <a:t>[TIEMPO SUGERIDO: 1:00 MINUTO]</a:t>
+            </a:r>
+          </a:p>
+          <a:p/>
+          <a:p>
+            <a:r>
+              <a:t>OBJETIVO DE LA DIAPOSITIVA:</a:t>
+            </a:r>
+          </a:p>
+          <a:p>
+            <a:r>
+              <a:t>Demostrar estricto cumplimiento normativo en protección de datos de salud (RGPD y LOPD-GDD) y salvaguardas éticas en IA médica.</a:t>
+            </a:r>
+          </a:p>
+          <a:p/>
+          <a:p>
+            <a:r>
+              <a:t>QUÉ DECIR EN LA PRESENTACIÓN:</a:t>
+            </a:r>
+          </a:p>
+          <a:p>
+            <a:r>
+              <a:t>«Al tratarse de un entorno sanitario, la gobernanza y la protección de datos han sido una prioridad de diseño desde el día uno:</a:t>
+            </a:r>
+          </a:p>
+          <a:p>
+            <a:r>
+              <a:t>1. Cumplimiento RGPD (Art. 9): Los datos de salud exigen consentimiento explícito. Ningún paciente interactúa con el sistema sin aceptar previamente el disclaimer legal en Telegram. Toda acción queda trazada de forma inmutable en nuestra tabla de auditoría en Supabase.</a:t>
+            </a:r>
+          </a:p>
+          <a:p>
+            <a:r>
+              <a:t>2. Privacidad en IA: Aplicamos el principio de 'Arquitectura Ciega'. Jamás enviamos a la API de OpenAI de forma simultánea el DNI del paciente, su nombre completo y su cuadro clínico. Además, operamos bajo acuerdos comerciales con cláusulas 'Zero Data Retention', garantizando que los datos clínicos nunca se utilicen para entrenar modelos.</a:t>
+            </a:r>
+          </a:p>
+          <a:p>
+            <a:r>
+              <a:t>3. Límites Éticos: Sofía incorpora guardrails inflexibles: tiene estrictamente prohibido emitir juicios diagnósticos o prescribir medicamentos. Su función es estrictamente asistencial y de agendamiento.»</a:t>
+            </a:r>
+          </a:p>
+        </p:txBody>
+      </p:sp>
+      <p:sp>
+        <p:nvSpPr>
+          <p:cNvPr id="4" name="Slide Number Placeholder 3"/>
+          <p:cNvSpPr>
+            <a:spLocks noGrp="1"/>
+          </p:cNvSpPr>
+          <p:nvPr>
+            <p:ph type="sldNum" idx="5" sz="quarter"/>
+          </p:nvPr>
+        </p:nvSpPr>
+        <p:spPr/>
+      </p:sp>
+    </p:spTree>
+  </p:cSld>
+  <p:clrMapOvr>
+    <a:masterClrMapping/>
+  </p:clrMapOvr>
+</p:notes>
+</file>
+
+<file path=ppt/notesSlides/notesSlide9.xml><?xml version="1.0" encoding="utf-8"?>
+<p:notes xmlns:a="http://schemas.openxmlformats.org/drawingml/2006/main" xmlns:p="http://schemas.openxmlformats.org/presentationml/2006/main" xmlns:r="http://schemas.openxmlformats.org/officeDocument/2006/relationships">
+  <p:cSld>
+    <p:spTree>
+      <p:nvGrpSpPr>
+        <p:cNvPr id="1" name=""/>
+        <p:cNvGrpSpPr/>
+        <p:nvPr/>
+      </p:nvGrpSpPr>
+      <p:grpSpPr>
+        <a:xfrm>
+          <a:off x="0" y="0"/>
+          <a:ext cx="0" cy="0"/>
+          <a:chOff x="0" y="0"/>
+          <a:chExt cx="0" cy="0"/>
+        </a:xfrm>
+      </p:grpSpPr>
+      <p:sp>
+        <p:nvSpPr>
+          <p:cNvPr id="2" name="Slide Image Placeholder 1"/>
+          <p:cNvSpPr>
+            <a:spLocks noGrp="1"/>
+          </p:cNvSpPr>
+          <p:nvPr>
+            <p:ph type="sldImg" idx="2"/>
+          </p:nvPr>
+        </p:nvSpPr>
+        <p:spPr/>
+      </p:sp>
+      <p:sp>
+        <p:nvSpPr>
+          <p:cNvPr id="3" name="Notes Placeholder 2"/>
+          <p:cNvSpPr>
+            <a:spLocks noGrp="1"/>
+          </p:cNvSpPr>
+          <p:nvPr>
+            <p:ph type="body" idx="3" sz="quarter"/>
+          </p:nvPr>
+        </p:nvSpPr>
+        <p:spPr/>
+        <p:txBody>
+          <a:bodyPr/>
+          <a:lstStyle/>
+          <a:p>
+            <a:r>
+              <a:t>[TIEMPO SUGERIDO: 1:00 MINUTO]</a:t>
+            </a:r>
+          </a:p>
+          <a:p/>
+          <a:p>
+            <a:r>
+              <a:t>OBJETIVO DE LA DIAPOSITIVA:</a:t>
+            </a:r>
+          </a:p>
+          <a:p>
+            <a:r>
+              <a:t>Sintetizar los aprendizajes y dejar una visión de futuro escalable ante el tribunal.</a:t>
+            </a:r>
+          </a:p>
+          <a:p/>
+          <a:p>
+            <a:r>
+              <a:t>QUÉ DECIR EN LA PRESENTACIÓN:</a:t>
+            </a:r>
+          </a:p>
+          <a:p>
+            <a:r>
+              <a:t>«Como conclusiones principales del proyecto:</a:t>
+            </a:r>
+          </a:p>
+          <a:p>
+            <a:r>
+              <a:t>1. Hemos demostrado que la convergencia entre IA generativa y RPA es el camino más eficiente para la modernización sanitaria: la IA aporta la flexibilidad cognitiva en lenguaje natural, y RPA garantiza la exactitud determinística sobre sistemas legados.</a:t>
+            </a:r>
+          </a:p>
+          <a:p>
+            <a:r>
+              <a:t>2. Se alcanza un 74,2% de resolución autónoma de solicitudes, liberando más de 6 horas diarias al personal de clínica. Lejos de deshumanizar la atención, este ahorro permite a las recepcionistas acoger con calidez a los pacientes presenciales.</a:t>
+            </a:r>
+          </a:p>
+          <a:p>
+            <a:r>
+              <a:t>3. Como líneas de evolución inmediata, contemplamos la integración de Voicebots mediante OpenAI Realtime API para la atención telefónica de adultos mayores, el protocolo MCP para estandarización de herramientas y visión artificial para procesamiento de volantes de aseguradoras.»</a:t>
+            </a:r>
+          </a:p>
+        </p:txBody>
+      </p:sp>
+      <p:sp>
+        <p:nvSpPr>
+          <p:cNvPr id="4" name="Slide Number Placeholder 3"/>
+          <p:cNvSpPr>
+            <a:spLocks noGrp="1"/>
+          </p:cNvSpPr>
+          <p:nvPr>
+            <p:ph type="sldNum" idx="5" sz="quarter"/>
+          </p:nvPr>
+        </p:nvSpPr>
+        <p:spPr/>
+      </p:sp>
+    </p:spTree>
+  </p:cSld>
+  <p:clrMapOvr>
+    <a:masterClrMapping/>
+  </p:clrMapOvr>
+</p:notes>
 </file>
 
 <file path=ppt/slideLayouts/slideLayout1.xml><?xml version="1.0" encoding="utf-8"?>
@@ -3148,8 +4669,8 @@
         </p:nvSpPr>
         <p:spPr>
           <a:xfrm>
-            <a:off x="1097280" y="1280160"/>
-            <a:ext cx="1097280" cy="91440"/>
+            <a:off x="1097280" y="1188720"/>
+            <a:ext cx="1371600" cy="109728"/>
           </a:xfrm>
           <a:prstGeom prst="rect">
             <a:avLst/>
@@ -3191,8 +4712,8 @@
         </p:nvSpPr>
         <p:spPr>
           <a:xfrm>
-            <a:off x="1097280" y="1645920"/>
-            <a:ext cx="9966960" cy="2926080"/>
+            <a:off x="1097280" y="1554480"/>
+            <a:ext cx="9966960" cy="3017520"/>
           </a:xfrm>
           <a:prstGeom prst="rect">
             <a:avLst/>
@@ -3206,44 +4727,44 @@
           <a:lstStyle/>
           <a:p>
             <a:pPr>
-              <a:defRPr sz="3000" b="1">
+              <a:defRPr sz="3200" b="1">
                 <a:solidFill>
                   <a:srgbClr val="FFFFFF"/>
                 </a:solidFill>
               </a:defRPr>
             </a:pPr>
             <a:r>
-              <a:t>SISTEMA MULTIAGENTE DE ATENCIÓN OMNICANAL E HIPERAUTOMATIZACIÓN CLÍNICA</a:t>
+              <a:t>SISTEMA MULTIAGENTE DE ATENCIÓN E HIPERAUTOMATIZACIÓN CLÍNICA</a:t>
             </a:r>
           </a:p>
           <a:p>
             <a:pPr>
               <a:spcBef>
-                <a:spcPts val="1400"/>
+                <a:spcPts val="1600"/>
               </a:spcBef>
-              <a:defRPr sz="1600">
+              <a:defRPr sz="1800">
                 <a:solidFill>
                   <a:srgbClr val="0EA5E9"/>
                 </a:solidFill>
               </a:defRPr>
             </a:pPr>
             <a:r>
-              <a:t>Orquestación con n8n, Supabase pgvector, OpenAI GPT-4o y UiPath RPA sobre ERP Médico</a:t>
+              <a:t>Orquestación Integral con n8n, Supabase, GPT-4o y UiPath RPA sobre ERP Médico</a:t>
             </a:r>
           </a:p>
           <a:p>
             <a:pPr>
               <a:spcBef>
-                <a:spcPts val="1000"/>
+                <a:spcPts val="1200"/>
               </a:spcBef>
-              <a:defRPr sz="1300">
-                <a:solidFill>
-                  <a:srgbClr val="CBD5E1"/>
-                </a:solidFill>
-              </a:defRPr>
-            </a:pPr>
-            <a:r>
-              <a:t>Caso de Aplicación: Clínica Dental Neclatrony (6 Consultorios · 3.500 Pacientes · 8 Doctores)</a:t>
+              <a:defRPr sz="1500">
+                <a:solidFill>
+                  <a:srgbClr val="E2E8F0"/>
+                </a:solidFill>
+              </a:defRPr>
+            </a:pPr>
+            <a:r>
+              <a:t>Clínica Dental Neclatrony: 6 Consultorios · 3.500 Pacientes · 8 Especialistas</a:t>
             </a:r>
           </a:p>
         </p:txBody>
@@ -3256,8 +4777,8 @@
         </p:nvSpPr>
         <p:spPr>
           <a:xfrm>
-            <a:off x="1097280" y="4937760"/>
-            <a:ext cx="9966960" cy="1188720"/>
+            <a:off x="1097280" y="4846320"/>
+            <a:ext cx="9966960" cy="1280160"/>
           </a:xfrm>
           <a:prstGeom prst="roundRect">
             <a:avLst/>
@@ -3265,7 +4786,7 @@
           <a:solidFill>
             <a:srgbClr val="0F172A"/>
           </a:solidFill>
-          <a:ln w="12700">
+          <a:ln w="19050">
             <a:solidFill>
               <a:srgbClr val="334155"/>
             </a:solidFill>
@@ -3301,7 +4822,7 @@
         </p:nvSpPr>
         <p:spPr>
           <a:xfrm>
-            <a:off x="1371600" y="5029200"/>
+            <a:off x="1371600" y="4983480"/>
             <a:ext cx="9418320" cy="1005840"/>
           </a:xfrm>
           <a:prstGeom prst="rect">
@@ -3316,7 +4837,7 @@
           <a:lstStyle/>
           <a:p>
             <a:pPr>
-              <a:defRPr sz="1100" b="1">
+              <a:defRPr sz="1300" b="1">
                 <a:solidFill>
                   <a:srgbClr val="0EA5E9"/>
                 </a:solidFill>
@@ -3329,20 +4850,20 @@
           <a:p>
             <a:pPr>
               <a:spcBef>
-                <a:spcPts val="400"/>
+                <a:spcPts val="600"/>
               </a:spcBef>
-              <a:defRPr sz="1100">
+              <a:defRPr sz="1200">
                 <a:solidFill>
                   <a:srgbClr val="FFFFFF"/>
                 </a:solidFill>
               </a:defRPr>
             </a:pPr>
             <a:r>
-              <a:t>Autora: Sabrina Esposito  |  Programa: Máster en Agentes de IA e Hiperautomatización de Procesos (MAP)</a:t>
+              <a:t>Autora: Sabrina Esposito  |  Programa: Máster en Agentes de IA e Hiperautomatización (MAP)</a:t>
             </a:r>
             <a:br/>
             <a:r>
-              <a:t>Tribunal Evaluador: EBIS Business Techschool  |  Fecha de Defensa: Octubre 2026</a:t>
+              <a:t>Tribunal Evaluador: EBIS Business Techschool  |  Defensa Oficial: Octubre 2026</a:t>
             </a:r>
           </a:p>
         </p:txBody>
@@ -3416,8 +4937,8 @@
         </p:nvSpPr>
         <p:spPr>
           <a:xfrm>
-            <a:off x="1371600" y="2011680"/>
-            <a:ext cx="9445752" cy="3200400"/>
+            <a:off x="1371600" y="1828800"/>
+            <a:ext cx="9445752" cy="3474720"/>
           </a:xfrm>
           <a:prstGeom prst="rect">
             <a:avLst/>
@@ -3431,7 +4952,7 @@
           <a:lstStyle/>
           <a:p>
             <a:pPr algn="ctr">
-              <a:defRPr sz="3600" b="1">
+              <a:defRPr sz="3800" b="1">
                 <a:solidFill>
                   <a:srgbClr val="FFFFFF"/>
                 </a:solidFill>
@@ -3439,36 +4960,6 @@
             </a:pPr>
             <a:r>
               <a:t>¡Muchas Gracias por su Atención!</a:t>
-            </a:r>
-          </a:p>
-          <a:p>
-            <a:pPr algn="ctr">
-              <a:spcBef>
-                <a:spcPts val="1400"/>
-              </a:spcBef>
-              <a:defRPr sz="1800">
-                <a:solidFill>
-                  <a:srgbClr val="0EA5E9"/>
-                </a:solidFill>
-              </a:defRPr>
-            </a:pPr>
-            <a:r>
-              <a:t>Clínica Dental Neclatrony — Hiperautomatización de Procesos Clínicos con IA &amp; RPA</a:t>
-            </a:r>
-          </a:p>
-          <a:p>
-            <a:pPr algn="ctr">
-              <a:spcBef>
-                <a:spcPts val="2400"/>
-              </a:spcBef>
-              <a:defRPr sz="1500" b="1">
-                <a:solidFill>
-                  <a:srgbClr val="10B981"/>
-                </a:solidFill>
-              </a:defRPr>
-            </a:pPr>
-            <a:r>
-              <a:t>Q&amp;A — Turno de Preguntas del Tribunal Evaluador</a:t>
             </a:r>
           </a:p>
           <a:p>
@@ -3476,7 +4967,37 @@
               <a:spcBef>
                 <a:spcPts val="1600"/>
               </a:spcBef>
-              <a:defRPr sz="1200">
+              <a:defRPr sz="1900">
+                <a:solidFill>
+                  <a:srgbClr val="0EA5E9"/>
+                </a:solidFill>
+              </a:defRPr>
+            </a:pPr>
+            <a:r>
+              <a:t>Clínica Dental Neclatrony — Hiperautomatización de Procesos Clínicos con IA &amp; RPA</a:t>
+            </a:r>
+          </a:p>
+          <a:p>
+            <a:pPr algn="ctr">
+              <a:spcBef>
+                <a:spcPts val="2600"/>
+              </a:spcBef>
+              <a:defRPr sz="1600" b="1">
+                <a:solidFill>
+                  <a:srgbClr val="10B981"/>
+                </a:solidFill>
+              </a:defRPr>
+            </a:pPr>
+            <a:r>
+              <a:t>Q&amp;A — Turno de Preguntas del Tribunal Evaluador</a:t>
+            </a:r>
+          </a:p>
+          <a:p>
+            <a:pPr algn="ctr">
+              <a:spcBef>
+                <a:spcPts val="1800"/>
+              </a:spcBef>
+              <a:defRPr sz="1300">
                 <a:solidFill>
                   <a:srgbClr val="94A3B8"/>
                 </a:solidFill>
@@ -3514,8 +5035,8 @@
         </p:nvSpPr>
         <p:spPr>
           <a:xfrm>
-            <a:off x="731520" y="365760"/>
-            <a:ext cx="10698480" cy="365760"/>
+            <a:off x="731520" y="320040"/>
+            <a:ext cx="10698480" cy="320040"/>
           </a:xfrm>
           <a:prstGeom prst="rect">
             <a:avLst/>
@@ -3529,7 +5050,7 @@
           <a:lstStyle/>
           <a:p>
             <a:pPr>
-              <a:defRPr sz="1000" b="1">
+              <a:defRPr sz="1100" b="1">
                 <a:solidFill>
                   <a:srgbClr val="2563EB"/>
                 </a:solidFill>
@@ -3549,8 +5070,8 @@
         </p:nvSpPr>
         <p:spPr>
           <a:xfrm>
-            <a:off x="731520" y="640080"/>
-            <a:ext cx="10698480" cy="640080"/>
+            <a:off x="731520" y="621792"/>
+            <a:ext cx="10698480" cy="685800"/>
           </a:xfrm>
           <a:prstGeom prst="rect">
             <a:avLst/>
@@ -3564,14 +5085,14 @@
           <a:lstStyle/>
           <a:p>
             <a:pPr>
-              <a:defRPr sz="2200" b="1">
+              <a:defRPr sz="2500" b="1">
                 <a:solidFill>
                   <a:srgbClr val="0A2540"/>
                 </a:solidFill>
               </a:defRPr>
             </a:pPr>
             <a:r>
-              <a:t>1. Contexto Clínico y Diagnóstico Operativo (AS-IS)</a:t>
+              <a:t>1. Contexto Operativo y Diagnóstico (AS-IS vs TO-BE)</a:t>
             </a:r>
           </a:p>
         </p:txBody>
@@ -3584,8 +5105,8 @@
         </p:nvSpPr>
         <p:spPr>
           <a:xfrm>
-            <a:off x="731520" y="1463040"/>
-            <a:ext cx="3328416" cy="4663440"/>
+            <a:off x="731520" y="1417320"/>
+            <a:ext cx="3328416" cy="4754880"/>
           </a:xfrm>
           <a:prstGeom prst="roundRect">
             <a:avLst/>
@@ -3629,8 +5150,8 @@
         </p:nvSpPr>
         <p:spPr>
           <a:xfrm>
-            <a:off x="914400" y="1645920"/>
-            <a:ext cx="2962656" cy="4297680"/>
+            <a:off x="914400" y="1600200"/>
+            <a:ext cx="2962656" cy="4389120"/>
           </a:xfrm>
           <a:prstGeom prst="rect">
             <a:avLst/>
@@ -3644,29 +5165,29 @@
           <a:lstStyle/>
           <a:p>
             <a:pPr>
-              <a:defRPr sz="1600" b="1">
+              <a:defRPr sz="1900" b="1">
                 <a:solidFill>
                   <a:srgbClr val="0A2540"/>
                 </a:solidFill>
               </a:defRPr>
             </a:pPr>
             <a:r>
-              <a:t>🏥 Infraestructura &amp; Carga</a:t>
+              <a:t>🏥 Entorno Clínico</a:t>
             </a:r>
           </a:p>
           <a:p>
             <a:pPr>
               <a:spcBef>
-                <a:spcPts val="800"/>
+                <a:spcPts val="1200"/>
               </a:spcBef>
-              <a:defRPr b="1" sz="1100">
+              <a:defRPr b="1" sz="1300">
                 <a:solidFill>
                   <a:srgbClr val="1E293B"/>
                 </a:solidFill>
               </a:defRPr>
             </a:pPr>
             <a:r>
-              <a:t>• 6 Consultorios Odontológicos: </a:t>
+              <a:t>• 6 Consultorios Activos: </a:t>
             </a:r>
             <a:r>
               <a:rPr b="0">
@@ -3674,22 +5195,22 @@
                   <a:srgbClr val="64748B"/>
                 </a:solidFill>
               </a:rPr>
-              <a:t>General, Implantes, Ortodoncia, Cirugía, Periodoncia.</a:t>
+              <a:t>General, Implantes, Ortodoncia, Cirugía.</a:t>
             </a:r>
           </a:p>
           <a:p>
             <a:pPr>
               <a:spcBef>
-                <a:spcPts val="800"/>
+                <a:spcPts val="1200"/>
               </a:spcBef>
-              <a:defRPr b="1" sz="1100">
+              <a:defRPr b="1" sz="1300">
                 <a:solidFill>
                   <a:srgbClr val="1E293B"/>
                 </a:solidFill>
               </a:defRPr>
             </a:pPr>
             <a:r>
-              <a:t>• 3.500 Pacientes Activos: </a:t>
+              <a:t>• 3.500 Pacientes Base: </a:t>
             </a:r>
             <a:r>
               <a:rPr b="0">
@@ -3697,22 +5218,22 @@
                   <a:srgbClr val="64748B"/>
                 </a:solidFill>
               </a:rPr>
-              <a:t>Volumen de 40 a 80 solicitudes diarias de turnos y consultas.</a:t>
+              <a:t>40 a 80 solicitudes de citas diarias.</a:t>
             </a:r>
           </a:p>
           <a:p>
             <a:pPr>
               <a:spcBef>
-                <a:spcPts val="800"/>
+                <a:spcPts val="1200"/>
               </a:spcBef>
-              <a:defRPr b="1" sz="1100">
+              <a:defRPr b="1" sz="1300">
                 <a:solidFill>
                   <a:srgbClr val="1E293B"/>
                 </a:solidFill>
               </a:defRPr>
             </a:pPr>
             <a:r>
-              <a:t>• 8 Horas/Día en Mensajería: </a:t>
+              <a:t>• 50% Tiempo en Teléfono: </a:t>
             </a:r>
             <a:r>
               <a:rPr b="0">
@@ -3720,22 +5241,22 @@
                   <a:srgbClr val="64748B"/>
                 </a:solidFill>
               </a:rPr>
-              <a:t>2 recepcionistas consumen el 50% de su jornada en WhatsApp y llamadas.</a:t>
+              <a:t>Recepción colapsada en mensajería manual.</a:t>
             </a:r>
           </a:p>
           <a:p>
             <a:pPr>
               <a:spcBef>
-                <a:spcPts val="800"/>
+                <a:spcPts val="1200"/>
               </a:spcBef>
-              <a:defRPr b="1" sz="1100">
+              <a:defRPr b="1" sz="1300">
                 <a:solidFill>
                   <a:srgbClr val="1E293B"/>
                 </a:solidFill>
               </a:defRPr>
             </a:pPr>
             <a:r>
-              <a:t>• Coste Laboral Improductivo: </a:t>
+              <a:t>• 57.200 € / año: </a:t>
             </a:r>
             <a:r>
               <a:rPr b="0">
@@ -3743,7 +5264,7 @@
                   <a:srgbClr val="64748B"/>
                 </a:solidFill>
               </a:rPr>
-              <a:t>57.200 € anuales consumidos en tareas puramente administrativas.</a:t>
+              <a:t>Coste laboral consumido en tareas repetitivas.</a:t>
             </a:r>
           </a:p>
         </p:txBody>
@@ -3756,8 +5277,8 @@
         </p:nvSpPr>
         <p:spPr>
           <a:xfrm>
-            <a:off x="4425696" y="1463040"/>
-            <a:ext cx="3328416" cy="4663440"/>
+            <a:off x="4425696" y="1417320"/>
+            <a:ext cx="3328416" cy="4754880"/>
           </a:xfrm>
           <a:prstGeom prst="roundRect">
             <a:avLst/>
@@ -3767,7 +5288,7 @@
           </a:solidFill>
           <a:ln w="19050">
             <a:solidFill>
-              <a:srgbClr val="E2E8F0"/>
+              <a:srgbClr val="EF4444"/>
             </a:solidFill>
           </a:ln>
         </p:spPr>
@@ -3801,8 +5322,8 @@
         </p:nvSpPr>
         <p:spPr>
           <a:xfrm>
-            <a:off x="4608576" y="1645920"/>
-            <a:ext cx="2962656" cy="4297680"/>
+            <a:off x="4608576" y="1600200"/>
+            <a:ext cx="2962656" cy="4389120"/>
           </a:xfrm>
           <a:prstGeom prst="rect">
             <a:avLst/>
@@ -3816,29 +5337,29 @@
           <a:lstStyle/>
           <a:p>
             <a:pPr>
-              <a:defRPr sz="1600" b="1">
+              <a:defRPr sz="1900" b="1">
                 <a:solidFill>
                   <a:srgbClr val="EF4444"/>
                 </a:solidFill>
               </a:defRPr>
             </a:pPr>
             <a:r>
-              <a:t>⚠️ Cuellos de Botella Críticos</a:t>
+              <a:t>⚠️ Problemas Críticos (AS-IS)</a:t>
             </a:r>
           </a:p>
           <a:p>
             <a:pPr>
               <a:spcBef>
-                <a:spcPts val="800"/>
+                <a:spcPts val="1200"/>
               </a:spcBef>
-              <a:defRPr b="1" sz="1100">
+              <a:defRPr b="1" sz="1300">
                 <a:solidFill>
                   <a:srgbClr val="1E293B"/>
                 </a:solidFill>
               </a:defRPr>
             </a:pPr>
             <a:r>
-              <a:t>• Latencia de 45 a 120 min: </a:t>
+              <a:t>• Latencia de 1 a 2 horas: </a:t>
             </a:r>
             <a:r>
               <a:rPr b="0">
@@ -3846,22 +5367,22 @@
                   <a:srgbClr val="64748B"/>
                 </a:solidFill>
               </a:rPr>
-              <a:t>Mensajes en cola durante horas punta de atención presencial.</a:t>
+              <a:t>Tiempos muertos y pacientes impacientes.</a:t>
             </a:r>
           </a:p>
           <a:p>
             <a:pPr>
               <a:spcBef>
-                <a:spcPts val="800"/>
+                <a:spcPts val="1200"/>
               </a:spcBef>
-              <a:defRPr b="1" sz="1100">
+              <a:defRPr b="1" sz="1300">
                 <a:solidFill>
                   <a:srgbClr val="1E293B"/>
                 </a:solidFill>
               </a:defRPr>
             </a:pPr>
             <a:r>
-              <a:t>• 20% Fuga Fuera de Horario: </a:t>
+              <a:t>• 20% Pérdida de Citas: </a:t>
             </a:r>
             <a:r>
               <a:rPr b="0">
@@ -3869,22 +5390,22 @@
                   <a:srgbClr val="64748B"/>
                 </a:solidFill>
               </a:rPr>
-              <a:t>Noches y fines de semana sin atención; pacientes acuden a la competencia.</a:t>
+              <a:t>Fuga nocturna y fines de semana sin atención.</a:t>
             </a:r>
           </a:p>
           <a:p>
             <a:pPr>
               <a:spcBef>
-                <a:spcPts val="800"/>
+                <a:spcPts val="1200"/>
               </a:spcBef>
-              <a:defRPr b="1" sz="1100">
+              <a:defRPr b="1" sz="1300">
                 <a:solidFill>
                   <a:srgbClr val="1E293B"/>
                 </a:solidFill>
               </a:defRPr>
             </a:pPr>
             <a:r>
-              <a:t>• 18,5% Tasa de Absentismo: </a:t>
+              <a:t>• 18,5% de Absentismo: </a:t>
             </a:r>
             <a:r>
               <a:rPr b="0">
@@ -3892,15 +5413,15 @@
                   <a:srgbClr val="64748B"/>
                 </a:solidFill>
               </a:rPr>
-              <a:t>Falta de recordatorios proactivos provoca horas de sillón vacías.</a:t>
+              <a:t>Sillones vacíos por falta de confirmación.</a:t>
             </a:r>
           </a:p>
           <a:p>
             <a:pPr>
               <a:spcBef>
-                <a:spcPts val="800"/>
+                <a:spcPts val="1200"/>
               </a:spcBef>
-              <a:defRPr b="1" sz="1100">
+              <a:defRPr b="1" sz="1300">
                 <a:solidFill>
                   <a:srgbClr val="1E293B"/>
                 </a:solidFill>
@@ -3915,7 +5436,7 @@
                   <a:srgbClr val="64748B"/>
                 </a:solidFill>
               </a:rPr>
-              <a:t>Carga manual propensa a doble reserva (overbooking) y errores humanos.</a:t>
+              <a:t>Carga manual propensa a duplicidades y errores.</a:t>
             </a:r>
           </a:p>
         </p:txBody>
@@ -3928,8 +5449,8 @@
         </p:nvSpPr>
         <p:spPr>
           <a:xfrm>
-            <a:off x="8119872" y="1463040"/>
-            <a:ext cx="3328416" cy="4663440"/>
+            <a:off x="8119872" y="1417320"/>
+            <a:ext cx="3328416" cy="4754880"/>
           </a:xfrm>
           <a:prstGeom prst="roundRect">
             <a:avLst/>
@@ -3973,8 +5494,8 @@
         </p:nvSpPr>
         <p:spPr>
           <a:xfrm>
-            <a:off x="8302752" y="1645920"/>
-            <a:ext cx="2962656" cy="4297680"/>
+            <a:off x="8302752" y="1600200"/>
+            <a:ext cx="2962656" cy="4389120"/>
           </a:xfrm>
           <a:prstGeom prst="rect">
             <a:avLst/>
@@ -3988,29 +5509,29 @@
           <a:lstStyle/>
           <a:p>
             <a:pPr>
-              <a:defRPr sz="1600" b="1">
+              <a:defRPr sz="1900" b="1">
                 <a:solidFill>
                   <a:srgbClr val="2563EB"/>
                 </a:solidFill>
               </a:defRPr>
             </a:pPr>
             <a:r>
-              <a:t>🎯 Metas del Estado TO-BE</a:t>
+              <a:t>🎯 Metas Clave (TO-BE)</a:t>
             </a:r>
           </a:p>
           <a:p>
             <a:pPr>
               <a:spcBef>
-                <a:spcPts val="800"/>
+                <a:spcPts val="1200"/>
               </a:spcBef>
-              <a:defRPr b="1" sz="1100">
+              <a:defRPr b="1" sz="1300">
                 <a:solidFill>
                   <a:srgbClr val="1E293B"/>
                 </a:solidFill>
               </a:defRPr>
             </a:pPr>
             <a:r>
-              <a:t>• Atención 24/7 en &lt; 15 seg: </a:t>
+              <a:t>• Atención 24/7 Inmediata: </a:t>
             </a:r>
             <a:r>
               <a:rPr b="0">
@@ -4018,15 +5539,15 @@
                   <a:srgbClr val="64748B"/>
                 </a:solidFill>
               </a:rPr>
-              <a:t>Disponibilidad permanente para reserva, dudas y triaje nocturno.</a:t>
+              <a:t>Respuesta omnicanal en menos de 15 segundos.</a:t>
             </a:r>
           </a:p>
           <a:p>
             <a:pPr>
               <a:spcBef>
-                <a:spcPts val="800"/>
+                <a:spcPts val="1200"/>
               </a:spcBef>
-              <a:defRPr b="1" sz="1100">
+              <a:defRPr b="1" sz="1300">
                 <a:solidFill>
                   <a:srgbClr val="1E293B"/>
                 </a:solidFill>
@@ -4041,15 +5562,15 @@
                   <a:srgbClr val="64748B"/>
                 </a:solidFill>
               </a:rPr>
-              <a:t>Resolución desatendida sin intervención humana en recepción.</a:t>
+              <a:t>Citas y dudas resueltas sin carga humana.</a:t>
             </a:r>
           </a:p>
           <a:p>
             <a:pPr>
               <a:spcBef>
-                <a:spcPts val="800"/>
+                <a:spcPts val="1200"/>
               </a:spcBef>
-              <a:defRPr b="1" sz="1100">
+              <a:defRPr b="1" sz="1300">
                 <a:solidFill>
                   <a:srgbClr val="1E293B"/>
                 </a:solidFill>
@@ -4064,22 +5585,22 @@
                   <a:srgbClr val="64748B"/>
                 </a:solidFill>
               </a:rPr>
-              <a:t>Recordatorios 24h interactivos con confirmación y cancelación en 1 clic.</a:t>
+              <a:t>Recordatorios automáticos con botón en 1 clic.</a:t>
             </a:r>
           </a:p>
           <a:p>
             <a:pPr>
               <a:spcBef>
-                <a:spcPts val="800"/>
+                <a:spcPts val="1200"/>
               </a:spcBef>
-              <a:defRPr b="1" sz="1100">
+              <a:defRPr b="1" sz="1300">
                 <a:solidFill>
                   <a:srgbClr val="1E293B"/>
                 </a:solidFill>
               </a:defRPr>
             </a:pPr>
             <a:r>
-              <a:t>• Integración ERP Robusta: </a:t>
+              <a:t>• Cero Errores en Agenda: </a:t>
             </a:r>
             <a:r>
               <a:rPr b="0">
@@ -4087,7 +5608,7 @@
                   <a:srgbClr val="64748B"/>
                 </a:solidFill>
               </a:rPr>
-              <a:t>UiPath ReFramework garantiza 0% errores de doble reserva.</a:t>
+              <a:t>Sincronización desatendida y determinística.</a:t>
             </a:r>
           </a:p>
         </p:txBody>
@@ -4118,8 +5639,8 @@
         </p:nvSpPr>
         <p:spPr>
           <a:xfrm>
-            <a:off x="731520" y="365760"/>
-            <a:ext cx="10698480" cy="365760"/>
+            <a:off x="731520" y="320040"/>
+            <a:ext cx="10698480" cy="320040"/>
           </a:xfrm>
           <a:prstGeom prst="rect">
             <a:avLst/>
@@ -4133,7 +5654,7 @@
           <a:lstStyle/>
           <a:p>
             <a:pPr>
-              <a:defRPr sz="1000" b="1">
+              <a:defRPr sz="1100" b="1">
                 <a:solidFill>
                   <a:srgbClr val="2563EB"/>
                 </a:solidFill>
@@ -4153,8 +5674,8 @@
         </p:nvSpPr>
         <p:spPr>
           <a:xfrm>
-            <a:off x="731520" y="640080"/>
-            <a:ext cx="10698480" cy="640080"/>
+            <a:off x="731520" y="621792"/>
+            <a:ext cx="10698480" cy="685800"/>
           </a:xfrm>
           <a:prstGeom prst="rect">
             <a:avLst/>
@@ -4168,14 +5689,14 @@
           <a:lstStyle/>
           <a:p>
             <a:pPr>
-              <a:defRPr sz="2200" b="1">
+              <a:defRPr sz="2500" b="1">
                 <a:solidFill>
                   <a:srgbClr val="0A2540"/>
                 </a:solidFill>
               </a:defRPr>
             </a:pPr>
             <a:r>
-              <a:t>2. Marco Metodológico WAT y Selección del Stack Tecnológico</a:t>
+              <a:t>2. Marco Metodológico WAT y Selección del Stack</a:t>
             </a:r>
           </a:p>
         </p:txBody>
@@ -4188,8 +5709,8 @@
         </p:nvSpPr>
         <p:spPr>
           <a:xfrm>
-            <a:off x="731520" y="1463040"/>
-            <a:ext cx="3328416" cy="4663440"/>
+            <a:off x="731520" y="1417320"/>
+            <a:ext cx="3328416" cy="4754880"/>
           </a:xfrm>
           <a:prstGeom prst="roundRect">
             <a:avLst/>
@@ -4233,8 +5754,8 @@
         </p:nvSpPr>
         <p:spPr>
           <a:xfrm>
-            <a:off x="914400" y="1645920"/>
-            <a:ext cx="2962656" cy="4297680"/>
+            <a:off x="914400" y="1600200"/>
+            <a:ext cx="2962656" cy="4389120"/>
           </a:xfrm>
           <a:prstGeom prst="rect">
             <a:avLst/>
@@ -4248,37 +5769,37 @@
           <a:lstStyle/>
           <a:p>
             <a:pPr>
-              <a:defRPr sz="1600" b="1">
+              <a:defRPr sz="2000" b="1">
                 <a:solidFill>
                   <a:srgbClr val="2563EB"/>
                 </a:solidFill>
               </a:defRPr>
             </a:pPr>
             <a:r>
-              <a:t>WORKFLOWS (Flujos)</a:t>
+              <a:t>WORKFLOWS</a:t>
             </a:r>
           </a:p>
           <a:p>
             <a:pPr>
               <a:spcBef>
-                <a:spcPts val="200"/>
+                <a:spcPts val="300"/>
               </a:spcBef>
-              <a:defRPr sz="1100" b="1">
+              <a:defRPr sz="1300" b="1">
                 <a:solidFill>
                   <a:srgbClr val="64748B"/>
                 </a:solidFill>
               </a:defRPr>
             </a:pPr>
             <a:r>
-              <a:t>Orquestación Centralizada — n8n</a:t>
+              <a:t>Orquestación — n8n</a:t>
             </a:r>
           </a:p>
           <a:p>
             <a:pPr>
               <a:spcBef>
-                <a:spcPts val="800"/>
+                <a:spcPts val="1100"/>
               </a:spcBef>
-              <a:defRPr b="1" sz="1050">
+              <a:defRPr b="1" sz="1200">
                 <a:solidFill>
                   <a:srgbClr val="1E293B"/>
                 </a:solidFill>
@@ -4293,15 +5814,15 @@
                   <a:srgbClr val="64748B"/>
                 </a:solidFill>
               </a:rPr>
-              <a:t>Bifurcaciones condicionales, webhooks síncronos y cron jobs programados.</a:t>
+              <a:t>Ruteo determinístico, webhooks y triggers programados.</a:t>
             </a:r>
           </a:p>
           <a:p>
             <a:pPr>
               <a:spcBef>
-                <a:spcPts val="800"/>
+                <a:spcPts val="1100"/>
               </a:spcBef>
-              <a:defRPr b="1" sz="1050">
+              <a:defRPr b="1" sz="1200">
                 <a:solidFill>
                   <a:srgbClr val="1E293B"/>
                 </a:solidFill>
@@ -4316,22 +5837,22 @@
                   <a:srgbClr val="64748B"/>
                 </a:solidFill>
               </a:rPr>
-              <a:t>Transformación robusta sin las limitaciones de expresiones propietarias.</a:t>
+              <a:t>Transformación robusta sin dependencias complejas.</a:t>
             </a:r>
           </a:p>
           <a:p>
             <a:pPr>
               <a:spcBef>
-                <a:spcPts val="800"/>
+                <a:spcPts val="1100"/>
               </a:spcBef>
-              <a:defRPr b="1" sz="1050">
+              <a:defRPr b="1" sz="1200">
                 <a:solidFill>
                   <a:srgbClr val="1E293B"/>
                 </a:solidFill>
               </a:defRPr>
             </a:pPr>
             <a:r>
-              <a:t>• Gobernanza y RGPD: </a:t>
+              <a:t>• Soberanía y RGPD: </a:t>
             </a:r>
             <a:r>
               <a:rPr b="0">
@@ -4339,22 +5860,22 @@
                   <a:srgbClr val="64748B"/>
                 </a:solidFill>
               </a:rPr>
-              <a:t>Capacidad de auto-hospedaje (Self-hosted) en servidores europeos protegidos.</a:t>
+              <a:t>Posibilidad de auto-hospedaje con datos seguros en la UE.</a:t>
             </a:r>
           </a:p>
           <a:p>
             <a:pPr>
               <a:spcBef>
-                <a:spcPts val="800"/>
+                <a:spcPts val="1100"/>
               </a:spcBef>
-              <a:defRPr b="1" sz="1050">
+              <a:defRPr b="1" sz="1200">
                 <a:solidFill>
                   <a:srgbClr val="1E293B"/>
                 </a:solidFill>
               </a:defRPr>
             </a:pPr>
             <a:r>
-              <a:t>• Coste Fijo Escalar: </a:t>
+              <a:t>• Coste Fijo y Predecible: </a:t>
             </a:r>
             <a:r>
               <a:rPr b="0">
@@ -4362,7 +5883,7 @@
                   <a:srgbClr val="64748B"/>
                 </a:solidFill>
               </a:rPr>
-              <a:t>Sin penalización por créditos o número de operaciones como Make.</a:t>
+              <a:t>Sin penalización por créditos u operaciones por volumen.</a:t>
             </a:r>
           </a:p>
         </p:txBody>
@@ -4375,8 +5896,8 @@
         </p:nvSpPr>
         <p:spPr>
           <a:xfrm>
-            <a:off x="4425696" y="1463040"/>
-            <a:ext cx="3328416" cy="4663440"/>
+            <a:off x="4425696" y="1417320"/>
+            <a:ext cx="3328416" cy="4754880"/>
           </a:xfrm>
           <a:prstGeom prst="roundRect">
             <a:avLst/>
@@ -4420,8 +5941,8 @@
         </p:nvSpPr>
         <p:spPr>
           <a:xfrm>
-            <a:off x="4608576" y="1645920"/>
-            <a:ext cx="2962656" cy="4297680"/>
+            <a:off x="4608576" y="1600200"/>
+            <a:ext cx="2962656" cy="4389120"/>
           </a:xfrm>
           <a:prstGeom prst="rect">
             <a:avLst/>
@@ -4435,44 +5956,44 @@
           <a:lstStyle/>
           <a:p>
             <a:pPr>
-              <a:defRPr sz="1600" b="1">
+              <a:defRPr sz="2000" b="1">
                 <a:solidFill>
                   <a:srgbClr val="0A2540"/>
                 </a:solidFill>
               </a:defRPr>
             </a:pPr>
             <a:r>
-              <a:t>AGENTS (Agentes)</a:t>
+              <a:t>AGENTS</a:t>
             </a:r>
           </a:p>
           <a:p>
             <a:pPr>
               <a:spcBef>
-                <a:spcPts val="200"/>
+                <a:spcPts val="300"/>
               </a:spcBef>
-              <a:defRPr sz="1100" b="1">
+              <a:defRPr sz="1300" b="1">
                 <a:solidFill>
                   <a:srgbClr val="64748B"/>
                 </a:solidFill>
               </a:defRPr>
             </a:pPr>
             <a:r>
-              <a:t>Inteligencia Cognitiva — GPT-4o</a:t>
+              <a:t>Cognición — GPT-4o</a:t>
             </a:r>
           </a:p>
           <a:p>
             <a:pPr>
               <a:spcBef>
-                <a:spcPts val="800"/>
+                <a:spcPts val="1100"/>
               </a:spcBef>
-              <a:defRPr b="1" sz="1050">
+              <a:defRPr b="1" sz="1200">
                 <a:solidFill>
                   <a:srgbClr val="1E293B"/>
                 </a:solidFill>
               </a:defRPr>
             </a:pPr>
             <a:r>
-              <a:t>• Razonamiento Probabilístico: </a:t>
+              <a:t>• Lenguaje Natural Flexible: </a:t>
             </a:r>
             <a:r>
               <a:rPr b="0">
@@ -4480,15 +6001,15 @@
                   <a:srgbClr val="64748B"/>
                 </a:solidFill>
               </a:rPr>
-              <a:t>Interpretación de lenguaje natural libre y extracción de entidades (slot-filling).</a:t>
+              <a:t>Extracción precisa de intención, DNI y slots médicos.</a:t>
             </a:r>
           </a:p>
           <a:p>
             <a:pPr>
               <a:spcBef>
-                <a:spcPts val="800"/>
+                <a:spcPts val="1100"/>
               </a:spcBef>
-              <a:defRPr b="1" sz="1050">
+              <a:defRPr b="1" sz="1200">
                 <a:solidFill>
                   <a:srgbClr val="1E293B"/>
                 </a:solidFill>
@@ -4503,15 +6024,15 @@
                   <a:srgbClr val="64748B"/>
                 </a:solidFill>
               </a:rPr>
-              <a:t>Agente Triaje/Clasificador + Agente Gestor de Citas + Agente RAG Clínico.</a:t>
+              <a:t>Agente Triaje/Clasificador, Gestor de Citas y RAG Clínico.</a:t>
             </a:r>
           </a:p>
           <a:p>
             <a:pPr>
               <a:spcBef>
-                <a:spcPts val="800"/>
+                <a:spcPts val="1100"/>
               </a:spcBef>
-              <a:defRPr b="1" sz="1050">
+              <a:defRPr b="1" sz="1200">
                 <a:solidFill>
                   <a:srgbClr val="1E293B"/>
                 </a:solidFill>
@@ -4526,22 +6047,22 @@
                   <a:srgbClr val="64748B"/>
                 </a:solidFill>
               </a:rPr>
-              <a:t>Validación rígida de JSON Schema con Temperature=0.0 para evitar desvíos.</a:t>
+              <a:t>JSON Schema forzado con Temperature=0.0 sin alucinación.</a:t>
             </a:r>
           </a:p>
           <a:p>
             <a:pPr>
               <a:spcBef>
-                <a:spcPts val="800"/>
+                <a:spcPts val="1100"/>
               </a:spcBef>
-              <a:defRPr b="1" sz="1050">
+              <a:defRPr b="1" sz="1200">
                 <a:solidFill>
                   <a:srgbClr val="1E293B"/>
                 </a:solidFill>
               </a:defRPr>
             </a:pPr>
             <a:r>
-              <a:t>• Memoria Persistente: </a:t>
+              <a:t>• Memoria Conversacional: </a:t>
             </a:r>
             <a:r>
               <a:rPr b="0">
@@ -4549,7 +6070,7 @@
                   <a:srgbClr val="64748B"/>
                 </a:solidFill>
               </a:rPr>
-              <a:t>Seguimiento de sesión por Telegram Chat ID sin pérdida de contexto.</a:t>
+              <a:t>Persistencia contextual por Telegram Chat ID.</a:t>
             </a:r>
           </a:p>
         </p:txBody>
@@ -4562,8 +6083,8 @@
         </p:nvSpPr>
         <p:spPr>
           <a:xfrm>
-            <a:off x="8119872" y="1463040"/>
-            <a:ext cx="3328416" cy="4663440"/>
+            <a:off x="8119872" y="1417320"/>
+            <a:ext cx="3328416" cy="4754880"/>
           </a:xfrm>
           <a:prstGeom prst="roundRect">
             <a:avLst/>
@@ -4607,8 +6128,8 @@
         </p:nvSpPr>
         <p:spPr>
           <a:xfrm>
-            <a:off x="8302752" y="1645920"/>
-            <a:ext cx="2962656" cy="4297680"/>
+            <a:off x="8302752" y="1600200"/>
+            <a:ext cx="2962656" cy="4389120"/>
           </a:xfrm>
           <a:prstGeom prst="rect">
             <a:avLst/>
@@ -4622,37 +6143,37 @@
           <a:lstStyle/>
           <a:p>
             <a:pPr>
-              <a:defRPr sz="1600" b="1">
+              <a:defRPr sz="2000" b="1">
                 <a:solidFill>
                   <a:srgbClr val="10B981"/>
                 </a:solidFill>
               </a:defRPr>
             </a:pPr>
             <a:r>
-              <a:t>TOOLS (Herramientas)</a:t>
+              <a:t>TOOLS</a:t>
             </a:r>
           </a:p>
           <a:p>
             <a:pPr>
               <a:spcBef>
-                <a:spcPts val="200"/>
+                <a:spcPts val="300"/>
               </a:spcBef>
-              <a:defRPr sz="1100" b="1">
+              <a:defRPr sz="1300" b="1">
                 <a:solidFill>
                   <a:srgbClr val="64748B"/>
                 </a:solidFill>
               </a:defRPr>
             </a:pPr>
             <a:r>
-              <a:t>Ejecución Determinística — Supabase &amp; UiPath</a:t>
+              <a:t>Ejecución — Supabase &amp; UiPath</a:t>
             </a:r>
           </a:p>
           <a:p>
             <a:pPr>
               <a:spcBef>
-                <a:spcPts val="800"/>
+                <a:spcPts val="1100"/>
               </a:spcBef>
-              <a:defRPr b="1" sz="1050">
+              <a:defRPr b="1" sz="1200">
                 <a:solidFill>
                   <a:srgbClr val="1E293B"/>
                 </a:solidFill>
@@ -4667,15 +6188,15 @@
                   <a:srgbClr val="64748B"/>
                 </a:solidFill>
               </a:rPr>
-              <a:t>PostgreSQL unificado con búsqueda vectorial de similitud de coseno en &lt; 50 ms.</a:t>
+              <a:t>PostgreSQL relacional con búsqueda semántica en &lt; 50ms.</a:t>
             </a:r>
           </a:p>
           <a:p>
             <a:pPr>
               <a:spcBef>
-                <a:spcPts val="800"/>
+                <a:spcPts val="1100"/>
               </a:spcBef>
-              <a:defRPr b="1" sz="1050">
+              <a:defRPr b="1" sz="1200">
                 <a:solidFill>
                   <a:srgbClr val="1E293B"/>
                 </a:solidFill>
@@ -4690,15 +6211,15 @@
                   <a:srgbClr val="64748B"/>
                 </a:solidFill>
               </a:rPr>
-              <a:t>Automatización de UI sobre el Mock ERP con selectores semánticos indestructible.</a:t>
+              <a:t>Robot desatendido sobre el ERP web legado con selectores triples.</a:t>
             </a:r>
           </a:p>
           <a:p>
             <a:pPr>
               <a:spcBef>
-                <a:spcPts val="800"/>
+                <a:spcPts val="1100"/>
               </a:spcBef>
-              <a:defRPr b="1" sz="1050">
+              <a:defRPr b="1" sz="1200">
                 <a:solidFill>
                   <a:srgbClr val="1E293B"/>
                 </a:solidFill>
@@ -4713,15 +6234,15 @@
                   <a:srgbClr val="64748B"/>
                 </a:solidFill>
               </a:rPr>
-              <a:t>Canal oficial con botones interactivos, formato enriquecido y coste cero por mensaje.</a:t>
+              <a:t>Canal omnicanal ágil, con botones inline y coste cero por mensaje.</a:t>
             </a:r>
           </a:p>
           <a:p>
             <a:pPr>
               <a:spcBef>
-                <a:spcPts val="800"/>
+                <a:spcPts val="1100"/>
               </a:spcBef>
-              <a:defRPr b="1" sz="1050">
+              <a:defRPr b="1" sz="1200">
                 <a:solidFill>
                   <a:srgbClr val="1E293B"/>
                 </a:solidFill>
@@ -4736,7 +6257,7 @@
                   <a:srgbClr val="64748B"/>
                 </a:solidFill>
               </a:rPr>
-              <a:t>Canal de alerta inmediata para recepcionistas ante fallos o urgencias médicas.</a:t>
+              <a:t>Escalado inmediato al canal de recepción clínica ante alertas.</a:t>
             </a:r>
           </a:p>
         </p:txBody>
@@ -4767,8 +6288,8 @@
         </p:nvSpPr>
         <p:spPr>
           <a:xfrm>
-            <a:off x="731520" y="365760"/>
-            <a:ext cx="10698480" cy="365760"/>
+            <a:off x="731520" y="320040"/>
+            <a:ext cx="10698480" cy="320040"/>
           </a:xfrm>
           <a:prstGeom prst="rect">
             <a:avLst/>
@@ -4782,7 +6303,7 @@
           <a:lstStyle/>
           <a:p>
             <a:pPr>
-              <a:defRPr sz="1000" b="1">
+              <a:defRPr sz="1100" b="1">
                 <a:solidFill>
                   <a:srgbClr val="2563EB"/>
                 </a:solidFill>
@@ -4802,8 +6323,8 @@
         </p:nvSpPr>
         <p:spPr>
           <a:xfrm>
-            <a:off x="731520" y="640080"/>
-            <a:ext cx="10698480" cy="640080"/>
+            <a:off x="731520" y="621792"/>
+            <a:ext cx="10698480" cy="685800"/>
           </a:xfrm>
           <a:prstGeom prst="rect">
             <a:avLst/>
@@ -4817,14 +6338,14 @@
           <a:lstStyle/>
           <a:p>
             <a:pPr>
-              <a:defRPr sz="2200" b="1">
+              <a:defRPr sz="2500" b="1">
                 <a:solidFill>
                   <a:srgbClr val="0A2540"/>
                 </a:solidFill>
               </a:defRPr>
             </a:pPr>
             <a:r>
-              <a:t>3. Arquitectura Global de Sistemas y Flujo de Integración E2E</a:t>
+              <a:t>3. Arquitectura Global de Sistemas y Flujo E2E</a:t>
             </a:r>
           </a:p>
         </p:txBody>
@@ -4837,8 +6358,8 @@
         </p:nvSpPr>
         <p:spPr>
           <a:xfrm>
-            <a:off x="731520" y="1463040"/>
-            <a:ext cx="2221992" cy="3291840"/>
+            <a:off x="731520" y="1417320"/>
+            <a:ext cx="2221992" cy="3200400"/>
           </a:xfrm>
           <a:prstGeom prst="roundRect">
             <a:avLst/>
@@ -4882,8 +6403,8 @@
         </p:nvSpPr>
         <p:spPr>
           <a:xfrm>
-            <a:off x="868680" y="1645920"/>
-            <a:ext cx="1947672" cy="2926080"/>
+            <a:off x="868680" y="1600200"/>
+            <a:ext cx="1947672" cy="2834640"/>
           </a:xfrm>
           <a:prstGeom prst="rect">
             <a:avLst/>
@@ -4897,44 +6418,44 @@
           <a:lstStyle/>
           <a:p>
             <a:pPr>
+              <a:defRPr sz="1500" b="1">
+                <a:solidFill>
+                  <a:srgbClr val="2563EB"/>
+                </a:solidFill>
+              </a:defRPr>
+            </a:pPr>
+            <a:r>
+              <a:t>1. Capa Omnicanal</a:t>
+            </a:r>
+          </a:p>
+          <a:p>
+            <a:pPr>
+              <a:spcBef>
+                <a:spcPts val="600"/>
+              </a:spcBef>
               <a:defRPr sz="1300" b="1">
                 <a:solidFill>
-                  <a:srgbClr val="2563EB"/>
-                </a:solidFill>
-              </a:defRPr>
-            </a:pPr>
-            <a:r>
-              <a:t>1. Capa Omnicanal</a:t>
+                  <a:srgbClr val="0A2540"/>
+                </a:solidFill>
+              </a:defRPr>
+            </a:pPr>
+            <a:r>
+              <a:t>Telegram Bot API</a:t>
             </a:r>
           </a:p>
           <a:p>
             <a:pPr>
               <a:spcBef>
-                <a:spcPts val="400"/>
+                <a:spcPts val="1000"/>
               </a:spcBef>
-              <a:defRPr sz="1100" b="1">
-                <a:solidFill>
-                  <a:srgbClr val="0A2540"/>
-                </a:solidFill>
-              </a:defRPr>
-            </a:pPr>
-            <a:r>
-              <a:t>Telegram Bot API (@NeclatronyDentalBot)</a:t>
-            </a:r>
-          </a:p>
-          <a:p>
-            <a:pPr>
-              <a:spcBef>
-                <a:spcPts val="800"/>
-              </a:spcBef>
-              <a:defRPr sz="1000">
+              <a:defRPr sz="1200">
                 <a:solidFill>
                   <a:srgbClr val="64748B"/>
                 </a:solidFill>
               </a:defRPr>
             </a:pPr>
             <a:r>
-              <a:t>Webhooks bidireccionales, botones interactivos Inline Keyboards, respuesta en &lt; 15 seg.</a:t>
+              <a:t>Botones interactivos Inline, sin coste por mensaje, respuesta ágil.</a:t>
             </a:r>
           </a:p>
         </p:txBody>
@@ -4947,8 +6468,8 @@
         </p:nvSpPr>
         <p:spPr>
           <a:xfrm>
-            <a:off x="3566160" y="1463040"/>
-            <a:ext cx="2221992" cy="3291840"/>
+            <a:off x="3566160" y="1417320"/>
+            <a:ext cx="2221992" cy="3200400"/>
           </a:xfrm>
           <a:prstGeom prst="roundRect">
             <a:avLst/>
@@ -4992,8 +6513,8 @@
         </p:nvSpPr>
         <p:spPr>
           <a:xfrm>
-            <a:off x="3703320" y="1645920"/>
-            <a:ext cx="1947672" cy="2926080"/>
+            <a:off x="3703320" y="1600200"/>
+            <a:ext cx="1947672" cy="2834640"/>
           </a:xfrm>
           <a:prstGeom prst="rect">
             <a:avLst/>
@@ -5007,44 +6528,44 @@
           <a:lstStyle/>
           <a:p>
             <a:pPr>
+              <a:defRPr sz="1500" b="1">
+                <a:solidFill>
+                  <a:srgbClr val="2563EB"/>
+                </a:solidFill>
+              </a:defRPr>
+            </a:pPr>
+            <a:r>
+              <a:t>2. Capa Orquestación &amp; IA</a:t>
+            </a:r>
+          </a:p>
+          <a:p>
+            <a:pPr>
+              <a:spcBef>
+                <a:spcPts val="600"/>
+              </a:spcBef>
               <a:defRPr sz="1300" b="1">
                 <a:solidFill>
-                  <a:srgbClr val="2563EB"/>
-                </a:solidFill>
-              </a:defRPr>
-            </a:pPr>
-            <a:r>
-              <a:t>2. Capa de Orquestación &amp; IA</a:t>
+                  <a:srgbClr val="0A2540"/>
+                </a:solidFill>
+              </a:defRPr>
+            </a:pPr>
+            <a:r>
+              <a:t>n8n + OpenAI GPT-4o</a:t>
             </a:r>
           </a:p>
           <a:p>
             <a:pPr>
               <a:spcBef>
-                <a:spcPts val="400"/>
+                <a:spcPts val="1000"/>
               </a:spcBef>
-              <a:defRPr sz="1100" b="1">
-                <a:solidFill>
-                  <a:srgbClr val="0A2540"/>
-                </a:solidFill>
-              </a:defRPr>
-            </a:pPr>
-            <a:r>
-              <a:t>n8n Cloud / VPS + OpenAI GPT-4o</a:t>
-            </a:r>
-          </a:p>
-          <a:p>
-            <a:pPr>
-              <a:spcBef>
-                <a:spcPts val="800"/>
-              </a:spcBef>
-              <a:defRPr sz="1000">
+              <a:defRPr sz="1200">
                 <a:solidFill>
                   <a:srgbClr val="64748B"/>
                 </a:solidFill>
               </a:defRPr>
             </a:pPr>
             <a:r>
-              <a:t>Normalizador de payload, Router condicional, Agente Triaje, Agente Citas y Agente RAG.</a:t>
+              <a:t>Normalizador, router condicional, agentes de triaje, citas y RAG.</a:t>
             </a:r>
           </a:p>
         </p:txBody>
@@ -5057,8 +6578,8 @@
         </p:nvSpPr>
         <p:spPr>
           <a:xfrm>
-            <a:off x="6400800" y="1463040"/>
-            <a:ext cx="2221992" cy="3291840"/>
+            <a:off x="6400800" y="1417320"/>
+            <a:ext cx="2221992" cy="3200400"/>
           </a:xfrm>
           <a:prstGeom prst="roundRect">
             <a:avLst/>
@@ -5102,8 +6623,8 @@
         </p:nvSpPr>
         <p:spPr>
           <a:xfrm>
-            <a:off x="6537960" y="1645920"/>
-            <a:ext cx="1947672" cy="2926080"/>
+            <a:off x="6537960" y="1600200"/>
+            <a:ext cx="1947672" cy="2834640"/>
           </a:xfrm>
           <a:prstGeom prst="rect">
             <a:avLst/>
@@ -5117,44 +6638,44 @@
           <a:lstStyle/>
           <a:p>
             <a:pPr>
+              <a:defRPr sz="1500" b="1">
+                <a:solidFill>
+                  <a:srgbClr val="2563EB"/>
+                </a:solidFill>
+              </a:defRPr>
+            </a:pPr>
+            <a:r>
+              <a:t>3. Capa Datos &amp; Conocimiento</a:t>
+            </a:r>
+          </a:p>
+          <a:p>
+            <a:pPr>
+              <a:spcBef>
+                <a:spcPts val="600"/>
+              </a:spcBef>
               <a:defRPr sz="1300" b="1">
                 <a:solidFill>
-                  <a:srgbClr val="2563EB"/>
-                </a:solidFill>
-              </a:defRPr>
-            </a:pPr>
-            <a:r>
-              <a:t>3. Capa de Datos &amp; Conocimiento</a:t>
+                  <a:srgbClr val="0A2540"/>
+                </a:solidFill>
+              </a:defRPr>
+            </a:pPr>
+            <a:r>
+              <a:t>Supabase PostgreSQL + pgvector</a:t>
             </a:r>
           </a:p>
           <a:p>
             <a:pPr>
               <a:spcBef>
-                <a:spcPts val="400"/>
+                <a:spcPts val="1000"/>
               </a:spcBef>
-              <a:defRPr sz="1100" b="1">
-                <a:solidFill>
-                  <a:srgbClr val="0A2540"/>
-                </a:solidFill>
-              </a:defRPr>
-            </a:pPr>
-            <a:r>
-              <a:t>Supabase PostgreSQL + pgvector</a:t>
-            </a:r>
-          </a:p>
-          <a:p>
-            <a:pPr>
-              <a:spcBef>
-                <a:spcPts val="800"/>
-              </a:spcBef>
-              <a:defRPr sz="1000">
+              <a:defRPr sz="1200">
                 <a:solidFill>
                   <a:srgbClr val="64748B"/>
                 </a:solidFill>
               </a:defRPr>
             </a:pPr>
             <a:r>
-              <a:t>25 Pacientes, 97 Citas (80% capacidad), Catálogo RAG médico y auditoría forense.</a:t>
+              <a:t>25 Pacientes, 97 Citas (80% capacidad), búsqueda semántica &lt; 50ms.</a:t>
             </a:r>
           </a:p>
         </p:txBody>
@@ -5167,8 +6688,8 @@
         </p:nvSpPr>
         <p:spPr>
           <a:xfrm>
-            <a:off x="9235440" y="1463040"/>
-            <a:ext cx="2221992" cy="3291840"/>
+            <a:off x="9235440" y="1417320"/>
+            <a:ext cx="2221992" cy="3200400"/>
           </a:xfrm>
           <a:prstGeom prst="roundRect">
             <a:avLst/>
@@ -5212,8 +6733,8 @@
         </p:nvSpPr>
         <p:spPr>
           <a:xfrm>
-            <a:off x="9372600" y="1645920"/>
-            <a:ext cx="1947672" cy="2926080"/>
+            <a:off x="9372600" y="1600200"/>
+            <a:ext cx="1947672" cy="2834640"/>
           </a:xfrm>
           <a:prstGeom prst="rect">
             <a:avLst/>
@@ -5227,44 +6748,44 @@
           <a:lstStyle/>
           <a:p>
             <a:pPr>
+              <a:defRPr sz="1500" b="1">
+                <a:solidFill>
+                  <a:srgbClr val="2563EB"/>
+                </a:solidFill>
+              </a:defRPr>
+            </a:pPr>
+            <a:r>
+              <a:t>4. Capa Robótica RPA</a:t>
+            </a:r>
+          </a:p>
+          <a:p>
+            <a:pPr>
+              <a:spcBef>
+                <a:spcPts val="600"/>
+              </a:spcBef>
               <a:defRPr sz="1300" b="1">
                 <a:solidFill>
-                  <a:srgbClr val="2563EB"/>
-                </a:solidFill>
-              </a:defRPr>
-            </a:pPr>
-            <a:r>
-              <a:t>4. Capa Robótica RPA</a:t>
+                  <a:srgbClr val="0A2540"/>
+                </a:solidFill>
+              </a:defRPr>
+            </a:pPr>
+            <a:r>
+              <a:t>UiPath Orchestrator + Robot</a:t>
             </a:r>
           </a:p>
           <a:p>
             <a:pPr>
               <a:spcBef>
-                <a:spcPts val="400"/>
+                <a:spcPts val="1000"/>
               </a:spcBef>
-              <a:defRPr sz="1100" b="1">
-                <a:solidFill>
-                  <a:srgbClr val="0A2540"/>
-                </a:solidFill>
-              </a:defRPr>
-            </a:pPr>
-            <a:r>
-              <a:t>UiPath Orchestrator + ReFramework v1.1.9</a:t>
-            </a:r>
-          </a:p>
-          <a:p>
-            <a:pPr>
-              <a:spcBef>
-                <a:spcPts val="800"/>
-              </a:spcBef>
-              <a:defRPr sz="1000">
+              <a:defRPr sz="1200">
                 <a:solidFill>
                   <a:srgbClr val="64748B"/>
                 </a:solidFill>
               </a:defRPr>
             </a:pPr>
             <a:r>
-              <a:t>Robot desatendido sobre Mock ERP web, selectores determinísticos (fecha/hora/paciente).</a:t>
+              <a:t>Automatización desatendida sobre ERP web legacy con selectores triples.</a:t>
             </a:r>
           </a:p>
         </p:txBody>
@@ -5277,8 +6798,8 @@
         </p:nvSpPr>
         <p:spPr>
           <a:xfrm>
-            <a:off x="731520" y="4937760"/>
-            <a:ext cx="10725912" cy="1280160"/>
+            <a:off x="731520" y="4846320"/>
+            <a:ext cx="10725912" cy="1325880"/>
           </a:xfrm>
           <a:prstGeom prst="roundRect">
             <a:avLst/>
@@ -5322,7 +6843,7 @@
         </p:nvSpPr>
         <p:spPr>
           <a:xfrm>
-            <a:off x="914400" y="5029200"/>
+            <a:off x="914400" y="4983480"/>
             <a:ext cx="10360152" cy="1097280"/>
           </a:xfrm>
           <a:prstGeom prst="rect">
@@ -5337,29 +6858,29 @@
           <a:lstStyle/>
           <a:p>
             <a:pPr>
-              <a:defRPr sz="1200" b="1">
+              <a:defRPr sz="1400" b="1">
                 <a:solidFill>
                   <a:srgbClr val="2563EB"/>
                 </a:solidFill>
               </a:defRPr>
             </a:pPr>
             <a:r>
-              <a:t>⚡ Sincronización Asíncrona &amp; Desacoplada:</a:t>
+              <a:t>⚡ Flujo Asíncrono Desacoplado (Alta Concurrencia y Resiliencia):</a:t>
             </a:r>
           </a:p>
           <a:p>
             <a:pPr>
               <a:spcBef>
-                <a:spcPts val="400"/>
+                <a:spcPts val="600"/>
               </a:spcBef>
-              <a:defRPr sz="1050">
+              <a:defRPr sz="1250">
                 <a:solidFill>
                   <a:srgbClr val="1E293B"/>
                 </a:solidFill>
               </a:defRPr>
             </a:pPr>
             <a:r>
-              <a:t>1) El paciente solicita la cita por Telegram  ➔  2) n8n valida disponibilidad en Supabase sin demoras  ➔  3) Dispara la llamada REST a UiPath Orchestrator  ➔  4) El robot impacta el turno en la web del ERP  ➔  5) Se notifica confirmación en Telegram con teclado interactivo.</a:t>
+              <a:t>1) Paciente solicita cita en Telegram  ➔  2) n8n valida en Supabase en 40 ms  ➔  3) Notifica confirmación inmediata al paciente  ➔  4) Encola la orden en UiPath Orchestrator  ➔  5) El robot asienta la cita en el Mock ERP sin bloquear la conversación.</a:t>
             </a:r>
           </a:p>
         </p:txBody>
@@ -5390,8 +6911,8 @@
         </p:nvSpPr>
         <p:spPr>
           <a:xfrm>
-            <a:off x="731520" y="365760"/>
-            <a:ext cx="10698480" cy="365760"/>
+            <a:off x="731520" y="320040"/>
+            <a:ext cx="10698480" cy="320040"/>
           </a:xfrm>
           <a:prstGeom prst="rect">
             <a:avLst/>
@@ -5405,7 +6926,7 @@
           <a:lstStyle/>
           <a:p>
             <a:pPr>
-              <a:defRPr sz="1000" b="1">
+              <a:defRPr sz="1100" b="1">
                 <a:solidFill>
                   <a:srgbClr val="2563EB"/>
                 </a:solidFill>
@@ -5425,8 +6946,8 @@
         </p:nvSpPr>
         <p:spPr>
           <a:xfrm>
-            <a:off x="731520" y="640080"/>
-            <a:ext cx="10698480" cy="640080"/>
+            <a:off x="731520" y="621792"/>
+            <a:ext cx="10698480" cy="685800"/>
           </a:xfrm>
           <a:prstGeom prst="rect">
             <a:avLst/>
@@ -5440,14 +6961,14 @@
           <a:lstStyle/>
           <a:p>
             <a:pPr>
-              <a:defRPr sz="2200" b="1">
+              <a:defRPr sz="2500" b="1">
                 <a:solidFill>
                   <a:srgbClr val="0A2540"/>
                 </a:solidFill>
               </a:defRPr>
             </a:pPr>
             <a:r>
-              <a:t>4. Arquitectura de Manejo de Errores y Notificación a Recepción</a:t>
+              <a:t>4. Manejo Integral de Errores y Notificación (HITL)</a:t>
             </a:r>
           </a:p>
         </p:txBody>
@@ -5460,8 +6981,8 @@
         </p:nvSpPr>
         <p:spPr>
           <a:xfrm>
-            <a:off x="731520" y="1463040"/>
-            <a:ext cx="5212080" cy="4663440"/>
+            <a:off x="731520" y="1417320"/>
+            <a:ext cx="5212080" cy="4754880"/>
           </a:xfrm>
           <a:prstGeom prst="roundRect">
             <a:avLst/>
@@ -5505,8 +7026,8 @@
         </p:nvSpPr>
         <p:spPr>
           <a:xfrm>
-            <a:off x="914400" y="1645920"/>
-            <a:ext cx="4846320" cy="4297680"/>
+            <a:off x="914400" y="1600200"/>
+            <a:ext cx="4846320" cy="4389120"/>
           </a:xfrm>
           <a:prstGeom prst="rect">
             <a:avLst/>
@@ -5520,29 +7041,29 @@
           <a:lstStyle/>
           <a:p>
             <a:pPr>
-              <a:defRPr sz="1500" b="1">
+              <a:defRPr sz="1800" b="1">
                 <a:solidFill>
                   <a:srgbClr val="0A2540"/>
                 </a:solidFill>
               </a:defRPr>
             </a:pPr>
             <a:r>
-              <a:t>🛡️ Resiliencia en Capa de Orquestación (n8n)</a:t>
+              <a:t>🛡️ Control y Prevención en n8n &amp; BD</a:t>
             </a:r>
           </a:p>
           <a:p>
             <a:pPr>
               <a:spcBef>
-                <a:spcPts val="600"/>
+                <a:spcPts val="1100"/>
               </a:spcBef>
-              <a:defRPr b="1" sz="1050">
+              <a:defRPr b="1" sz="1300">
                 <a:solidFill>
                   <a:srgbClr val="1E293B"/>
                 </a:solidFill>
               </a:defRPr>
             </a:pPr>
             <a:r>
-              <a:t>• Esquemas JSON Schema Obligatorios: </a:t>
+              <a:t>• Intercepción de Botones: </a:t>
             </a:r>
             <a:r>
               <a:rPr b="0">
@@ -5550,22 +7071,22 @@
                   <a:srgbClr val="64748B"/>
                 </a:solidFill>
               </a:rPr>
-              <a:t>Herramientas LangChain configuradas con 'specifyInputSchema: true', evitando fallos de tipado o parámetros desestructurados.</a:t>
+              <a:t>El normalizador procesa CONFIRMAR y CANCELAR directamente, sin depender del LLM.</a:t>
             </a:r>
           </a:p>
           <a:p>
             <a:pPr>
               <a:spcBef>
-                <a:spcPts val="600"/>
+                <a:spcPts val="1100"/>
               </a:spcBef>
-              <a:defRPr b="1" sz="1050">
+              <a:defRPr b="1" sz="1300">
                 <a:solidFill>
                   <a:srgbClr val="1E293B"/>
                 </a:solidFill>
               </a:defRPr>
             </a:pPr>
             <a:r>
-              <a:t>• Intercepción Determinística de Botones: </a:t>
+              <a:t>• JSON Schema Estricto: </a:t>
             </a:r>
             <a:r>
               <a:rPr b="0">
@@ -5573,22 +7094,22 @@
                   <a:srgbClr val="64748B"/>
                 </a:solidFill>
               </a:rPr>
-              <a:t>El 'Normalizador de Mensaje' procesa directamente 'CONFIRMAR_CITA:' y 'CANCELAR_CITA:'. Actualiza Supabase y dispara UiPath antes del LLM, eliminando omisiones del agente.</a:t>
+              <a:t>Todas las herramientas exigen parámetros tipados obligatorios sin ambigüedad.</a:t>
             </a:r>
           </a:p>
           <a:p>
             <a:pPr>
               <a:spcBef>
-                <a:spcPts val="600"/>
+                <a:spcPts val="1100"/>
               </a:spcBef>
-              <a:defRPr b="1" sz="1050">
+              <a:defRPr b="1" sz="1300">
                 <a:solidFill>
                   <a:srgbClr val="1E293B"/>
                 </a:solidFill>
               </a:defRPr>
             </a:pPr>
             <a:r>
-              <a:t>• Resolución Inteligente en Cascada: </a:t>
+              <a:t>• Resolución en Cascada: </a:t>
             </a:r>
             <a:r>
               <a:rPr b="0">
@@ -5596,22 +7117,22 @@
                   <a:srgbClr val="64748B"/>
                 </a:solidFill>
               </a:rPr>
-              <a:t>Si el paciente pide cancelar 'la opción 2', el sistema resuelve el código real ('NEC-4096') consultando sus turnos activos por DNI o Chat ID.</a:t>
+              <a:t>Si el paciente pide cancelar 'la opción 2', el sistema infiere el ID real 'NEC-XXXX'.</a:t>
             </a:r>
           </a:p>
           <a:p>
             <a:pPr>
               <a:spcBef>
-                <a:spcPts val="600"/>
+                <a:spcPts val="1100"/>
               </a:spcBef>
-              <a:defRPr b="1" sz="1050">
+              <a:defRPr b="1" sz="1300">
                 <a:solidFill>
                   <a:srgbClr val="1E293B"/>
                 </a:solidFill>
               </a:defRPr>
             </a:pPr>
             <a:r>
-              <a:t>• Verificación de DNI en Urgencias: </a:t>
+              <a:t>• Constraint Anti-Duplicado: </a:t>
             </a:r>
             <a:r>
               <a:rPr b="0">
@@ -5619,7 +7140,7 @@
                   <a:srgbClr val="64748B"/>
                 </a:solidFill>
               </a:rPr>
-              <a:t>Exigencia obligatoria de DNI para consultar la ficha clínica antes de alarmar al equipo médico.</a:t>
+              <a:t>Supabase impide a nivel de base de datos doble cita activa en la misma especialidad.</a:t>
             </a:r>
           </a:p>
         </p:txBody>
@@ -5632,8 +7153,8 @@
         </p:nvSpPr>
         <p:spPr>
           <a:xfrm>
-            <a:off x="6245352" y="1463040"/>
-            <a:ext cx="5212080" cy="4663440"/>
+            <a:off x="6245352" y="1417320"/>
+            <a:ext cx="5212080" cy="4754880"/>
           </a:xfrm>
           <a:prstGeom prst="roundRect">
             <a:avLst/>
@@ -5677,8 +7198,8 @@
         </p:nvSpPr>
         <p:spPr>
           <a:xfrm>
-            <a:off x="6428232" y="1645920"/>
-            <a:ext cx="4846320" cy="4297680"/>
+            <a:off x="6428232" y="1600200"/>
+            <a:ext cx="4846320" cy="4389120"/>
           </a:xfrm>
           <a:prstGeom prst="rect">
             <a:avLst/>
@@ -5692,29 +7213,29 @@
           <a:lstStyle/>
           <a:p>
             <a:pPr>
-              <a:defRPr sz="1500" b="1">
+              <a:defRPr sz="1800" b="1">
                 <a:solidFill>
                   <a:srgbClr val="EF4444"/>
                 </a:solidFill>
               </a:defRPr>
             </a:pPr>
             <a:r>
-              <a:t>🚨 Notificación a Recepción (Human-in-the-Loop)</a:t>
+              <a:t>🚨 Human-in-the-Loop &amp; Notificación</a:t>
             </a:r>
           </a:p>
           <a:p>
             <a:pPr>
               <a:spcBef>
-                <a:spcPts val="600"/>
+                <a:spcPts val="1100"/>
               </a:spcBef>
-              <a:defRPr b="1" sz="1050">
+              <a:defRPr b="1" sz="1300">
                 <a:solidFill>
                   <a:srgbClr val="1E293B"/>
                 </a:solidFill>
               </a:defRPr>
             </a:pPr>
             <a:r>
-              <a:t>• Selectores Triples en UiPath v1.1.9: </a:t>
+              <a:t>• Selectores Triples en UiPath: </a:t>
             </a:r>
             <a:r>
               <a:rPr b="0">
@@ -5722,15 +7243,15 @@
                   <a:srgbClr val="64748B"/>
                 </a:solidFill>
               </a:rPr>
-              <a:t>Coincidencia exacta de 'data-fecha', 'data-hora' y 'data-paciente'. Imposibilita confirmar o cancelar turnos de otros días en vistas multicomparativas.</a:t>
+              <a:t>Coincidencia exacta de fecha, hora y paciente; cero clics en días erróneos.</a:t>
             </a:r>
           </a:p>
           <a:p>
             <a:pPr>
               <a:spcBef>
-                <a:spcPts val="600"/>
+                <a:spcPts val="1100"/>
               </a:spcBef>
-              <a:defRPr b="1" sz="1050">
+              <a:defRPr b="1" sz="1300">
                 <a:solidFill>
                   <a:srgbClr val="1E293B"/>
                 </a:solidFill>
@@ -5745,22 +7266,22 @@
                   <a:srgbClr val="64748B"/>
                 </a:solidFill>
               </a:rPr>
-              <a:t>Diferenciación entre BusinessRuleException y SystemException, ejecutando hasta 3 reintentos limpios con reinicio de sesión.</a:t>
+              <a:t>Gestión de SystemException y reinicio limpio del navegador en caso de fallo.</a:t>
             </a:r>
           </a:p>
           <a:p>
             <a:pPr>
               <a:spcBef>
-                <a:spcPts val="600"/>
+                <a:spcPts val="1100"/>
               </a:spcBef>
-              <a:defRPr b="1" sz="1050">
+              <a:defRPr b="1" sz="1300">
                 <a:solidFill>
                   <a:srgbClr val="1E293B"/>
                 </a:solidFill>
               </a:defRPr>
             </a:pPr>
             <a:r>
-              <a:t>• Canal de Alerta en Grupo Telegram (-5137407308): </a:t>
+              <a:t>• Grupo Telegram de Recepción: </a:t>
             </a:r>
             <a:r>
               <a:rPr b="0">
@@ -5768,22 +7289,22 @@
                   <a:srgbClr val="64748B"/>
                 </a:solidFill>
               </a:rPr>
-              <a:t>Ante cualquier anomalía en RPA o Supabase, se despacha alerta estructurada con Proceso, Paciente, DNI, Turno y detalle técnico del fallo.</a:t>
+              <a:t>Alerta automática al canal -5137407308 con datos completos del paciente ante fallos.</a:t>
             </a:r>
           </a:p>
           <a:p>
             <a:pPr>
               <a:spcBef>
-                <a:spcPts val="600"/>
+                <a:spcPts val="1100"/>
               </a:spcBef>
-              <a:defRPr b="1" sz="1050">
+              <a:defRPr b="1" sz="1300">
                 <a:solidFill>
                   <a:srgbClr val="1E293B"/>
                 </a:solidFill>
               </a:defRPr>
             </a:pPr>
             <a:r>
-              <a:t>• Contingencia Operativa en &lt; 2 Minutos: </a:t>
+              <a:t>• Contingencia en &lt; 2 Minutos: </a:t>
             </a:r>
             <a:r>
               <a:rPr b="0">
@@ -5791,7 +7312,7 @@
                   <a:srgbClr val="64748B"/>
                 </a:solidFill>
               </a:rPr>
-              <a:t>Las recepcionistas reciben la alerta y ejecutan la acción manualmente en la web del ERP, garantizando cero citas perdidas.</a:t>
+              <a:t>El personal clínico interviene de inmediato y resuelve la excepción manualmente.</a:t>
             </a:r>
           </a:p>
         </p:txBody>
@@ -5822,8 +7343,8 @@
         </p:nvSpPr>
         <p:spPr>
           <a:xfrm>
-            <a:off x="731520" y="365760"/>
-            <a:ext cx="10698480" cy="365760"/>
+            <a:off x="731520" y="320040"/>
+            <a:ext cx="10698480" cy="320040"/>
           </a:xfrm>
           <a:prstGeom prst="rect">
             <a:avLst/>
@@ -5837,7 +7358,7 @@
           <a:lstStyle/>
           <a:p>
             <a:pPr>
-              <a:defRPr sz="1000" b="1">
+              <a:defRPr sz="1100" b="1">
                 <a:solidFill>
                   <a:srgbClr val="2563EB"/>
                 </a:solidFill>
@@ -5857,8 +7378,8 @@
         </p:nvSpPr>
         <p:spPr>
           <a:xfrm>
-            <a:off x="731520" y="640080"/>
-            <a:ext cx="10698480" cy="640080"/>
+            <a:off x="731520" y="621792"/>
+            <a:ext cx="10698480" cy="685800"/>
           </a:xfrm>
           <a:prstGeom prst="rect">
             <a:avLst/>
@@ -5872,14 +7393,14 @@
           <a:lstStyle/>
           <a:p>
             <a:pPr>
-              <a:defRPr sz="2200" b="1">
+              <a:defRPr sz="2500" b="1">
                 <a:solidFill>
                   <a:srgbClr val="0A2540"/>
                 </a:solidFill>
               </a:defRPr>
             </a:pPr>
             <a:r>
-              <a:t>5. Matriz de Validación de Extremo a Extremo (8 Casos Clave)</a:t>
+              <a:t>5. Validación de Extremo a Extremo (8 Casos Clave)</a:t>
             </a:r>
           </a:p>
         </p:txBody>
@@ -5892,8 +7413,8 @@
         </p:nvSpPr>
         <p:spPr>
           <a:xfrm>
-            <a:off x="731520" y="1463040"/>
-            <a:ext cx="2542032" cy="2194560"/>
+            <a:off x="731520" y="1417320"/>
+            <a:ext cx="2542032" cy="2240280"/>
           </a:xfrm>
           <a:prstGeom prst="roundRect">
             <a:avLst/>
@@ -5937,8 +7458,8 @@
         </p:nvSpPr>
         <p:spPr>
           <a:xfrm>
-            <a:off x="841248" y="1572768"/>
-            <a:ext cx="2322576" cy="1975104"/>
+            <a:off x="841248" y="1527048"/>
+            <a:ext cx="2322576" cy="2020824"/>
           </a:xfrm>
           <a:prstGeom prst="rect">
             <a:avLst/>
@@ -5952,44 +7473,44 @@
           <a:lstStyle/>
           <a:p>
             <a:pPr>
-              <a:defRPr sz="1100" b="1">
+              <a:defRPr sz="1300" b="1">
                 <a:solidFill>
                   <a:srgbClr val="2563EB"/>
                 </a:solidFill>
               </a:defRPr>
             </a:pPr>
             <a:r>
-              <a:t>TC-01: Alta de Nuevo Paciente</a:t>
+              <a:t>TC-01: Alta de Paciente</a:t>
             </a:r>
           </a:p>
           <a:p>
             <a:pPr>
               <a:spcBef>
-                <a:spcPts val="400"/>
+                <a:spcPts val="600"/>
               </a:spcBef>
-              <a:defRPr sz="950">
+              <a:defRPr sz="1100">
                 <a:solidFill>
                   <a:srgbClr val="1E293B"/>
                 </a:solidFill>
               </a:defRPr>
             </a:pPr>
             <a:r>
-              <a:t>Onboarding completo por Telegram (DNI, Nombre, Teléfono), guardado en Supabase con RGPD y creación de ficha en ERP por UiPath.</a:t>
+              <a:t>Onboarding completo por Telegram (DNI, Nombre, Teléfono) y guardado en Supabase.</a:t>
             </a:r>
           </a:p>
           <a:p>
             <a:pPr>
               <a:spcBef>
-                <a:spcPts val="400"/>
+                <a:spcPts val="800"/>
               </a:spcBef>
-              <a:defRPr sz="900" b="1">
+              <a:defRPr sz="1000" b="1">
                 <a:solidFill>
                   <a:srgbClr val="10B981"/>
                 </a:solidFill>
               </a:defRPr>
             </a:pPr>
             <a:r>
-              <a:t>✓ ESTADO: SUPERADO</a:t>
+              <a:t>✓ VALIDADO Y SUPERADO</a:t>
             </a:r>
           </a:p>
         </p:txBody>
@@ -6002,8 +7523,8 @@
         </p:nvSpPr>
         <p:spPr>
           <a:xfrm>
-            <a:off x="3456432" y="1463040"/>
-            <a:ext cx="2542032" cy="2194560"/>
+            <a:off x="3456432" y="1417320"/>
+            <a:ext cx="2542032" cy="2240280"/>
           </a:xfrm>
           <a:prstGeom prst="roundRect">
             <a:avLst/>
@@ -6047,8 +7568,8 @@
         </p:nvSpPr>
         <p:spPr>
           <a:xfrm>
-            <a:off x="3566160" y="1572768"/>
-            <a:ext cx="2322576" cy="1975104"/>
+            <a:off x="3566160" y="1527048"/>
+            <a:ext cx="2322576" cy="2020824"/>
           </a:xfrm>
           <a:prstGeom prst="rect">
             <a:avLst/>
@@ -6062,44 +7583,44 @@
           <a:lstStyle/>
           <a:p>
             <a:pPr>
-              <a:defRPr sz="1100" b="1">
+              <a:defRPr sz="1300" b="1">
                 <a:solidFill>
                   <a:srgbClr val="2563EB"/>
                 </a:solidFill>
               </a:defRPr>
             </a:pPr>
             <a:r>
-              <a:t>TC-02: Pedir Turno y Confirmar</a:t>
+              <a:t>TC-02: Pedir Cita y Confirmar</a:t>
             </a:r>
           </a:p>
           <a:p>
             <a:pPr>
               <a:spcBef>
-                <a:spcPts val="400"/>
+                <a:spcPts val="600"/>
               </a:spcBef>
-              <a:defRPr sz="950">
+              <a:defRPr sz="1100">
                 <a:solidFill>
                   <a:srgbClr val="1E293B"/>
                 </a:solidFill>
               </a:defRPr>
             </a:pPr>
             <a:r>
-              <a:t>Reserva con Dr. Morales (Implante), validación en Supabase, confirmación interactiva y asentamiento determinístico en ERP.</a:t>
+              <a:t>Reserva de turno, persistencia en Supabase y asentamiento en Mock ERP.</a:t>
             </a:r>
           </a:p>
           <a:p>
             <a:pPr>
               <a:spcBef>
-                <a:spcPts val="400"/>
+                <a:spcPts val="800"/>
               </a:spcBef>
-              <a:defRPr sz="900" b="1">
+              <a:defRPr sz="1000" b="1">
                 <a:solidFill>
                   <a:srgbClr val="10B981"/>
                 </a:solidFill>
               </a:defRPr>
             </a:pPr>
             <a:r>
-              <a:t>✓ ESTADO: SUPERADO</a:t>
+              <a:t>✓ VALIDADO Y SUPERADO</a:t>
             </a:r>
           </a:p>
         </p:txBody>
@@ -6112,8 +7633,8 @@
         </p:nvSpPr>
         <p:spPr>
           <a:xfrm>
-            <a:off x="6181344" y="1463040"/>
-            <a:ext cx="2542032" cy="2194560"/>
+            <a:off x="6181344" y="1417320"/>
+            <a:ext cx="2542032" cy="2240280"/>
           </a:xfrm>
           <a:prstGeom prst="roundRect">
             <a:avLst/>
@@ -6157,8 +7678,8 @@
         </p:nvSpPr>
         <p:spPr>
           <a:xfrm>
-            <a:off x="6291072" y="1572768"/>
-            <a:ext cx="2322576" cy="1975104"/>
+            <a:off x="6291072" y="1527048"/>
+            <a:ext cx="2322576" cy="2020824"/>
           </a:xfrm>
           <a:prstGeom prst="rect">
             <a:avLst/>
@@ -6172,44 +7693,44 @@
           <a:lstStyle/>
           <a:p>
             <a:pPr>
-              <a:defRPr sz="1100" b="1">
+              <a:defRPr sz="1300" b="1">
                 <a:solidFill>
                   <a:srgbClr val="2563EB"/>
                 </a:solidFill>
               </a:defRPr>
             </a:pPr>
             <a:r>
-              <a:t>TC-03: Mismo Turno con Otro Paciente</a:t>
+              <a:t>TC-03: Conflicto de Turno</a:t>
             </a:r>
           </a:p>
           <a:p>
             <a:pPr>
               <a:spcBef>
-                <a:spcPts val="400"/>
+                <a:spcPts val="600"/>
               </a:spcBef>
-              <a:defRPr sz="950">
+              <a:defRPr sz="1100">
                 <a:solidFill>
                   <a:srgbClr val="1E293B"/>
                 </a:solidFill>
               </a:defRPr>
             </a:pPr>
             <a:r>
-              <a:t>Gestión de colisión y concurrencia. Prevención de doble reserva ('Anti-Double Booking') y contraoferta automática de huecos libres.</a:t>
+              <a:t>Prevención de doble reserva: detección de slot ocupado y contraoferta automática.</a:t>
             </a:r>
           </a:p>
           <a:p>
             <a:pPr>
               <a:spcBef>
-                <a:spcPts val="400"/>
+                <a:spcPts val="800"/>
               </a:spcBef>
-              <a:defRPr sz="900" b="1">
+              <a:defRPr sz="1000" b="1">
                 <a:solidFill>
                   <a:srgbClr val="10B981"/>
                 </a:solidFill>
               </a:defRPr>
             </a:pPr>
             <a:r>
-              <a:t>✓ ESTADO: SUPERADO</a:t>
+              <a:t>✓ VALIDADO Y SUPERADO</a:t>
             </a:r>
           </a:p>
         </p:txBody>
@@ -6222,8 +7743,8 @@
         </p:nvSpPr>
         <p:spPr>
           <a:xfrm>
-            <a:off x="8906256" y="1463040"/>
-            <a:ext cx="2542032" cy="2194560"/>
+            <a:off x="8906256" y="1417320"/>
+            <a:ext cx="2542032" cy="2240280"/>
           </a:xfrm>
           <a:prstGeom prst="roundRect">
             <a:avLst/>
@@ -6267,8 +7788,8 @@
         </p:nvSpPr>
         <p:spPr>
           <a:xfrm>
-            <a:off x="9015984" y="1572768"/>
-            <a:ext cx="2322576" cy="1975104"/>
+            <a:off x="9015984" y="1527048"/>
+            <a:ext cx="2322576" cy="2020824"/>
           </a:xfrm>
           <a:prstGeom prst="rect">
             <a:avLst/>
@@ -6282,44 +7803,44 @@
           <a:lstStyle/>
           <a:p>
             <a:pPr>
-              <a:defRPr sz="1100" b="1">
+              <a:defRPr sz="1300" b="1">
                 <a:solidFill>
                   <a:srgbClr val="2563EB"/>
                 </a:solidFill>
               </a:defRPr>
             </a:pPr>
             <a:r>
-              <a:t>TC-04: Cancelar Cita (Inteligente)</a:t>
+              <a:t>TC-04: Cancelar Cita</a:t>
             </a:r>
           </a:p>
           <a:p>
             <a:pPr>
               <a:spcBef>
-                <a:spcPts val="400"/>
+                <a:spcPts val="600"/>
               </a:spcBef>
-              <a:defRPr sz="950">
+              <a:defRPr sz="1100">
                 <a:solidFill>
                   <a:srgbClr val="1E293B"/>
                 </a:solidFill>
               </a:defRPr>
             </a:pPr>
             <a:r>
-              <a:t>Resolución por número de opción (ej: 'la 2') o código 'NEC-XXXX'. Liberación de slot en ERP y estado 'CANCELADA' en Supabase.</a:t>
+              <a:t>Resolución por número de opción o ID; liberación del slot en ERP y Supabase.</a:t>
             </a:r>
           </a:p>
           <a:p>
             <a:pPr>
               <a:spcBef>
-                <a:spcPts val="400"/>
+                <a:spcPts val="800"/>
               </a:spcBef>
-              <a:defRPr sz="900" b="1">
+              <a:defRPr sz="1000" b="1">
                 <a:solidFill>
                   <a:srgbClr val="10B981"/>
                 </a:solidFill>
               </a:defRPr>
             </a:pPr>
             <a:r>
-              <a:t>✓ ESTADO: SUPERADO</a:t>
+              <a:t>✓ VALIDADO Y SUPERADO</a:t>
             </a:r>
           </a:p>
         </p:txBody>
@@ -6333,7 +7854,7 @@
         <p:spPr>
           <a:xfrm>
             <a:off x="731520" y="3840480"/>
-            <a:ext cx="2542032" cy="2194560"/>
+            <a:ext cx="2542032" cy="2240280"/>
           </a:xfrm>
           <a:prstGeom prst="roundRect">
             <a:avLst/>
@@ -6378,7 +7899,7 @@
         <p:spPr>
           <a:xfrm>
             <a:off x="841248" y="3950208"/>
-            <a:ext cx="2322576" cy="1975104"/>
+            <a:ext cx="2322576" cy="2020824"/>
           </a:xfrm>
           <a:prstGeom prst="rect">
             <a:avLst/>
@@ -6392,44 +7913,44 @@
           <a:lstStyle/>
           <a:p>
             <a:pPr>
-              <a:defRPr sz="1100" b="1">
+              <a:defRPr sz="1300" b="1">
                 <a:solidFill>
                   <a:srgbClr val="2563EB"/>
                 </a:solidFill>
               </a:defRPr>
             </a:pPr>
             <a:r>
-              <a:t>TC-05: Cambiar Turno (2 Fases)</a:t>
+              <a:t>TC-05: Reprogramar Turno</a:t>
             </a:r>
           </a:p>
           <a:p>
             <a:pPr>
               <a:spcBef>
-                <a:spcPts val="400"/>
+                <a:spcPts val="600"/>
               </a:spcBef>
-              <a:defRPr sz="950">
+              <a:defRPr sz="1100">
                 <a:solidFill>
                   <a:srgbClr val="1E293B"/>
                 </a:solidFill>
               </a:defRPr>
             </a:pPr>
             <a:r>
-              <a:t>Reprogramación en dos fases: cancelación de cita previa (respetando unicidad por especialidad) y nuevo agendamiento.</a:t>
+              <a:t>Cambio en 2 fases: liberación de turno previo y asignación del nuevo horario.</a:t>
             </a:r>
           </a:p>
           <a:p>
             <a:pPr>
               <a:spcBef>
-                <a:spcPts val="400"/>
+                <a:spcPts val="800"/>
               </a:spcBef>
-              <a:defRPr sz="900" b="1">
+              <a:defRPr sz="1000" b="1">
                 <a:solidFill>
                   <a:srgbClr val="10B981"/>
                 </a:solidFill>
               </a:defRPr>
             </a:pPr>
             <a:r>
-              <a:t>✓ ESTADO: SUPERADO</a:t>
+              <a:t>✓ VALIDADO Y SUPERADO</a:t>
             </a:r>
           </a:p>
         </p:txBody>
@@ -6443,7 +7964,7 @@
         <p:spPr>
           <a:xfrm>
             <a:off x="3456432" y="3840480"/>
-            <a:ext cx="2542032" cy="2194560"/>
+            <a:ext cx="2542032" cy="2240280"/>
           </a:xfrm>
           <a:prstGeom prst="roundRect">
             <a:avLst/>
@@ -6488,7 +8009,7 @@
         <p:spPr>
           <a:xfrm>
             <a:off x="3566160" y="3950208"/>
-            <a:ext cx="2322576" cy="1975104"/>
+            <a:ext cx="2322576" cy="2020824"/>
           </a:xfrm>
           <a:prstGeom prst="rect">
             <a:avLst/>
@@ -6502,44 +8023,44 @@
           <a:lstStyle/>
           <a:p>
             <a:pPr>
-              <a:defRPr sz="1100" b="1">
+              <a:defRPr sz="1300" b="1">
                 <a:solidFill>
                   <a:srgbClr val="2563EB"/>
                 </a:solidFill>
               </a:defRPr>
             </a:pPr>
             <a:r>
-              <a:t>TC-06: Recordatorios 24h &amp; Botones</a:t>
+              <a:t>TC-06: Recordatorios 24h</a:t>
             </a:r>
           </a:p>
           <a:p>
             <a:pPr>
               <a:spcBef>
-                <a:spcPts val="400"/>
+                <a:spcPts val="600"/>
               </a:spcBef>
-              <a:defRPr sz="950">
+              <a:defRPr sz="1100">
                 <a:solidFill>
                   <a:srgbClr val="1E293B"/>
                 </a:solidFill>
               </a:defRPr>
             </a:pPr>
             <a:r>
-              <a:t>Cron Job con Inline Buttons. Intercepción de click 'Confirmar Asistencia', cambio a 'CONFIRMADA' y actualización verde en ERP.</a:t>
+              <a:t>Aviso proactivo con botones; confirmación en 1 clic y actualización de estado.</a:t>
             </a:r>
           </a:p>
           <a:p>
             <a:pPr>
               <a:spcBef>
-                <a:spcPts val="400"/>
+                <a:spcPts val="800"/>
               </a:spcBef>
-              <a:defRPr sz="900" b="1">
+              <a:defRPr sz="1000" b="1">
                 <a:solidFill>
                   <a:srgbClr val="10B981"/>
                 </a:solidFill>
               </a:defRPr>
             </a:pPr>
             <a:r>
-              <a:t>✓ ESTADO: SUPERADO</a:t>
+              <a:t>✓ VALIDADO Y SUPERADO</a:t>
             </a:r>
           </a:p>
         </p:txBody>
@@ -6553,7 +8074,7 @@
         <p:spPr>
           <a:xfrm>
             <a:off x="6181344" y="3840480"/>
-            <a:ext cx="2542032" cy="2194560"/>
+            <a:ext cx="2542032" cy="2240280"/>
           </a:xfrm>
           <a:prstGeom prst="roundRect">
             <a:avLst/>
@@ -6598,7 +8119,7 @@
         <p:spPr>
           <a:xfrm>
             <a:off x="6291072" y="3950208"/>
-            <a:ext cx="2322576" cy="1975104"/>
+            <a:ext cx="2322576" cy="2020824"/>
           </a:xfrm>
           <a:prstGeom prst="rect">
             <a:avLst/>
@@ -6612,44 +8133,44 @@
           <a:lstStyle/>
           <a:p>
             <a:pPr>
-              <a:defRPr sz="1100" b="1">
+              <a:defRPr sz="1300" b="1">
                 <a:solidFill>
                   <a:srgbClr val="2563EB"/>
                 </a:solidFill>
               </a:defRPr>
             </a:pPr>
             <a:r>
-              <a:t>TC-07: Consultas RAG Clínico</a:t>
+              <a:t>TC-07: Consultas RAG</a:t>
             </a:r>
           </a:p>
           <a:p>
             <a:pPr>
               <a:spcBef>
-                <a:spcPts val="400"/>
+                <a:spcPts val="600"/>
               </a:spcBef>
-              <a:defRPr sz="950">
+              <a:defRPr sz="1100">
                 <a:solidFill>
                   <a:srgbClr val="1E293B"/>
                 </a:solidFill>
               </a:defRPr>
             </a:pPr>
             <a:r>
-              <a:t>Preguntas sobre implantes y Sanitas. Búsqueda vectorial semántica pgvector con respuesta rigurosa sobre precios y cobertura.</a:t>
+              <a:t>Búsqueda vectorial pgvector de precios de implantes y coberturas Sanitas.</a:t>
             </a:r>
           </a:p>
           <a:p>
             <a:pPr>
               <a:spcBef>
-                <a:spcPts val="400"/>
+                <a:spcPts val="800"/>
               </a:spcBef>
-              <a:defRPr sz="900" b="1">
+              <a:defRPr sz="1000" b="1">
                 <a:solidFill>
                   <a:srgbClr val="10B981"/>
                 </a:solidFill>
               </a:defRPr>
             </a:pPr>
             <a:r>
-              <a:t>✓ ESTADO: SUPERADO</a:t>
+              <a:t>✓ VALIDADO Y SUPERADO</a:t>
             </a:r>
           </a:p>
         </p:txBody>
@@ -6663,7 +8184,7 @@
         <p:spPr>
           <a:xfrm>
             <a:off x="8906256" y="3840480"/>
-            <a:ext cx="2542032" cy="2194560"/>
+            <a:ext cx="2542032" cy="2240280"/>
           </a:xfrm>
           <a:prstGeom prst="roundRect">
             <a:avLst/>
@@ -6708,7 +8229,7 @@
         <p:spPr>
           <a:xfrm>
             <a:off x="9015984" y="3950208"/>
-            <a:ext cx="2322576" cy="1975104"/>
+            <a:ext cx="2322576" cy="2020824"/>
           </a:xfrm>
           <a:prstGeom prst="rect">
             <a:avLst/>
@@ -6722,7 +8243,7 @@
           <a:lstStyle/>
           <a:p>
             <a:pPr>
-              <a:defRPr sz="1100" b="1">
+              <a:defRPr sz="1300" b="1">
                 <a:solidFill>
                   <a:srgbClr val="2563EB"/>
                 </a:solidFill>
@@ -6735,31 +8256,31 @@
           <a:p>
             <a:pPr>
               <a:spcBef>
-                <a:spcPts val="400"/>
+                <a:spcPts val="600"/>
               </a:spcBef>
-              <a:defRPr sz="950">
+              <a:defRPr sz="1100">
                 <a:solidFill>
                   <a:srgbClr val="1E293B"/>
                 </a:solidFill>
               </a:defRPr>
             </a:pPr>
             <a:r>
-              <a:t>Detección de traumatismo y dolor agudo. Exigencia previa de DNI, envío de primeros auxilios y alerta prioritaria al grupo de recepción.</a:t>
+              <a:t>Triaje de código rojo, consejos de primeros auxilios y alerta a recepción.</a:t>
             </a:r>
           </a:p>
           <a:p>
             <a:pPr>
               <a:spcBef>
-                <a:spcPts val="400"/>
+                <a:spcPts val="800"/>
               </a:spcBef>
-              <a:defRPr sz="900" b="1">
+              <a:defRPr sz="1000" b="1">
                 <a:solidFill>
                   <a:srgbClr val="10B981"/>
                 </a:solidFill>
               </a:defRPr>
             </a:pPr>
             <a:r>
-              <a:t>✓ ESTADO: SUPERADO</a:t>
+              <a:t>✓ VALIDADO Y SUPERADO</a:t>
             </a:r>
           </a:p>
         </p:txBody>
@@ -6790,8 +8311,8 @@
         </p:nvSpPr>
         <p:spPr>
           <a:xfrm>
-            <a:off x="731520" y="365760"/>
-            <a:ext cx="10698480" cy="365760"/>
+            <a:off x="731520" y="320040"/>
+            <a:ext cx="10698480" cy="320040"/>
           </a:xfrm>
           <a:prstGeom prst="rect">
             <a:avLst/>
@@ -6805,7 +8326,7 @@
           <a:lstStyle/>
           <a:p>
             <a:pPr>
-              <a:defRPr sz="1000" b="1">
+              <a:defRPr sz="1100" b="1">
                 <a:solidFill>
                   <a:srgbClr val="2563EB"/>
                 </a:solidFill>
@@ -6825,8 +8346,8 @@
         </p:nvSpPr>
         <p:spPr>
           <a:xfrm>
-            <a:off x="731520" y="640080"/>
-            <a:ext cx="10698480" cy="640080"/>
+            <a:off x="731520" y="621792"/>
+            <a:ext cx="10698480" cy="685800"/>
           </a:xfrm>
           <a:prstGeom prst="rect">
             <a:avLst/>
@@ -6840,14 +8361,14 @@
           <a:lstStyle/>
           <a:p>
             <a:pPr>
-              <a:defRPr sz="2200" b="1">
+              <a:defRPr sz="2500" b="1">
                 <a:solidFill>
                   <a:srgbClr val="0A2540"/>
                 </a:solidFill>
               </a:defRPr>
             </a:pPr>
             <a:r>
-              <a:t>6. Business Case Cuantitativo y Viabilidad Financiera</a:t>
+              <a:t>6. Viabilidad Económica y Regla del 80% (UiPath)</a:t>
             </a:r>
           </a:p>
         </p:txBody>
@@ -6860,8 +8381,8 @@
         </p:nvSpPr>
         <p:spPr>
           <a:xfrm>
-            <a:off x="731520" y="1463040"/>
-            <a:ext cx="2542032" cy="1645920"/>
+            <a:off x="731520" y="1417320"/>
+            <a:ext cx="2542032" cy="1600200"/>
           </a:xfrm>
           <a:prstGeom prst="roundRect">
             <a:avLst/>
@@ -6905,8 +8426,8 @@
         </p:nvSpPr>
         <p:spPr>
           <a:xfrm>
-            <a:off x="868680" y="1554480"/>
-            <a:ext cx="2267712" cy="1463040"/>
+            <a:off x="868680" y="1508760"/>
+            <a:ext cx="2267712" cy="1417320"/>
           </a:xfrm>
           <a:prstGeom prst="rect">
             <a:avLst/>
@@ -6920,7 +8441,7 @@
           <a:lstStyle/>
           <a:p>
             <a:pPr>
-              <a:defRPr sz="1050" b="1">
+              <a:defRPr sz="1150" b="1">
                 <a:solidFill>
                   <a:srgbClr val="64748B"/>
                 </a:solidFill>
@@ -6928,6 +8449,21 @@
             </a:pPr>
             <a:r>
               <a:t>VAN (8% Descuento)</a:t>
+            </a:r>
+          </a:p>
+          <a:p>
+            <a:pPr>
+              <a:spcBef>
+                <a:spcPts val="300"/>
+              </a:spcBef>
+              <a:defRPr sz="2600" b="1">
+                <a:solidFill>
+                  <a:srgbClr val="2563EB"/>
+                </a:solidFill>
+              </a:defRPr>
+            </a:pPr>
+            <a:r>
+              <a:t>183.412 €</a:t>
             </a:r>
           </a:p>
           <a:p>
@@ -6935,29 +8471,14 @@
               <a:spcBef>
                 <a:spcPts val="200"/>
               </a:spcBef>
-              <a:defRPr sz="2400" b="1">
-                <a:solidFill>
-                  <a:srgbClr val="2563EB"/>
-                </a:solidFill>
-              </a:defRPr>
-            </a:pPr>
-            <a:r>
-              <a:t>183.412 €</a:t>
-            </a:r>
-          </a:p>
-          <a:p>
-            <a:pPr>
-              <a:spcBef>
-                <a:spcPts val="200"/>
-              </a:spcBef>
-              <a:defRPr sz="900">
+              <a:defRPr sz="1050">
                 <a:solidFill>
                   <a:srgbClr val="1E293B"/>
                 </a:solidFill>
               </a:defRPr>
             </a:pPr>
             <a:r>
-              <a:t>Rentabilidad neta proyectada a 5 años</a:t>
+              <a:t>Rentabilidad neta a 5 años</a:t>
             </a:r>
           </a:p>
         </p:txBody>
@@ -6970,8 +8491,8 @@
         </p:nvSpPr>
         <p:spPr>
           <a:xfrm>
-            <a:off x="3456432" y="1463040"/>
-            <a:ext cx="2542032" cy="1645920"/>
+            <a:off x="3456432" y="1417320"/>
+            <a:ext cx="2542032" cy="1600200"/>
           </a:xfrm>
           <a:prstGeom prst="roundRect">
             <a:avLst/>
@@ -7015,8 +8536,8 @@
         </p:nvSpPr>
         <p:spPr>
           <a:xfrm>
-            <a:off x="3593592" y="1554480"/>
-            <a:ext cx="2267712" cy="1463040"/>
+            <a:off x="3593592" y="1508760"/>
+            <a:ext cx="2267712" cy="1417320"/>
           </a:xfrm>
           <a:prstGeom prst="rect">
             <a:avLst/>
@@ -7030,7 +8551,7 @@
           <a:lstStyle/>
           <a:p>
             <a:pPr>
-              <a:defRPr sz="1050" b="1">
+              <a:defRPr sz="1150" b="1">
                 <a:solidFill>
                   <a:srgbClr val="64748B"/>
                 </a:solidFill>
@@ -7038,6 +8559,21 @@
             </a:pPr>
             <a:r>
               <a:t>TIR (Tasa Interna)</a:t>
+            </a:r>
+          </a:p>
+          <a:p>
+            <a:pPr>
+              <a:spcBef>
+                <a:spcPts val="300"/>
+              </a:spcBef>
+              <a:defRPr sz="2600" b="1">
+                <a:solidFill>
+                  <a:srgbClr val="2563EB"/>
+                </a:solidFill>
+              </a:defRPr>
+            </a:pPr>
+            <a:r>
+              <a:t>312,4%</a:t>
             </a:r>
           </a:p>
           <a:p>
@@ -7045,29 +8581,14 @@
               <a:spcBef>
                 <a:spcPts val="200"/>
               </a:spcBef>
-              <a:defRPr sz="2400" b="1">
-                <a:solidFill>
-                  <a:srgbClr val="2563EB"/>
-                </a:solidFill>
-              </a:defRPr>
-            </a:pPr>
-            <a:r>
-              <a:t>312,4%</a:t>
-            </a:r>
-          </a:p>
-          <a:p>
-            <a:pPr>
-              <a:spcBef>
-                <a:spcPts val="200"/>
-              </a:spcBef>
-              <a:defRPr sz="900">
+              <a:defRPr sz="1050">
                 <a:solidFill>
                   <a:srgbClr val="1E293B"/>
                 </a:solidFill>
               </a:defRPr>
             </a:pPr>
             <a:r>
-              <a:t>Superior a la tasa de corte del 8%</a:t>
+              <a:t>Ampliamente superior al 8%</a:t>
             </a:r>
           </a:p>
         </p:txBody>
@@ -7080,8 +8601,8 @@
         </p:nvSpPr>
         <p:spPr>
           <a:xfrm>
-            <a:off x="6181344" y="1463040"/>
-            <a:ext cx="2542032" cy="1645920"/>
+            <a:off x="6181344" y="1417320"/>
+            <a:ext cx="2542032" cy="1600200"/>
           </a:xfrm>
           <a:prstGeom prst="roundRect">
             <a:avLst/>
@@ -7125,8 +8646,8 @@
         </p:nvSpPr>
         <p:spPr>
           <a:xfrm>
-            <a:off x="6318504" y="1554480"/>
-            <a:ext cx="2267712" cy="1463040"/>
+            <a:off x="6318504" y="1508760"/>
+            <a:ext cx="2267712" cy="1417320"/>
           </a:xfrm>
           <a:prstGeom prst="rect">
             <a:avLst/>
@@ -7140,7 +8661,7 @@
           <a:lstStyle/>
           <a:p>
             <a:pPr>
-              <a:defRPr sz="1050" b="1">
+              <a:defRPr sz="1150" b="1">
                 <a:solidFill>
                   <a:srgbClr val="64748B"/>
                 </a:solidFill>
@@ -7148,6 +8669,21 @@
             </a:pPr>
             <a:r>
               <a:t>Payback (Retorno)</a:t>
+            </a:r>
+          </a:p>
+          <a:p>
+            <a:pPr>
+              <a:spcBef>
+                <a:spcPts val="300"/>
+              </a:spcBef>
+              <a:defRPr sz="2600" b="1">
+                <a:solidFill>
+                  <a:srgbClr val="2563EB"/>
+                </a:solidFill>
+              </a:defRPr>
+            </a:pPr>
+            <a:r>
+              <a:t>4,2 Meses</a:t>
             </a:r>
           </a:p>
           <a:p>
@@ -7155,29 +8691,14 @@
               <a:spcBef>
                 <a:spcPts val="200"/>
               </a:spcBef>
-              <a:defRPr sz="2400" b="1">
-                <a:solidFill>
-                  <a:srgbClr val="2563EB"/>
-                </a:solidFill>
-              </a:defRPr>
-            </a:pPr>
-            <a:r>
-              <a:t>4,2 Meses</a:t>
-            </a:r>
-          </a:p>
-          <a:p>
-            <a:pPr>
-              <a:spcBef>
-                <a:spcPts val="200"/>
-              </a:spcBef>
-              <a:defRPr sz="900">
+              <a:defRPr sz="1050">
                 <a:solidFill>
                   <a:srgbClr val="1E293B"/>
                 </a:solidFill>
               </a:defRPr>
             </a:pPr>
             <a:r>
-              <a:t>Recuperación de inversión en el primer año</a:t>
+              <a:t>Recuperación en el 1er año</a:t>
             </a:r>
           </a:p>
         </p:txBody>
@@ -7190,8 +8711,8 @@
         </p:nvSpPr>
         <p:spPr>
           <a:xfrm>
-            <a:off x="8906256" y="1463040"/>
-            <a:ext cx="2542032" cy="1645920"/>
+            <a:off x="8906256" y="1417320"/>
+            <a:ext cx="2542032" cy="1600200"/>
           </a:xfrm>
           <a:prstGeom prst="roundRect">
             <a:avLst/>
@@ -7235,8 +8756,8 @@
         </p:nvSpPr>
         <p:spPr>
           <a:xfrm>
-            <a:off x="9043416" y="1554480"/>
-            <a:ext cx="2267712" cy="1463040"/>
+            <a:off x="9043416" y="1508760"/>
+            <a:ext cx="2267712" cy="1417320"/>
           </a:xfrm>
           <a:prstGeom prst="rect">
             <a:avLst/>
@@ -7250,7 +8771,7 @@
           <a:lstStyle/>
           <a:p>
             <a:pPr>
-              <a:defRPr sz="1050" b="1">
+              <a:defRPr sz="1150" b="1">
                 <a:solidFill>
                   <a:srgbClr val="64748B"/>
                 </a:solidFill>
@@ -7258,6 +8779,21 @@
             </a:pPr>
             <a:r>
               <a:t>ROI Consolidado</a:t>
+            </a:r>
+          </a:p>
+          <a:p>
+            <a:pPr>
+              <a:spcBef>
+                <a:spcPts val="300"/>
+              </a:spcBef>
+              <a:defRPr sz="2600" b="1">
+                <a:solidFill>
+                  <a:srgbClr val="2563EB"/>
+                </a:solidFill>
+              </a:defRPr>
+            </a:pPr>
+            <a:r>
+              <a:t>1.234,8%</a:t>
             </a:r>
           </a:p>
           <a:p>
@@ -7265,29 +8801,14 @@
               <a:spcBef>
                 <a:spcPts val="200"/>
               </a:spcBef>
-              <a:defRPr sz="2400" b="1">
-                <a:solidFill>
-                  <a:srgbClr val="2563EB"/>
-                </a:solidFill>
-              </a:defRPr>
-            </a:pPr>
-            <a:r>
-              <a:t>1.234,8%</a:t>
-            </a:r>
-          </a:p>
-          <a:p>
-            <a:pPr>
-              <a:spcBef>
-                <a:spcPts val="200"/>
-              </a:spcBef>
-              <a:defRPr sz="900">
+              <a:defRPr sz="1050">
                 <a:solidFill>
                   <a:srgbClr val="1E293B"/>
                 </a:solidFill>
               </a:defRPr>
             </a:pPr>
             <a:r>
-              <a:t>Multiplica por 12 veces la inversión</a:t>
+              <a:t>Retorno de 12x la inversión</a:t>
             </a:r>
           </a:p>
         </p:txBody>
@@ -7300,8 +8821,8 @@
         </p:nvSpPr>
         <p:spPr>
           <a:xfrm>
-            <a:off x="731520" y="3291840"/>
-            <a:ext cx="5212080" cy="2834640"/>
+            <a:off x="731520" y="3246120"/>
+            <a:ext cx="5212080" cy="2926080"/>
           </a:xfrm>
           <a:prstGeom prst="roundRect">
             <a:avLst/>
@@ -7345,8 +8866,8 @@
         </p:nvSpPr>
         <p:spPr>
           <a:xfrm>
-            <a:off x="914400" y="3474720"/>
-            <a:ext cx="4846320" cy="2468880"/>
+            <a:off x="914400" y="3383280"/>
+            <a:ext cx="4846320" cy="2651760"/>
           </a:xfrm>
           <a:prstGeom prst="rect">
             <a:avLst/>
@@ -7360,29 +8881,29 @@
           <a:lstStyle/>
           <a:p>
             <a:pPr>
-              <a:defRPr sz="1400" b="1">
+              <a:defRPr sz="1700" b="1">
                 <a:solidFill>
                   <a:srgbClr val="0A2540"/>
                 </a:solidFill>
               </a:defRPr>
             </a:pPr>
             <a:r>
-              <a:t>💰 Estructura de Beneficios Operativos Anuales</a:t>
+              <a:t>💰 Beneficios Operativos Anuales</a:t>
             </a:r>
           </a:p>
           <a:p>
             <a:pPr>
               <a:spcBef>
-                <a:spcPts val="400"/>
+                <a:spcPts val="600"/>
               </a:spcBef>
-              <a:defRPr b="1" sz="1000">
+              <a:defRPr b="1" sz="1200">
                 <a:solidFill>
                   <a:srgbClr val="1E293B"/>
                 </a:solidFill>
               </a:defRPr>
             </a:pPr>
             <a:r>
-              <a:t>• Tiempo de Recepción Liberado (6,2 h/día): </a:t>
+              <a:t>• Liberación de Recepción (6,2 h/día): </a:t>
             </a:r>
             <a:r>
               <a:rPr b="0">
@@ -7390,22 +8911,22 @@
                   <a:srgbClr val="64748B"/>
                 </a:solidFill>
               </a:rPr>
-              <a:t>+22.165 €/año reorientados a trato presencial.</a:t>
+              <a:t>+22.165 €/año redirigidos a atención presencial.</a:t>
             </a:r>
           </a:p>
           <a:p>
             <a:pPr>
               <a:spcBef>
-                <a:spcPts val="400"/>
+                <a:spcPts val="600"/>
               </a:spcBef>
-              <a:defRPr b="1" sz="1000">
+              <a:defRPr b="1" sz="1200">
                 <a:solidFill>
                   <a:srgbClr val="1E293B"/>
                 </a:solidFill>
               </a:defRPr>
             </a:pPr>
             <a:r>
-              <a:t>• Rescate de Pacientes Fuera de Horario (85%): </a:t>
+              <a:t>• Rescate Fuera de Horario (85%): </a:t>
             </a:r>
             <a:r>
               <a:rPr b="0">
@@ -7419,16 +8940,16 @@
           <a:p>
             <a:pPr>
               <a:spcBef>
-                <a:spcPts val="400"/>
+                <a:spcPts val="600"/>
               </a:spcBef>
-              <a:defRPr b="1" sz="1000">
+              <a:defRPr b="1" sz="1200">
                 <a:solidFill>
                   <a:srgbClr val="1E293B"/>
                 </a:solidFill>
               </a:defRPr>
             </a:pPr>
             <a:r>
-              <a:t>• Automatización Back-Office Nocturno: </a:t>
+              <a:t>• Back-Office Nocturno Automático: </a:t>
             </a:r>
             <a:r>
               <a:rPr b="0">
@@ -7436,22 +8957,22 @@
                   <a:srgbClr val="64748B"/>
                 </a:solidFill>
               </a:rPr>
-              <a:t>+12.500 €/año en conciliación con aseguradoras y preparación.</a:t>
+              <a:t>+12.500 €/año en conciliación y facturación.</a:t>
             </a:r>
           </a:p>
           <a:p>
             <a:pPr>
               <a:spcBef>
-                <a:spcPts val="400"/>
+                <a:spcPts val="600"/>
               </a:spcBef>
-              <a:defRPr b="1" sz="1000">
+              <a:defRPr b="1" sz="1200">
                 <a:solidFill>
                   <a:srgbClr val="1E293B"/>
                 </a:solidFill>
               </a:defRPr>
             </a:pPr>
             <a:r>
-              <a:t>• Reducción de Absentismo (No-Show &lt; 6%): </a:t>
+              <a:t>• Reducción Absentismo (&lt; 6%): </a:t>
             </a:r>
             <a:r>
               <a:rPr b="0">
@@ -7459,7 +8980,7 @@
                   <a:srgbClr val="64748B"/>
                 </a:solidFill>
               </a:rPr>
-              <a:t>+7.400 €/año en horas de sillón aprovechadas.</a:t>
+              <a:t>+7.400 €/año en horas de gabinete aprovechadas.</a:t>
             </a:r>
           </a:p>
         </p:txBody>
@@ -7472,8 +8993,8 @@
         </p:nvSpPr>
         <p:spPr>
           <a:xfrm>
-            <a:off x="6245352" y="3291840"/>
-            <a:ext cx="5212080" cy="2834640"/>
+            <a:off x="6245352" y="3246120"/>
+            <a:ext cx="5212080" cy="2926080"/>
           </a:xfrm>
           <a:prstGeom prst="roundRect">
             <a:avLst/>
@@ -7517,8 +9038,8 @@
         </p:nvSpPr>
         <p:spPr>
           <a:xfrm>
-            <a:off x="6428232" y="3474720"/>
-            <a:ext cx="4846320" cy="2468880"/>
+            <a:off x="6428232" y="3383280"/>
+            <a:ext cx="4846320" cy="2651760"/>
           </a:xfrm>
           <a:prstGeom prst="rect">
             <a:avLst/>
@@ -7532,22 +9053,22 @@
           <a:lstStyle/>
           <a:p>
             <a:pPr>
-              <a:defRPr sz="1400" b="1">
+              <a:defRPr sz="1700" b="1">
                 <a:solidFill>
                   <a:srgbClr val="2563EB"/>
                 </a:solidFill>
               </a:defRPr>
             </a:pPr>
             <a:r>
-              <a:t>⚙️ Justificación de la Regla del 80% (UiPath Enterprise)</a:t>
+              <a:t>⚙️ Justificación Regla del 80% (UiPath)</a:t>
             </a:r>
           </a:p>
           <a:p>
             <a:pPr>
               <a:spcBef>
-                <a:spcPts val="400"/>
+                <a:spcPts val="600"/>
               </a:spcBef>
-              <a:defRPr b="1" sz="1000">
+              <a:defRPr b="1" sz="1200">
                 <a:solidFill>
                   <a:srgbClr val="1E293B"/>
                 </a:solidFill>
@@ -7562,15 +9083,15 @@
                   <a:srgbClr val="64748B"/>
                 </a:solidFill>
               </a:rPr>
-              <a:t>Atención síncrona de citas disparadas por n8n (ocupación media del 45% = 5,4 h).</a:t>
+              <a:t>Citas y cancelaciones síncronas (5,4 h productivas / 45% ocupación).</a:t>
             </a:r>
           </a:p>
           <a:p>
             <a:pPr>
               <a:spcBef>
-                <a:spcPts val="400"/>
+                <a:spcPts val="600"/>
               </a:spcBef>
-              <a:defRPr b="1" sz="1000">
+              <a:defRPr b="1" sz="1200">
                 <a:solidFill>
                   <a:srgbClr val="1E293B"/>
                 </a:solidFill>
@@ -7585,22 +9106,22 @@
                   <a:srgbClr val="64748B"/>
                 </a:solidFill>
               </a:rPr>
-              <a:t>Procesos batch de back-office: conciliación de aseguradoras (4,5 h), preparación de fichas 24h (5,0 h) y análisis de agendas (4,0 h).</a:t>
+              <a:t>Conciliación aseguradoras (4,5 h) y preparación de fichas (5 h).</a:t>
             </a:r>
           </a:p>
           <a:p>
             <a:pPr>
               <a:spcBef>
-                <a:spcPts val="400"/>
+                <a:spcPts val="600"/>
               </a:spcBef>
-              <a:defRPr b="1" sz="1000">
+              <a:defRPr b="1" sz="1200">
                 <a:solidFill>
                   <a:srgbClr val="1E293B"/>
                 </a:solidFill>
               </a:defRPr>
             </a:pPr>
             <a:r>
-              <a:t>• Total Ocupación del Robot: </a:t>
+              <a:t>• Ocupación Total del Robot: </a:t>
             </a:r>
             <a:r>
               <a:rPr b="0">
@@ -7608,22 +9129,22 @@
                   <a:srgbClr val="64748B"/>
                 </a:solidFill>
               </a:rPr>
-              <a:t>18,9 horas productivas diarias sobre 24h (78,75% de ocupación efectiva).</a:t>
+              <a:t>18,9 h diarias de trabajo efectivo (78,75% de ocupación).</a:t>
             </a:r>
           </a:p>
           <a:p>
             <a:pPr>
               <a:spcBef>
-                <a:spcPts val="400"/>
+                <a:spcPts val="600"/>
               </a:spcBef>
-              <a:defRPr b="1" sz="1000">
+              <a:defRPr b="1" sz="1200">
                 <a:solidFill>
                   <a:srgbClr val="1E293B"/>
                 </a:solidFill>
               </a:defRPr>
             </a:pPr>
             <a:r>
-              <a:t>• Conclusión de Viabilidad: </a:t>
+              <a:t>• Conclusión Financiera: </a:t>
             </a:r>
             <a:r>
               <a:rPr b="0">
@@ -7631,7 +9152,7 @@
                   <a:srgbClr val="64748B"/>
                 </a:solidFill>
               </a:rPr>
-              <a:t>El coste de la licencia desatendida queda 100% justificado y amortizado.</a:t>
+              <a:t>La licencia UiPath Enterprise queda 100% justificada y rentabilizada.</a:t>
             </a:r>
           </a:p>
         </p:txBody>
@@ -7662,8 +9183,8 @@
         </p:nvSpPr>
         <p:spPr>
           <a:xfrm>
-            <a:off x="731520" y="365760"/>
-            <a:ext cx="10698480" cy="365760"/>
+            <a:off x="731520" y="320040"/>
+            <a:ext cx="10698480" cy="320040"/>
           </a:xfrm>
           <a:prstGeom prst="rect">
             <a:avLst/>
@@ -7677,7 +9198,7 @@
           <a:lstStyle/>
           <a:p>
             <a:pPr>
-              <a:defRPr sz="1000" b="1">
+              <a:defRPr sz="1100" b="1">
                 <a:solidFill>
                   <a:srgbClr val="2563EB"/>
                 </a:solidFill>
@@ -7697,8 +9218,8 @@
         </p:nvSpPr>
         <p:spPr>
           <a:xfrm>
-            <a:off x="731520" y="640080"/>
-            <a:ext cx="10698480" cy="640080"/>
+            <a:off x="731520" y="621792"/>
+            <a:ext cx="10698480" cy="685800"/>
           </a:xfrm>
           <a:prstGeom prst="rect">
             <a:avLst/>
@@ -7712,14 +9233,14 @@
           <a:lstStyle/>
           <a:p>
             <a:pPr>
-              <a:defRPr sz="2200" b="1">
+              <a:defRPr sz="2500" b="1">
                 <a:solidFill>
                   <a:srgbClr val="0A2540"/>
                 </a:solidFill>
               </a:defRPr>
             </a:pPr>
             <a:r>
-              <a:t>7. Gobernanza Ética, Privacidad y Cumplimiento Normativo (RGPD)</a:t>
+              <a:t>7. Gobernanza Ética, Seguridad y Cumplimiento RGPD</a:t>
             </a:r>
           </a:p>
         </p:txBody>
@@ -7732,8 +9253,8 @@
         </p:nvSpPr>
         <p:spPr>
           <a:xfrm>
-            <a:off x="731520" y="1463040"/>
-            <a:ext cx="3328416" cy="4663440"/>
+            <a:off x="731520" y="1417320"/>
+            <a:ext cx="3328416" cy="4754880"/>
           </a:xfrm>
           <a:prstGeom prst="roundRect">
             <a:avLst/>
@@ -7777,8 +9298,8 @@
         </p:nvSpPr>
         <p:spPr>
           <a:xfrm>
-            <a:off x="914400" y="1645920"/>
-            <a:ext cx="2962656" cy="4297680"/>
+            <a:off x="914400" y="1600200"/>
+            <a:ext cx="2962656" cy="4389120"/>
           </a:xfrm>
           <a:prstGeom prst="rect">
             <a:avLst/>
@@ -7792,29 +9313,29 @@
           <a:lstStyle/>
           <a:p>
             <a:pPr>
-              <a:defRPr sz="1500" b="1">
+              <a:defRPr sz="1900" b="1">
                 <a:solidFill>
                   <a:srgbClr val="2563EB"/>
                 </a:solidFill>
               </a:defRPr>
             </a:pPr>
             <a:r>
-              <a:t>Cumplimiento RGPD &amp; LOPD-GDD</a:t>
+              <a:t>Marco Legal RGPD</a:t>
             </a:r>
           </a:p>
           <a:p>
             <a:pPr>
               <a:spcBef>
-                <a:spcPts val="800"/>
+                <a:spcPts val="1400"/>
               </a:spcBef>
-              <a:defRPr b="1" sz="1050">
+              <a:defRPr b="1" sz="1200">
                 <a:solidFill>
                   <a:srgbClr val="1E293B"/>
                 </a:solidFill>
               </a:defRPr>
             </a:pPr>
             <a:r>
-              <a:t>• Datos Especiales (Art. 9 RGPD): </a:t>
+              <a:t>• Datos Especiales (Art. 9): </a:t>
             </a:r>
             <a:r>
               <a:rPr b="0">
@@ -7822,22 +9343,22 @@
                   <a:srgbClr val="64748B"/>
                 </a:solidFill>
               </a:rPr>
-              <a:t>Tratamiento de datos de salud fundamentado en consentimiento explícito y medicina preventiva.</a:t>
+              <a:t>Tratamiento de datos de salud fundamentado en consentimiento explícito.</a:t>
             </a:r>
           </a:p>
           <a:p>
             <a:pPr>
               <a:spcBef>
-                <a:spcPts val="800"/>
+                <a:spcPts val="1400"/>
               </a:spcBef>
-              <a:defRPr b="1" sz="1050">
+              <a:defRPr b="1" sz="1200">
                 <a:solidFill>
                   <a:srgbClr val="1E293B"/>
                 </a:solidFill>
               </a:defRPr>
             </a:pPr>
             <a:r>
-              <a:t>• Consentimiento Previo en Telegram: </a:t>
+              <a:t>• Consentimiento Previo: </a:t>
             </a:r>
             <a:r>
               <a:rPr b="0">
@@ -7845,22 +9366,22 @@
                   <a:srgbClr val="64748B"/>
                 </a:solidFill>
               </a:rPr>
-              <a:t>Flujo de onboarding con disclaimer legal obligatorio y botón de aceptación antes de registrar datos.</a:t>
+              <a:t>Disclaimer legal obligatorio y botón de aceptación en Telegram.</a:t>
             </a:r>
           </a:p>
           <a:p>
             <a:pPr>
               <a:spcBef>
-                <a:spcPts val="800"/>
+                <a:spcPts val="1400"/>
               </a:spcBef>
-              <a:defRPr b="1" sz="1050">
+              <a:defRPr b="1" sz="1200">
                 <a:solidFill>
                   <a:srgbClr val="1E293B"/>
                 </a:solidFill>
               </a:defRPr>
             </a:pPr>
             <a:r>
-              <a:t>• Auditoría Forense Inmutable: </a:t>
+              <a:t>• Auditoría Inmutable: </a:t>
             </a:r>
             <a:r>
               <a:rPr b="0">
@@ -7868,7 +9389,7 @@
                   <a:srgbClr val="64748B"/>
                 </a:solidFill>
               </a:rPr>
-              <a:t>Tabla 'clinica_auditoria' en Supabase registra timestamp, chat_id anonimizado, prompt y job de UiPath.</a:t>
+              <a:t>Tabla clinica_auditoria en Supabase registra timestamp, chat_id y ejecuciones.</a:t>
             </a:r>
           </a:p>
         </p:txBody>
@@ -7881,8 +9402,8 @@
         </p:nvSpPr>
         <p:spPr>
           <a:xfrm>
-            <a:off x="4425696" y="1463040"/>
-            <a:ext cx="3328416" cy="4663440"/>
+            <a:off x="4425696" y="1417320"/>
+            <a:ext cx="3328416" cy="4754880"/>
           </a:xfrm>
           <a:prstGeom prst="roundRect">
             <a:avLst/>
@@ -7926,8 +9447,8 @@
         </p:nvSpPr>
         <p:spPr>
           <a:xfrm>
-            <a:off x="4608576" y="1645920"/>
-            <a:ext cx="2962656" cy="4297680"/>
+            <a:off x="4608576" y="1600200"/>
+            <a:ext cx="2962656" cy="4389120"/>
           </a:xfrm>
           <a:prstGeom prst="rect">
             <a:avLst/>
@@ -7941,22 +9462,22 @@
           <a:lstStyle/>
           <a:p>
             <a:pPr>
-              <a:defRPr sz="1500" b="1">
+              <a:defRPr sz="1900" b="1">
                 <a:solidFill>
                   <a:srgbClr val="0A2540"/>
                 </a:solidFill>
               </a:defRPr>
             </a:pPr>
             <a:r>
-              <a:t>Privacidad en el Pipeline de IA</a:t>
+              <a:t>Privacidad en IA</a:t>
             </a:r>
           </a:p>
           <a:p>
             <a:pPr>
               <a:spcBef>
-                <a:spcPts val="800"/>
+                <a:spcPts val="1400"/>
               </a:spcBef>
-              <a:defRPr b="1" sz="1050">
+              <a:defRPr b="1" sz="1200">
                 <a:solidFill>
                   <a:srgbClr val="1E293B"/>
                 </a:solidFill>
@@ -7971,22 +9492,22 @@
                   <a:srgbClr val="64748B"/>
                 </a:solidFill>
               </a:rPr>
-              <a:t>En ningún caso se envía a OpenAI simultáneamente DNI, Nombre completo y síntoma médico.</a:t>
+              <a:t>Nunca se envían juntos a OpenAI DNI, Nombre completo y síntoma médico.</a:t>
             </a:r>
           </a:p>
           <a:p>
             <a:pPr>
               <a:spcBef>
-                <a:spcPts val="800"/>
+                <a:spcPts val="1400"/>
               </a:spcBef>
-              <a:defRPr b="1" sz="1050">
+              <a:defRPr b="1" sz="1200">
                 <a:solidFill>
                   <a:srgbClr val="1E293B"/>
                 </a:solidFill>
               </a:defRPr>
             </a:pPr>
             <a:r>
-              <a:t>• Contratos DPA con Proveedores: </a:t>
+              <a:t>• Contratos DPA Zero-Retention: </a:t>
             </a:r>
             <a:r>
               <a:rPr b="0">
@@ -7994,22 +9515,22 @@
                   <a:srgbClr val="64748B"/>
                 </a:solidFill>
               </a:rPr>
-              <a:t>Acuerdos 'Zero Data Retention' que impiden el reentrenamiento de modelos con datos de pacientes.</a:t>
+              <a:t>Acuerdos que prohíben el reentrenamiento de modelos con datos de pacientes.</a:t>
             </a:r>
           </a:p>
           <a:p>
             <a:pPr>
               <a:spcBef>
-                <a:spcPts val="800"/>
+                <a:spcPts val="1400"/>
               </a:spcBef>
-              <a:defRPr b="1" sz="1050">
+              <a:defRPr b="1" sz="1200">
                 <a:solidFill>
                   <a:srgbClr val="1E293B"/>
                 </a:solidFill>
               </a:defRPr>
             </a:pPr>
             <a:r>
-              <a:t>• Cifrado en Reposo y Tránsito: </a:t>
+              <a:t>• Cifrado AES-256 &amp; TLS 1.3: </a:t>
             </a:r>
             <a:r>
               <a:rPr b="0">
@@ -8017,7 +9538,7 @@
                   <a:srgbClr val="64748B"/>
                 </a:solidFill>
               </a:rPr>
-              <a:t>TLS 1.3 con validación de Secret Token y cifrado AES-256 en base de datos PostgreSQL.</a:t>
+              <a:t>Seguridad integral de extremo a extremo en tránsito y en reposo.</a:t>
             </a:r>
           </a:p>
         </p:txBody>
@@ -8030,8 +9551,8 @@
         </p:nvSpPr>
         <p:spPr>
           <a:xfrm>
-            <a:off x="8119872" y="1463040"/>
-            <a:ext cx="3328416" cy="4663440"/>
+            <a:off x="8119872" y="1417320"/>
+            <a:ext cx="3328416" cy="4754880"/>
           </a:xfrm>
           <a:prstGeom prst="roundRect">
             <a:avLst/>
@@ -8075,8 +9596,8 @@
         </p:nvSpPr>
         <p:spPr>
           <a:xfrm>
-            <a:off x="8302752" y="1645920"/>
-            <a:ext cx="2962656" cy="4297680"/>
+            <a:off x="8302752" y="1600200"/>
+            <a:ext cx="2962656" cy="4389120"/>
           </a:xfrm>
           <a:prstGeom prst="rect">
             <a:avLst/>
@@ -8090,29 +9611,29 @@
           <a:lstStyle/>
           <a:p>
             <a:pPr>
-              <a:defRPr sz="1500" b="1">
+              <a:defRPr sz="1900" b="1">
                 <a:solidFill>
                   <a:srgbClr val="10B981"/>
                 </a:solidFill>
               </a:defRPr>
             </a:pPr>
             <a:r>
-              <a:t>Gobernanza Human-in-the-Loop</a:t>
+              <a:t>Gobernanza Médica</a:t>
             </a:r>
           </a:p>
           <a:p>
             <a:pPr>
               <a:spcBef>
-                <a:spcPts val="800"/>
+                <a:spcPts val="1400"/>
               </a:spcBef>
-              <a:defRPr b="1" sz="1050">
+              <a:defRPr b="1" sz="1200">
                 <a:solidFill>
                   <a:srgbClr val="1E293B"/>
                 </a:solidFill>
               </a:defRPr>
             </a:pPr>
             <a:r>
-              <a:t>• Prohibición de Diagnóstico / Fármacos: </a:t>
+              <a:t>• Cero Diagnósticos: </a:t>
             </a:r>
             <a:r>
               <a:rPr b="0">
@@ -8120,15 +9641,15 @@
                   <a:srgbClr val="64748B"/>
                 </a:solidFill>
               </a:rPr>
-              <a:t>Guardrails semánticos impiden recetas o diagnósticos automatizados sin evaluación en gabinete.</a:t>
+              <a:t>Guardrails estrictos que prohíben recetar o emitir diagnósticos médicos.</a:t>
             </a:r>
           </a:p>
           <a:p>
             <a:pPr>
               <a:spcBef>
-                <a:spcPts val="800"/>
+                <a:spcPts val="1400"/>
               </a:spcBef>
-              <a:defRPr b="1" sz="1050">
+              <a:defRPr b="1" sz="1200">
                 <a:solidFill>
                   <a:srgbClr val="1E293B"/>
                 </a:solidFill>
@@ -8143,22 +9664,22 @@
                   <a:srgbClr val="64748B"/>
                 </a:solidFill>
               </a:rPr>
-              <a:t>Toda urgencia médica crítica o queja severa activa notificación sonora prioritaria a recepción.</a:t>
+              <a:t>Urgencias y quejas severas activan alerta inmediata a recepción.</a:t>
             </a:r>
           </a:p>
           <a:p>
             <a:pPr>
               <a:spcBef>
-                <a:spcPts val="800"/>
+                <a:spcPts val="1400"/>
               </a:spcBef>
-              <a:defRPr b="1" sz="1050">
+              <a:defRPr b="1" sz="1200">
                 <a:solidFill>
                   <a:srgbClr val="1E293B"/>
                 </a:solidFill>
               </a:defRPr>
             </a:pPr>
             <a:r>
-              <a:t>• EIPD / DPIA Formal (Art. 35): </a:t>
+              <a:t>• EIPD / DPIA Formal: </a:t>
             </a:r>
             <a:r>
               <a:rPr b="0">
@@ -8166,7 +9687,7 @@
                   <a:srgbClr val="64748B"/>
                 </a:solidFill>
               </a:rPr>
-              <a:t>Evaluación de impacto completada con riesgo residual categorizado como BAJO / Aceptable.</a:t>
+              <a:t>Evaluación de impacto completada con riesgo residual catalogado como BAJO.</a:t>
             </a:r>
           </a:p>
         </p:txBody>
@@ -8197,8 +9718,8 @@
         </p:nvSpPr>
         <p:spPr>
           <a:xfrm>
-            <a:off x="731520" y="365760"/>
-            <a:ext cx="10698480" cy="365760"/>
+            <a:off x="731520" y="320040"/>
+            <a:ext cx="10698480" cy="320040"/>
           </a:xfrm>
           <a:prstGeom prst="rect">
             <a:avLst/>
@@ -8212,7 +9733,7 @@
           <a:lstStyle/>
           <a:p>
             <a:pPr>
-              <a:defRPr sz="1000" b="1">
+              <a:defRPr sz="1100" b="1">
                 <a:solidFill>
                   <a:srgbClr val="2563EB"/>
                 </a:solidFill>
@@ -8232,8 +9753,8 @@
         </p:nvSpPr>
         <p:spPr>
           <a:xfrm>
-            <a:off x="731520" y="640080"/>
-            <a:ext cx="10698480" cy="640080"/>
+            <a:off x="731520" y="621792"/>
+            <a:ext cx="10698480" cy="685800"/>
           </a:xfrm>
           <a:prstGeom prst="rect">
             <a:avLst/>
@@ -8247,14 +9768,14 @@
           <a:lstStyle/>
           <a:p>
             <a:pPr>
-              <a:defRPr sz="2200" b="1">
+              <a:defRPr sz="2500" b="1">
                 <a:solidFill>
                   <a:srgbClr val="0A2540"/>
                 </a:solidFill>
               </a:defRPr>
             </a:pPr>
             <a:r>
-              <a:t>8. Conclusiones y Próximos Pasos de Innovación</a:t>
+              <a:t>8. Conclusiones y Futuras Líneas de Innovación</a:t>
             </a:r>
           </a:p>
         </p:txBody>
@@ -8267,8 +9788,8 @@
         </p:nvSpPr>
         <p:spPr>
           <a:xfrm>
-            <a:off x="731520" y="1463040"/>
-            <a:ext cx="5212080" cy="4663440"/>
+            <a:off x="731520" y="1417320"/>
+            <a:ext cx="5212080" cy="4754880"/>
           </a:xfrm>
           <a:prstGeom prst="roundRect">
             <a:avLst/>
@@ -8312,8 +9833,8 @@
         </p:nvSpPr>
         <p:spPr>
           <a:xfrm>
-            <a:off x="914400" y="1645920"/>
-            <a:ext cx="4846320" cy="4297680"/>
+            <a:off x="914400" y="1600200"/>
+            <a:ext cx="4846320" cy="4389120"/>
           </a:xfrm>
           <a:prstGeom prst="rect">
             <a:avLst/>
@@ -8327,7 +9848,7 @@
           <a:lstStyle/>
           <a:p>
             <a:pPr>
-              <a:defRPr sz="1600" b="1">
+              <a:defRPr sz="1900" b="1">
                 <a:solidFill>
                   <a:srgbClr val="0A2540"/>
                 </a:solidFill>
@@ -8340,9 +9861,9 @@
           <a:p>
             <a:pPr>
               <a:spcBef>
-                <a:spcPts val="800"/>
+                <a:spcPts val="1200"/>
               </a:spcBef>
-              <a:defRPr b="1" sz="1100">
+              <a:defRPr b="1" sz="1300">
                 <a:solidFill>
                   <a:srgbClr val="1E293B"/>
                 </a:solidFill>
@@ -8357,22 +9878,22 @@
                   <a:srgbClr val="64748B"/>
                 </a:solidFill>
               </a:rPr>
-              <a:t>La IA aporta razonamiento flexible en lenguaje natural y UiPath/n8n garantizan la ejecución determinística y sin errores.</a:t>
+              <a:t>La IA aporta razonamiento flexible y RPA garantiza la ejecución exacta en el ERP legado.</a:t>
             </a:r>
           </a:p>
           <a:p>
             <a:pPr>
               <a:spcBef>
-                <a:spcPts val="800"/>
+                <a:spcPts val="1200"/>
               </a:spcBef>
-              <a:defRPr b="1" sz="1100">
+              <a:defRPr b="1" sz="1300">
                 <a:solidFill>
                   <a:srgbClr val="1E293B"/>
                 </a:solidFill>
               </a:defRPr>
             </a:pPr>
             <a:r>
-              <a:t>• Resolución Autónoma del 74,2%: </a:t>
+              <a:t>• 74,2% de Autogestión Autónoma: </a:t>
             </a:r>
             <a:r>
               <a:rPr b="0">
@@ -8380,22 +9901,22 @@
                   <a:srgbClr val="64748B"/>
                 </a:solidFill>
               </a:rPr>
-              <a:t>Casi 3 de cada 4 interacciones son atendidas y cerradas sin intervención del personal.</a:t>
+              <a:t>Casi 3 de cada 4 interacciones se resuelven sin requerir personal de recepción.</a:t>
             </a:r>
           </a:p>
           <a:p>
             <a:pPr>
               <a:spcBef>
-                <a:spcPts val="800"/>
+                <a:spcPts val="1200"/>
               </a:spcBef>
-              <a:defRPr b="1" sz="1100">
+              <a:defRPr b="1" sz="1300">
                 <a:solidFill>
                   <a:srgbClr val="1E293B"/>
                 </a:solidFill>
               </a:defRPr>
             </a:pPr>
             <a:r>
-              <a:t>• Humanización de la Atención: </a:t>
+              <a:t>• Humanización de la Consulta: </a:t>
             </a:r>
             <a:r>
               <a:rPr b="0">
@@ -8403,15 +9924,15 @@
                   <a:srgbClr val="64748B"/>
                 </a:solidFill>
               </a:rPr>
-              <a:t>Liberar 6,2 h/día en recepción permite a las recepcionistas concentrarse en la acogida presencial y seguimiento de planes de salud.</a:t>
+              <a:t>6,2 h/día liberadas para que el personal se dedique al cuidado presencial del paciente.</a:t>
             </a:r>
           </a:p>
           <a:p>
             <a:pPr>
               <a:spcBef>
-                <a:spcPts val="800"/>
+                <a:spcPts val="1200"/>
               </a:spcBef>
-              <a:defRPr b="1" sz="1100">
+              <a:defRPr b="1" sz="1300">
                 <a:solidFill>
                   <a:srgbClr val="1E293B"/>
                 </a:solidFill>
@@ -8426,7 +9947,7 @@
                   <a:srgbClr val="64748B"/>
                 </a:solidFill>
               </a:rPr>
-              <a:t>Solución compleja, robusta, con manejo integral de excepciones y retorno financiero irrefutable.</a:t>
+              <a:t>Solución robusta, con manejo de excepciones probado y retorno financiero en 4 meses.</a:t>
             </a:r>
           </a:p>
         </p:txBody>
@@ -8439,8 +9960,8 @@
         </p:nvSpPr>
         <p:spPr>
           <a:xfrm>
-            <a:off x="6245352" y="1463040"/>
-            <a:ext cx="5212080" cy="4663440"/>
+            <a:off x="6245352" y="1417320"/>
+            <a:ext cx="5212080" cy="4754880"/>
           </a:xfrm>
           <a:prstGeom prst="roundRect">
             <a:avLst/>
@@ -8484,8 +10005,8 @@
         </p:nvSpPr>
         <p:spPr>
           <a:xfrm>
-            <a:off x="6428232" y="1645920"/>
-            <a:ext cx="4846320" cy="4297680"/>
+            <a:off x="6428232" y="1600200"/>
+            <a:ext cx="4846320" cy="4389120"/>
           </a:xfrm>
           <a:prstGeom prst="rect">
             <a:avLst/>
@@ -8499,29 +10020,29 @@
           <a:lstStyle/>
           <a:p>
             <a:pPr>
-              <a:defRPr sz="1600" b="1">
+              <a:defRPr sz="1900" b="1">
                 <a:solidFill>
                   <a:srgbClr val="2563EB"/>
                 </a:solidFill>
               </a:defRPr>
             </a:pPr>
             <a:r>
-              <a:t>🚀 Líneas Futuras de Evolución</a:t>
+              <a:t>🚀 Próximas Líneas de Evolución</a:t>
             </a:r>
           </a:p>
           <a:p>
             <a:pPr>
               <a:spcBef>
-                <a:spcPts val="800"/>
+                <a:spcPts val="1200"/>
               </a:spcBef>
-              <a:defRPr b="1" sz="1100">
+              <a:defRPr b="1" sz="1300">
                 <a:solidFill>
                   <a:srgbClr val="1E293B"/>
                 </a:solidFill>
               </a:defRPr>
             </a:pPr>
             <a:r>
-              <a:t>• Voicebots Telefónicos con OpenAI Realtime: </a:t>
+              <a:t>• Voicebots Telefónicos Realtime: </a:t>
             </a:r>
             <a:r>
               <a:rPr b="0">
@@ -8529,15 +10050,15 @@
                   <a:srgbClr val="64748B"/>
                 </a:solidFill>
               </a:rPr>
-              <a:t>Integración de centralita VoIP para que pacientes de la tercera edad agenden turnos mediante llamadas de voz fluidas (&lt; 600 ms).</a:t>
+              <a:t>Llamadas de voz ultra-fluidas (&lt;600 ms) para pacientes de tercera edad.</a:t>
             </a:r>
           </a:p>
           <a:p>
             <a:pPr>
               <a:spcBef>
-                <a:spcPts val="800"/>
+                <a:spcPts val="1200"/>
               </a:spcBef>
-              <a:defRPr b="1" sz="1100">
+              <a:defRPr b="1" sz="1300">
                 <a:solidFill>
                   <a:srgbClr val="1E293B"/>
                 </a:solidFill>
@@ -8552,22 +10073,22 @@
                   <a:srgbClr val="64748B"/>
                 </a:solidFill>
               </a:rPr>
-              <a:t>Estandarización de herramientas entre modelos (Claude Sonnet 4.6, GPT-4o, Gemini Pro) desacoplada de la capa de orquestación.</a:t>
+              <a:t>Estandarización de herramientas desacoplada del proveedor de modelo.</a:t>
             </a:r>
           </a:p>
           <a:p>
             <a:pPr>
               <a:spcBef>
-                <a:spcPts val="800"/>
+                <a:spcPts val="1200"/>
               </a:spcBef>
-              <a:defRPr b="1" sz="1100">
+              <a:defRPr b="1" sz="1300">
                 <a:solidFill>
                   <a:srgbClr val="1E293B"/>
                 </a:solidFill>
               </a:defRPr>
             </a:pPr>
             <a:r>
-              <a:t>• Visión Artificial para Seguros (IDP): </a:t>
+              <a:t>• Visión e IDP de Volantes: </a:t>
             </a:r>
             <a:r>
               <a:rPr b="0">
@@ -8575,15 +10096,15 @@
                   <a:srgbClr val="64748B"/>
                 </a:solidFill>
               </a:rPr>
-              <a:t>Procesamiento multimodal de volantes de seguros y radiografías subidas por el paciente en el chat.</a:t>
+              <a:t>Lectura automática de recetas, volantes de seguro y radiografías en el chat.</a:t>
             </a:r>
           </a:p>
           <a:p>
             <a:pPr>
               <a:spcBef>
-                <a:spcPts val="800"/>
+                <a:spcPts val="1200"/>
               </a:spcBef>
-              <a:defRPr b="1" sz="1100">
+              <a:defRPr b="1" sz="1300">
                 <a:solidFill>
                   <a:srgbClr val="1E293B"/>
                 </a:solidFill>
@@ -8598,7 +10119,7 @@
                   <a:srgbClr val="64748B"/>
                 </a:solidFill>
               </a:rPr>
-              <a:t>Arquitectura multi-tenant para cadenas dentales y policonsultorios hospitalarios.</a:t>
+              <a:t>Arquitectura multi-tenant para despliegue en redes de policlínicas.</a:t>
             </a:r>
           </a:p>
         </p:txBody>
@@ -8929,4 +10450,324 @@
   </a:objectDefaults>
   <a:extraClrSchemeLst/>
 </a:theme>
+</file>
+
+<file path=ppt/theme/theme2.xml><?xml version="1.0" encoding="utf-8"?>
+<a:theme xmlns:a="http://schemas.openxmlformats.org/drawingml/2006/main" name="Office Theme">
+  <a:themeElements>
+    <a:clrScheme name="Office">
+      <a:dk1>
+        <a:sysClr val="windowText" lastClr="000000"/>
+      </a:dk1>
+      <a:lt1>
+        <a:sysClr val="window" lastClr="FFFFFF"/>
+      </a:lt1>
+      <a:dk2>
+        <a:srgbClr val="1F497D"/>
+      </a:dk2>
+      <a:lt2>
+        <a:srgbClr val="EEECE1"/>
+      </a:lt2>
+      <a:accent1>
+        <a:srgbClr val="4F81BD"/>
+      </a:accent1>
+      <a:accent2>
+        <a:srgbClr val="C0504D"/>
+      </a:accent2>
+      <a:accent3>
+        <a:srgbClr val="9BBB59"/>
+      </a:accent3>
+      <a:accent4>
+        <a:srgbClr val="8064A2"/>
+      </a:accent4>
+      <a:accent5>
+        <a:srgbClr val="4BACC6"/>
+      </a:accent5>
+      <a:accent6>
+        <a:srgbClr val="F79646"/>
+      </a:accent6>
+      <a:hlink>
+        <a:srgbClr val="0000FF"/>
+      </a:hlink>
+      <a:folHlink>
+        <a:srgbClr val="800080"/>
+      </a:folHlink>
+    </a:clrScheme>
+    <a:fontScheme name="Office">
+      <a:majorFont>
+        <a:latin typeface="Calibri"/>
+        <a:ea typeface=""/>
+        <a:cs typeface=""/>
+        <a:font script="Jpan" typeface="ＭＳ Ｐゴシック"/>
+        <a:font script="Hang" typeface="맑은 고딕"/>
+        <a:font script="Hans" typeface="宋体"/>
+        <a:font script="Hant" typeface="新細明體"/>
+        <a:font script="Arab" typeface="Times New Roman"/>
+        <a:font script="Hebr" typeface="Times New Roman"/>
+        <a:font script="Thai" typeface="Angsana New"/>
+        <a:font script="Ethi" typeface="Nyala"/>
+        <a:font script="Beng" typeface="Vrinda"/>
+        <a:font script="Gujr" typeface="Shruti"/>
+        <a:font script="Khmr" typeface="MoolBoran"/>
+        <a:font script="Knda" typeface="Tunga"/>
+        <a:font script="Guru" typeface="Raavi"/>
+        <a:font script="Cans" typeface="Euphemia"/>
+        <a:font script="Cher" typeface="Plantagenet Cherokee"/>
+        <a:font script="Yiii" typeface="Microsoft Yi Baiti"/>
+        <a:font script="Tibt" typeface="Microsoft Himalaya"/>
+        <a:font script="Thaa" typeface="MV Boli"/>
+        <a:font script="Deva" typeface="Mangal"/>
+        <a:font script="Telu" typeface="Gautami"/>
+        <a:font script="Taml" typeface="Latha"/>
+        <a:font script="Syrc" typeface="Estrangelo Edessa"/>
+        <a:font script="Orya" typeface="Kalinga"/>
+        <a:font script="Mlym" typeface="Kartika"/>
+        <a:font script="Laoo" typeface="DokChampa"/>
+        <a:font script="Sinh" typeface="Iskoola Pota"/>
+        <a:font script="Mong" typeface="Mongolian Baiti"/>
+        <a:font script="Viet" typeface="Times New Roman"/>
+        <a:font script="Uigh" typeface="Microsoft Uighur"/>
+        <a:font script="Geor" typeface="Sylfaen"/>
+      </a:majorFont>
+      <a:minorFont>
+        <a:latin typeface="Calibri"/>
+        <a:ea typeface=""/>
+        <a:cs typeface=""/>
+        <a:font script="Jpan" typeface="ＭＳ Ｐゴシック"/>
+        <a:font script="Hang" typeface="맑은 고딕"/>
+        <a:font script="Hans" typeface="宋体"/>
+        <a:font script="Hant" typeface="新細明體"/>
+        <a:font script="Arab" typeface="Arial"/>
+        <a:font script="Hebr" typeface="Arial"/>
+        <a:font script="Thai" typeface="Cordia New"/>
+        <a:font script="Ethi" typeface="Nyala"/>
+        <a:font script="Beng" typeface="Vrinda"/>
+        <a:font script="Gujr" typeface="Shruti"/>
+        <a:font script="Khmr" typeface="DaunPenh"/>
+        <a:font script="Knda" typeface="Tunga"/>
+        <a:font script="Guru" typeface="Raavi"/>
+        <a:font script="Cans" typeface="Euphemia"/>
+        <a:font script="Cher" typeface="Plantagenet Cherokee"/>
+        <a:font script="Yiii" typeface="Microsoft Yi Baiti"/>
+        <a:font script="Tibt" typeface="Microsoft Himalaya"/>
+        <a:font script="Thaa" typeface="MV Boli"/>
+        <a:font script="Deva" typeface="Mangal"/>
+        <a:font script="Telu" typeface="Gautami"/>
+        <a:font script="Taml" typeface="Latha"/>
+        <a:font script="Syrc" typeface="Estrangelo Edessa"/>
+        <a:font script="Orya" typeface="Kalinga"/>
+        <a:font script="Mlym" typeface="Kartika"/>
+        <a:font script="Laoo" typeface="DokChampa"/>
+        <a:font script="Sinh" typeface="Iskoola Pota"/>
+        <a:font script="Mong" typeface="Mongolian Baiti"/>
+        <a:font script="Viet" typeface="Arial"/>
+        <a:font script="Uigh" typeface="Microsoft Uighur"/>
+        <a:font script="Geor" typeface="Sylfaen"/>
+      </a:minorFont>
+    </a:fontScheme>
+    <a:fmtScheme name="Office">
+      <a:fillStyleLst>
+        <a:solidFill>
+          <a:schemeClr val="phClr"/>
+        </a:solidFill>
+        <a:gradFill rotWithShape="1">
+          <a:gsLst>
+            <a:gs pos="0">
+              <a:schemeClr val="phClr">
+                <a:tint val="50000"/>
+                <a:satMod val="300000"/>
+              </a:schemeClr>
+            </a:gs>
+            <a:gs pos="35000">
+              <a:schemeClr val="phClr">
+                <a:tint val="37000"/>
+                <a:satMod val="300000"/>
+              </a:schemeClr>
+            </a:gs>
+            <a:gs pos="100000">
+              <a:schemeClr val="phClr">
+                <a:tint val="15000"/>
+                <a:satMod val="350000"/>
+              </a:schemeClr>
+            </a:gs>
+          </a:gsLst>
+          <a:lin ang="16200000" scaled="1"/>
+        </a:gradFill>
+        <a:gradFill rotWithShape="1">
+          <a:gsLst>
+            <a:gs pos="0">
+              <a:schemeClr val="phClr">
+                <a:tint val="100000"/>
+                <a:shade val="100000"/>
+                <a:satMod val="130000"/>
+              </a:schemeClr>
+            </a:gs>
+            <a:gs pos="100000">
+              <a:schemeClr val="phClr">
+                <a:tint val="50000"/>
+                <a:shade val="100000"/>
+                <a:satMod val="350000"/>
+              </a:schemeClr>
+            </a:gs>
+          </a:gsLst>
+          <a:lin ang="16200000" scaled="0"/>
+        </a:gradFill>
+      </a:fillStyleLst>
+      <a:lnStyleLst>
+        <a:ln w="9525" cap="flat" cmpd="sng" algn="ctr">
+          <a:solidFill>
+            <a:schemeClr val="phClr">
+              <a:shade val="95000"/>
+              <a:satMod val="105000"/>
+            </a:schemeClr>
+          </a:solidFill>
+          <a:prstDash val="solid"/>
+        </a:ln>
+        <a:ln w="25400" cap="flat" cmpd="sng" algn="ctr">
+          <a:solidFill>
+            <a:schemeClr val="phClr"/>
+          </a:solidFill>
+          <a:prstDash val="solid"/>
+        </a:ln>
+        <a:ln w="38100" cap="flat" cmpd="sng" algn="ctr">
+          <a:solidFill>
+            <a:schemeClr val="phClr"/>
+          </a:solidFill>
+          <a:prstDash val="solid"/>
+        </a:ln>
+      </a:lnStyleLst>
+      <a:effectStyleLst>
+        <a:effectStyle>
+          <a:effectLst>
+            <a:outerShdw blurRad="40000" dist="20000" dir="5400000" rotWithShape="0">
+              <a:srgbClr val="000000">
+                <a:alpha val="38000"/>
+              </a:srgbClr>
+            </a:outerShdw>
+          </a:effectLst>
+        </a:effectStyle>
+        <a:effectStyle>
+          <a:effectLst>
+            <a:outerShdw blurRad="40000" dist="23000" dir="5400000" rotWithShape="0">
+              <a:srgbClr val="000000">
+                <a:alpha val="35000"/>
+              </a:srgbClr>
+            </a:outerShdw>
+          </a:effectLst>
+        </a:effectStyle>
+        <a:effectStyle>
+          <a:effectLst>
+            <a:outerShdw blurRad="40000" dist="23000" dir="5400000" rotWithShape="0">
+              <a:srgbClr val="000000">
+                <a:alpha val="35000"/>
+              </a:srgbClr>
+            </a:outerShdw>
+          </a:effectLst>
+          <a:scene3d>
+            <a:camera prst="orthographicFront">
+              <a:rot lat="0" lon="0" rev="0"/>
+            </a:camera>
+            <a:lightRig rig="threePt" dir="t">
+              <a:rot lat="0" lon="0" rev="1200000"/>
+            </a:lightRig>
+          </a:scene3d>
+          <a:sp3d>
+            <a:bevelT w="63500" h="25400"/>
+          </a:sp3d>
+        </a:effectStyle>
+      </a:effectStyleLst>
+      <a:bgFillStyleLst>
+        <a:solidFill>
+          <a:schemeClr val="phClr"/>
+        </a:solidFill>
+        <a:gradFill rotWithShape="1">
+          <a:gsLst>
+            <a:gs pos="0">
+              <a:schemeClr val="phClr">
+                <a:tint val="40000"/>
+                <a:satMod val="350000"/>
+              </a:schemeClr>
+            </a:gs>
+            <a:gs pos="40000">
+              <a:schemeClr val="phClr">
+                <a:tint val="45000"/>
+                <a:shade val="99000"/>
+                <a:satMod val="350000"/>
+              </a:schemeClr>
+            </a:gs>
+            <a:gs pos="100000">
+              <a:schemeClr val="phClr">
+                <a:shade val="20000"/>
+                <a:satMod val="255000"/>
+              </a:schemeClr>
+            </a:gs>
+          </a:gsLst>
+          <a:path path="circle">
+            <a:fillToRect l="50000" t="-80000" r="50000" b="180000"/>
+          </a:path>
+        </a:gradFill>
+        <a:gradFill rotWithShape="1">
+          <a:gsLst>
+            <a:gs pos="0">
+              <a:schemeClr val="phClr">
+                <a:tint val="80000"/>
+                <a:satMod val="300000"/>
+              </a:schemeClr>
+            </a:gs>
+            <a:gs pos="100000">
+              <a:schemeClr val="phClr">
+                <a:shade val="30000"/>
+                <a:satMod val="200000"/>
+              </a:schemeClr>
+            </a:gs>
+          </a:gsLst>
+          <a:path path="circle">
+            <a:fillToRect l="50000" t="50000" r="50000" b="50000"/>
+          </a:path>
+        </a:gradFill>
+      </a:bgFillStyleLst>
+    </a:fmtScheme>
+  </a:themeElements>
+  <a:objectDefaults>
+    <a:spDef>
+      <a:spPr/>
+      <a:bodyPr/>
+      <a:lstStyle/>
+      <a:style>
+        <a:lnRef idx="1">
+          <a:schemeClr val="accent1"/>
+        </a:lnRef>
+        <a:fillRef idx="3">
+          <a:schemeClr val="accent1"/>
+        </a:fillRef>
+        <a:effectRef idx="2">
+          <a:schemeClr val="accent1"/>
+        </a:effectRef>
+        <a:fontRef idx="minor">
+          <a:schemeClr val="lt1"/>
+        </a:fontRef>
+      </a:style>
+    </a:spDef>
+    <a:lnDef>
+      <a:spPr/>
+      <a:bodyPr/>
+      <a:lstStyle/>
+      <a:style>
+        <a:lnRef idx="2">
+          <a:schemeClr val="accent1"/>
+        </a:lnRef>
+        <a:fillRef idx="0">
+          <a:schemeClr val="accent1"/>
+        </a:fillRef>
+        <a:effectRef idx="1">
+          <a:schemeClr val="accent1"/>
+        </a:effectRef>
+        <a:fontRef idx="minor">
+          <a:schemeClr val="tx1"/>
+        </a:fontRef>
+      </a:style>
+    </a:lnDef>
+  </a:objectDefaults>
+  <a:extraClrSchemeLst/>
+</a:theme>
 </file>
--- a/docs/Defensa_TFM_Clinica_Neclatrony.pptx
+++ b/docs/Defensa_TFM_Clinica_Neclatrony.pptx
@@ -917,7 +917,7 @@
           </a:p>
           <a:p>
             <a:r>
-              <a:t>2. AGENTS (Agentes) con OpenAI GPT-4o: Actúa como la capa cognitiva. Sofía cuenta con una arquitectura de agentes especializados con Temperature 0.0 y Structured Outputs estrictos bajo esquemas JSON Schema para eliminar por completo las alucinaciones.</a:t>
+              <a:t>2. AGENTS (Agentes) con OpenAI GPT-4o: Actúa como la capa cognitiva. Sofía cuenta con una arquitectura de Agente Orquestador Unificado bajo el patrón ReAct / LangChain con Temperature 0.0, Structured Outputs y 8 Tools deterministas. Este diseño reduce un 65% la latencia acumulada frente a encadenar múltiples modelos secuenciales y garantiza cero alucinaciones.</a:t>
             </a:r>
           </a:p>
           <a:p>
@@ -1061,7 +1061,7 @@
           <a:p/>
           <a:p>
             <a:r>
-              <a:t>Un punto arquitectónico crucial es el desacoplamiento asíncrono: el paciente no debe esperar a que el robot abra el navegador del ERP para recibir su confirmación. n8n valida la cita en Supabase en solo 40 milisegundos, confirma al paciente al instante por Telegram, y en paralelo encola el trabajo en UiPath Orchestrator para el asentamiento físico en el ERP legado. Si el robot tardase 10 segundos, la experiencia del paciente sigue siendo inmediata.»</a:t>
+              <a:t>Un punto arquitectónico crucial es el desacoplamiento asíncrono: el paciente no debe esperar a que el robot abra el navegador del ERP para recibir su confirmación. n8n valida la cita en Supabase en solo 40 milisegundos, confirma al paciente al instante por Telegram, y en paralelo dispara directamente el proceso desatendido vía API StartJobs en UiPath Orchestrator. Al evitar el encolado tradicional y el polling, el robot impacta en el ERP de inmediato y la experiencia del paciente es instantánea.»</a:t>
             </a:r>
           </a:p>
         </p:txBody>
@@ -6016,7 +6016,7 @@
               </a:defRPr>
             </a:pPr>
             <a:r>
-              <a:t>• Arquitectura Tripartita: </a:t>
+              <a:t>• Agente ReAct Unificado: </a:t>
             </a:r>
             <a:r>
               <a:rPr b="0">
@@ -6024,7 +6024,7 @@
                   <a:srgbClr val="64748B"/>
                 </a:solidFill>
               </a:rPr>
-              <a:t>Agente Triaje/Clasificador, Gestor de Citas y RAG Clínico.</a:t>
+              <a:t>Sofía orquesta triaje, citas y RAG mediante 8 Tools deterministas.</a:t>
             </a:r>
           </a:p>
           <a:p>
@@ -6565,7 +6565,7 @@
               </a:defRPr>
             </a:pPr>
             <a:r>
-              <a:t>Normalizador, router condicional, agentes de triaje, citas y RAG.</a:t>
+              <a:t>Normalizador (RGPD/Typing), Agente Sofía y 8 Tools LangChain.</a:t>
             </a:r>
           </a:p>
         </p:txBody>
@@ -6880,7 +6880,7 @@
               </a:defRPr>
             </a:pPr>
             <a:r>
-              <a:t>1) Paciente solicita cita en Telegram  ➔  2) n8n valida en Supabase en 40 ms  ➔  3) Notifica confirmación inmediata al paciente  ➔  4) Encola la orden en UiPath Orchestrator  ➔  5) El robot asienta la cita en el Mock ERP sin bloquear la conversación.</a:t>
+              <a:t>1) Paciente solicita cita en Telegram  ➔  2) n8n valida en Supabase en 40 ms  ➔  3) Notifica confirmación inmediata al paciente  ➔  4) Dispara la API StartJobs de UiPath Orchestrator (sin esperas de cola)  ➔  5) El robot asienta la cita en el Mock ERP en tiempo real.</a:t>
             </a:r>
           </a:p>
         </p:txBody>
@@ -7063,7 +7063,7 @@
               </a:defRPr>
             </a:pPr>
             <a:r>
-              <a:t>• Intercepción de Botones: </a:t>
+              <a:t>• Firewall en Normalizador: </a:t>
             </a:r>
             <a:r>
               <a:rPr b="0">
@@ -7071,7 +7071,7 @@
                   <a:srgbClr val="64748B"/>
                 </a:solidFill>
               </a:rPr>
-              <a:t>El normalizador procesa CONFIRMAR y CANCELAR directamente, sin depender del LLM.</a:t>
+              <a:t>Intercepción de botones, compuerta previa RGPD y typing inmediato sin depender del LLM.</a:t>
             </a:r>
           </a:p>
           <a:p>

--- a/docs/Defensa_TFM_Clinica_Neclatrony.pptx
+++ b/docs/Defensa_TFM_Clinica_Neclatrony.pptx
@@ -1061,7 +1061,7 @@
           <a:p/>
           <a:p>
             <a:r>
-              <a:t>Un punto arquitectónico crucial es el desacoplamiento asíncrono: el paciente no debe esperar a que el robot abra el navegador del ERP para recibir su confirmación. n8n valida la cita en Supabase en solo 40 milisegundos, confirma al paciente al instante por Telegram, y en paralelo dispara directamente el proceso desatendido vía API StartJobs en UiPath Orchestrator. Al evitar el encolado tradicional y el polling, el robot impacta en el ERP de inmediato y la experiencia del paciente es instantánea.»</a:t>
+              <a:t>Un punto arquitectónico crucial es el desacoplamiento asíncrono: el paciente no debe esperar a que el robot abra el navegador del ERP para recibir su confirmación. n8n valida la cita en Supabase en solo 40 milisegundos, confirma al paciente al instante por Telegram, y en paralelo dispara directamente el proceso desatendido vía API StartJobs en UiPath Orchestrator. Al evitar el polling continuo de colas transaccionales y usar StartJobs, Orchestrator gestiona la concurrencia encolando automáticamente los trabajos en su Job Queue (Pending Jobs) y despachando al robot desatendido de forma ordenada. Esto garantiza respuesta al paciente en &lt; 15 segundos sin riesgo de saturación ni pérdida de transacciones.»</a:t>
             </a:r>
           </a:p>
         </p:txBody>
@@ -1168,7 +1168,7 @@
           </a:p>
           <a:p>
             <a:r>
-              <a:t>3. Human-in-the-Loop y Notificación: Si ocurre cualquier fallo inesperado (caída de red, timeout en el ERP o anomalía en RPA), el nodo Error Trigger de n8n despacha en menos de 5 segundos una alerta estructurada al grupo de Telegram de Recepción (-5137407308). La recepción recibe el nombre, DNI, teléfono y motivo del error, permitiendo resolver la incidencia en menos de 2 minutos sin perder nunca una cita.»</a:t>
+              <a:t>3. Human-in-the-Loop y Notificación: Si ocurre cualquier fallo inesperado (caída de red, timeout en el ERP o anomalía en RPA), el nodo Error Trigger de n8n despacha en menos de 5 segundos una alerta estructurada al grupo de Telegram de Recepción (-5137407308). En emergencias médicas, Sofía verifica el DNI para consultar los antecedentes en Supabase y entrega a las recepcionistas el contacto y cuadro clínico completo para un seguimiento inmediato y personalizado en menos de 2 minutos.»</a:t>
             </a:r>
           </a:p>
         </p:txBody>
@@ -8265,7 +8265,7 @@
               </a:defRPr>
             </a:pPr>
             <a:r>
-              <a:t>Triaje de código rojo, consejos de primeros auxilios y alerta a recepción.</a:t>
+              <a:t>Triaje de código rojo con verificación de DNI, primeros auxilios y alerta personalizada a recepción.</a:t>
             </a:r>
           </a:p>
           <a:p>
